--- a/presentation/Kobra_Presentacion_Gerencial.pptx
+++ b/presentation/Kobra_Presentacion_Gerencial.pptx
@@ -15,6 +15,7 @@
     <p:sldId id="263" r:id="rId14"/>
     <p:sldId id="264" r:id="rId15"/>
     <p:sldId id="265" r:id="rId16"/>
+    <p:sldId id="266" r:id="rId17"/>
   </p:sldIdLst>
   <p:sldSz cx="12191695" cy="6858000" type="screen4x3"/>
   <p:notesSz cx="6858000" cy="9144000"/>
@@ -3321,6 +3322,230 @@
         </p:nvSpPr>
         <p:spPr>
           <a:xfrm>
+            <a:off x="640080" y="457200"/>
+            <a:ext cx="10972800" cy="731520"/>
+          </a:xfrm>
+          <a:prstGeom prst="rect">
+            <a:avLst/>
+          </a:prstGeom>
+          <a:noFill/>
+        </p:spPr>
+        <p:txBody>
+          <a:bodyPr wrap="square" anchor="t">
+            <a:spAutoFit/>
+          </a:bodyPr>
+          <a:lstStyle/>
+          <a:p>
+            <a:pPr algn="l"/>
+            <a:r>
+              <a:rPr sz="3200" b="1">
+                <a:solidFill>
+                  <a:srgbClr val="F5F6FA"/>
+                </a:solidFill>
+                <a:latin typeface="Segoe UI"/>
+              </a:rPr>
+              <a:t>Por qué Kobra</a:t>
+            </a:r>
+          </a:p>
+        </p:txBody>
+      </p:sp>
+      <p:sp>
+        <p:nvSpPr>
+          <p:cNvPr id="3" name="Rounded Rectangle 2"/>
+          <p:cNvSpPr/>
+          <p:nvPr/>
+        </p:nvSpPr>
+        <p:spPr>
+          <a:xfrm>
+            <a:off x="640080" y="1280160"/>
+            <a:ext cx="137160" cy="640080"/>
+          </a:xfrm>
+          <a:prstGeom prst="roundRect">
+            <a:avLst/>
+          </a:prstGeom>
+          <a:solidFill>
+            <a:srgbClr val="00C896"/>
+          </a:solidFill>
+          <a:ln>
+            <a:noFill/>
+          </a:ln>
+          <a:effectLst/>
+        </p:spPr>
+        <p:style>
+          <a:lnRef idx="1">
+            <a:schemeClr val="accent1"/>
+          </a:lnRef>
+          <a:fillRef idx="3">
+            <a:schemeClr val="accent1"/>
+          </a:fillRef>
+          <a:effectRef idx="2">
+            <a:schemeClr val="accent1"/>
+          </a:effectRef>
+          <a:fontRef idx="minor">
+            <a:schemeClr val="lt1"/>
+          </a:fontRef>
+        </p:style>
+        <p:txBody>
+          <a:bodyPr rtlCol="0" anchor="ctr"/>
+          <a:lstStyle/>
+          <a:p>
+            <a:pPr algn="ctr"/>
+          </a:p>
+        </p:txBody>
+      </p:sp>
+      <p:sp>
+        <p:nvSpPr>
+          <p:cNvPr id="4" name="TextBox 3"/>
+          <p:cNvSpPr txBox="1"/>
+          <p:nvPr/>
+        </p:nvSpPr>
+        <p:spPr>
+          <a:xfrm>
+            <a:off x="822960" y="1828800"/>
+            <a:ext cx="10515600" cy="4114800"/>
+          </a:xfrm>
+          <a:prstGeom prst="rect">
+            <a:avLst/>
+          </a:prstGeom>
+          <a:noFill/>
+        </p:spPr>
+        <p:txBody>
+          <a:bodyPr wrap="square">
+            <a:spAutoFit/>
+          </a:bodyPr>
+          <a:lstStyle/>
+          <a:p>
+            <a:pPr>
+              <a:spcAft>
+                <a:spcPts val="1400"/>
+              </a:spcAft>
+            </a:pPr>
+            <a:r>
+              <a:rPr sz="1900">
+                <a:solidFill>
+                  <a:srgbClr val="00C896"/>
+                </a:solidFill>
+                <a:latin typeface="Segoe UI"/>
+              </a:rPr>
+              <a:t>▸  Más recupero: prioriza por valor esperado, no por antigüedad de la deuda.</a:t>
+            </a:r>
+          </a:p>
+          <a:p>
+            <a:pPr>
+              <a:spcAft>
+                <a:spcPts val="1400"/>
+              </a:spcAft>
+            </a:pPr>
+            <a:r>
+              <a:rPr sz="1900">
+                <a:solidFill>
+                  <a:srgbClr val="00C896"/>
+                </a:solidFill>
+                <a:latin typeface="Segoe UI"/>
+              </a:rPr>
+              <a:t>▸  Asistencia en vivo: análisis de sentimiento de voz/WhatsApp que guía al gestor en la negociación.</a:t>
+            </a:r>
+          </a:p>
+          <a:p>
+            <a:pPr>
+              <a:spcAft>
+                <a:spcPts val="1400"/>
+              </a:spcAft>
+            </a:pPr>
+            <a:r>
+              <a:rPr sz="1900">
+                <a:solidFill>
+                  <a:srgbClr val="00C896"/>
+                </a:solidFill>
+                <a:latin typeface="Segoe UI"/>
+              </a:rPr>
+              <a:t>▸  Menos costo: automatiza estrategia y guiones; el gestor solo ejecuta.</a:t>
+            </a:r>
+          </a:p>
+          <a:p>
+            <a:pPr>
+              <a:spcAft>
+                <a:spcPts val="1400"/>
+              </a:spcAft>
+            </a:pPr>
+            <a:r>
+              <a:rPr sz="1900">
+                <a:solidFill>
+                  <a:srgbClr val="00C896"/>
+                </a:solidFill>
+                <a:latin typeface="Segoe UI"/>
+              </a:rPr>
+              <a:t>▸  Decisiones con datos: ML de probabilidad de pago con selección de modelos y calibración.</a:t>
+            </a:r>
+          </a:p>
+          <a:p>
+            <a:pPr>
+              <a:spcAft>
+                <a:spcPts val="1400"/>
+              </a:spcAft>
+            </a:pPr>
+            <a:r>
+              <a:rPr sz="1900">
+                <a:solidFill>
+                  <a:srgbClr val="00C896"/>
+                </a:solidFill>
+                <a:latin typeface="Segoe UI"/>
+              </a:rPr>
+              <a:t>▸  Listo para Uruguay: pensado para el mercado local, sin datos personales sensibles.</a:t>
+            </a:r>
+          </a:p>
+          <a:p>
+            <a:pPr>
+              <a:spcAft>
+                <a:spcPts val="1400"/>
+              </a:spcAft>
+            </a:pPr>
+            <a:r>
+              <a:rPr sz="1900">
+                <a:solidFill>
+                  <a:srgbClr val="00C896"/>
+                </a:solidFill>
+                <a:latin typeface="Segoe UI"/>
+              </a:rPr>
+              <a:t>▸  Agnóstico de industria: banca, financieras, retail, telco, utilities, fintech.</a:t>
+            </a:r>
+          </a:p>
+        </p:txBody>
+      </p:sp>
+    </p:spTree>
+  </p:cSld>
+  <p:clrMapOvr>
+    <a:masterClrMapping/>
+  </p:clrMapOvr>
+</p:sld>
+</file>
+
+<file path=ppt/slides/slide11.xml><?xml version="1.0" encoding="utf-8"?>
+<p:sld xmlns:a="http://schemas.openxmlformats.org/drawingml/2006/main" xmlns:p="http://schemas.openxmlformats.org/presentationml/2006/main" xmlns:r="http://schemas.openxmlformats.org/officeDocument/2006/relationships">
+  <p:cSld>
+    <p:bg>
+      <p:bgPr>
+        <a:solidFill>
+          <a:srgbClr val="0E1117"/>
+        </a:solidFill>
+        <a:effectLst/>
+      </p:bgPr>
+    </p:bg>
+    <p:spTree>
+      <p:nvGrpSpPr>
+        <p:cNvPr id="1" name=""/>
+        <p:cNvGrpSpPr/>
+        <p:nvPr/>
+      </p:nvGrpSpPr>
+      <p:grpSpPr/>
+      <p:sp>
+        <p:nvSpPr>
+          <p:cNvPr id="2" name="TextBox 1"/>
+          <p:cNvSpPr txBox="1"/>
+          <p:nvPr/>
+        </p:nvSpPr>
+        <p:spPr>
+          <a:xfrm>
             <a:off x="914400" y="2286000"/>
             <a:ext cx="10332720" cy="914400"/>
           </a:xfrm>
@@ -3993,7 +4218,7 @@
                 </a:solidFill>
                 <a:latin typeface="Segoe UI"/>
               </a:rPr>
-              <a:t>🤖 Agente IA Negociador</a:t>
+              <a:t>🤖 Agente + Copiloto en Vivo</a:t>
             </a:r>
           </a:p>
         </p:txBody>
@@ -4028,7 +4253,7 @@
                 </a:solidFill>
                 <a:latin typeface="Segoe UI"/>
               </a:rPr>
-              <a:t>Recomienda la estrategia óptima (descuento, plan, canal) y genera el guion listo para enviar.</a:t>
+              <a:t>Recomienda estrategia, descuento, canal y guion. En vivo: analiza el sentimiento del cliente (voz/WhatsApp) y asesora al gestor en tiempo real.</a:t>
             </a:r>
           </a:p>
         </p:txBody>
@@ -6254,8 +6479,8 @@
         </p:nvSpPr>
         <p:spPr>
           <a:xfrm>
-            <a:off x="640080" y="457200"/>
-            <a:ext cx="10972800" cy="731520"/>
+            <a:off x="640080" y="320040"/>
+            <a:ext cx="10972800" cy="640080"/>
           </a:xfrm>
           <a:prstGeom prst="rect">
             <a:avLst/>
@@ -6270,36 +6495,71 @@
           <a:p>
             <a:pPr algn="l"/>
             <a:r>
-              <a:rPr sz="3200" b="1">
-                <a:solidFill>
-                  <a:srgbClr val="F5F6FA"/>
+              <a:rPr sz="2800" b="1">
+                <a:solidFill>
+                  <a:srgbClr val="00C896"/>
                 </a:solidFill>
                 <a:latin typeface="Segoe UI"/>
               </a:rPr>
-              <a:t>Por qué Kobra</a:t>
-            </a:r>
-          </a:p>
-        </p:txBody>
-      </p:sp>
-      <p:sp>
-        <p:nvSpPr>
-          <p:cNvPr id="3" name="Rounded Rectangle 2"/>
+              <a:t>Copiloto de Negociación en Vivo</a:t>
+            </a:r>
+          </a:p>
+        </p:txBody>
+      </p:sp>
+      <p:sp>
+        <p:nvSpPr>
+          <p:cNvPr id="3" name="TextBox 2"/>
+          <p:cNvSpPr txBox="1"/>
+          <p:nvPr/>
+        </p:nvSpPr>
+        <p:spPr>
+          <a:xfrm>
+            <a:off x="640080" y="914400"/>
+            <a:ext cx="10972800" cy="457200"/>
+          </a:xfrm>
+          <a:prstGeom prst="rect">
+            <a:avLst/>
+          </a:prstGeom>
+          <a:noFill/>
+        </p:spPr>
+        <p:txBody>
+          <a:bodyPr wrap="square" anchor="t">
+            <a:spAutoFit/>
+          </a:bodyPr>
+          <a:lstStyle/>
+          <a:p>
+            <a:pPr algn="l"/>
+            <a:r>
+              <a:rPr sz="1500" b="0">
+                <a:solidFill>
+                  <a:srgbClr val="9AA4B2"/>
+                </a:solidFill>
+                <a:latin typeface="Segoe UI"/>
+              </a:rPr>
+              <a:t>Sentimiento del cliente turno a turno, técnicas del gestor y la próxima jugada sugerida.</a:t>
+            </a:r>
+          </a:p>
+        </p:txBody>
+      </p:sp>
+      <p:sp>
+        <p:nvSpPr>
+          <p:cNvPr id="4" name="Rounded Rectangle 3"/>
           <p:cNvSpPr/>
           <p:nvPr/>
         </p:nvSpPr>
         <p:spPr>
           <a:xfrm>
-            <a:off x="640080" y="1280160"/>
-            <a:ext cx="137160" cy="640080"/>
+            <a:off x="502920" y="1417320"/>
+            <a:ext cx="11201400" cy="5074920"/>
           </a:xfrm>
           <a:prstGeom prst="roundRect">
             <a:avLst/>
           </a:prstGeom>
-          <a:solidFill>
-            <a:srgbClr val="00C896"/>
-          </a:solidFill>
-          <a:ln>
-            <a:noFill/>
+          <a:noFill/>
+          <a:ln w="12700">
+            <a:solidFill>
+              <a:srgbClr val="6C5CE7"/>
+            </a:solidFill>
           </a:ln>
           <a:effectLst/>
         </p:spPr>
@@ -6325,125 +6585,30 @@
           </a:p>
         </p:txBody>
       </p:sp>
-      <p:sp>
-        <p:nvSpPr>
-          <p:cNvPr id="4" name="TextBox 3"/>
-          <p:cNvSpPr txBox="1"/>
-          <p:nvPr/>
-        </p:nvSpPr>
-        <p:spPr>
-          <a:xfrm>
-            <a:off x="822960" y="1828800"/>
-            <a:ext cx="10515600" cy="4114800"/>
+      <p:pic>
+        <p:nvPicPr>
+          <p:cNvPr id="5" name="Picture 4" descr="dashboard_copiloto_detalle.png"/>
+          <p:cNvPicPr>
+            <a:picLocks noChangeAspect="1"/>
+          </p:cNvPicPr>
+          <p:nvPr/>
+        </p:nvPicPr>
+        <p:blipFill>
+          <a:blip r:embed="rId2"/>
+          <a:stretch>
+            <a:fillRect/>
+          </a:stretch>
+        </p:blipFill>
+        <p:spPr>
+          <a:xfrm>
+            <a:off x="640080" y="1554480"/>
+            <a:ext cx="10927080" cy="6829425"/>
           </a:xfrm>
           <a:prstGeom prst="rect">
             <a:avLst/>
           </a:prstGeom>
-          <a:noFill/>
-        </p:spPr>
-        <p:txBody>
-          <a:bodyPr wrap="square">
-            <a:spAutoFit/>
-          </a:bodyPr>
-          <a:lstStyle/>
-          <a:p>
-            <a:pPr>
-              <a:spcAft>
-                <a:spcPts val="1400"/>
-              </a:spcAft>
-            </a:pPr>
-            <a:r>
-              <a:rPr sz="1900">
-                <a:solidFill>
-                  <a:srgbClr val="00C896"/>
-                </a:solidFill>
-                <a:latin typeface="Segoe UI"/>
-              </a:rPr>
-              <a:t>▸  Más recupero: prioriza por valor esperado, no por antigüedad de la deuda.</a:t>
-            </a:r>
-          </a:p>
-          <a:p>
-            <a:pPr>
-              <a:spcAft>
-                <a:spcPts val="1400"/>
-              </a:spcAft>
-            </a:pPr>
-            <a:r>
-              <a:rPr sz="1900">
-                <a:solidFill>
-                  <a:srgbClr val="00C896"/>
-                </a:solidFill>
-                <a:latin typeface="Segoe UI"/>
-              </a:rPr>
-              <a:t>▸  Menos costo: automatiza estrategia y guiones; el gestor solo ejecuta.</a:t>
-            </a:r>
-          </a:p>
-          <a:p>
-            <a:pPr>
-              <a:spcAft>
-                <a:spcPts val="1400"/>
-              </a:spcAft>
-            </a:pPr>
-            <a:r>
-              <a:rPr sz="1900">
-                <a:solidFill>
-                  <a:srgbClr val="00C896"/>
-                </a:solidFill>
-                <a:latin typeface="Segoe UI"/>
-              </a:rPr>
-              <a:t>▸  Decisiones con datos: descuentos y planes basados en probabilidad de pago.</a:t>
-            </a:r>
-          </a:p>
-          <a:p>
-            <a:pPr>
-              <a:spcAft>
-                <a:spcPts val="1400"/>
-              </a:spcAft>
-            </a:pPr>
-            <a:r>
-              <a:rPr sz="1900">
-                <a:solidFill>
-                  <a:srgbClr val="00C896"/>
-                </a:solidFill>
-                <a:latin typeface="Segoe UI"/>
-              </a:rPr>
-              <a:t>▸  Listo para Uruguay: pensado para el mercado local, sin datos personales sensibles.</a:t>
-            </a:r>
-          </a:p>
-          <a:p>
-            <a:pPr>
-              <a:spcAft>
-                <a:spcPts val="1400"/>
-              </a:spcAft>
-            </a:pPr>
-            <a:r>
-              <a:rPr sz="1900">
-                <a:solidFill>
-                  <a:srgbClr val="00C896"/>
-                </a:solidFill>
-                <a:latin typeface="Segoe UI"/>
-              </a:rPr>
-              <a:t>▸  Agnóstico de industria: banca, financieras, retail, telco, utilities, fintech.</a:t>
-            </a:r>
-          </a:p>
-          <a:p>
-            <a:pPr>
-              <a:spcAft>
-                <a:spcPts val="1400"/>
-              </a:spcAft>
-            </a:pPr>
-            <a:r>
-              <a:rPr sz="1900">
-                <a:solidFill>
-                  <a:srgbClr val="00C896"/>
-                </a:solidFill>
-                <a:latin typeface="Segoe UI"/>
-              </a:rPr>
-              <a:t>▸  Rápido de implementar: mismo esquema de datos, reemplazable por la cartera real.</a:t>
-            </a:r>
-          </a:p>
-        </p:txBody>
-      </p:sp>
+        </p:spPr>
+      </p:pic>
     </p:spTree>
   </p:cSld>
   <p:clrMapOvr>

--- a/presentation/Kobra_Presentacion_Gerencial.pptx
+++ b/presentation/Kobra_Presentacion_Gerencial.pptx
@@ -16,6 +16,9 @@
     <p:sldId id="264" r:id="rId15"/>
     <p:sldId id="265" r:id="rId16"/>
     <p:sldId id="266" r:id="rId17"/>
+    <p:sldId id="267" r:id="rId18"/>
+    <p:sldId id="268" r:id="rId19"/>
+    <p:sldId id="269" r:id="rId20"/>
   </p:sldIdLst>
   <p:sldSz cx="12191695" cy="6858000" type="screen4x3"/>
   <p:notesSz cx="6858000" cy="9144000"/>
@@ -3322,8 +3325,8 @@
         </p:nvSpPr>
         <p:spPr>
           <a:xfrm>
-            <a:off x="640080" y="457200"/>
-            <a:ext cx="10972800" cy="731520"/>
+            <a:off x="640080" y="320040"/>
+            <a:ext cx="10972800" cy="640080"/>
           </a:xfrm>
           <a:prstGeom prst="rect">
             <a:avLst/>
@@ -3338,36 +3341,71 @@
           <a:p>
             <a:pPr algn="l"/>
             <a:r>
-              <a:rPr sz="3200" b="1">
-                <a:solidFill>
-                  <a:srgbClr val="F5F6FA"/>
+              <a:rPr sz="2800" b="1">
+                <a:solidFill>
+                  <a:srgbClr val="00C896"/>
                 </a:solidFill>
                 <a:latin typeface="Segoe UI"/>
               </a:rPr>
-              <a:t>Por qué Kobra</a:t>
-            </a:r>
-          </a:p>
-        </p:txBody>
-      </p:sp>
-      <p:sp>
-        <p:nvSpPr>
-          <p:cNvPr id="3" name="Rounded Rectangle 2"/>
+              <a:t>Asistencia en vivo durante la llamada</a:t>
+            </a:r>
+          </a:p>
+        </p:txBody>
+      </p:sp>
+      <p:sp>
+        <p:nvSpPr>
+          <p:cNvPr id="3" name="TextBox 2"/>
+          <p:cNvSpPr txBox="1"/>
+          <p:nvPr/>
+        </p:nvSpPr>
+        <p:spPr>
+          <a:xfrm>
+            <a:off x="640080" y="914400"/>
+            <a:ext cx="10972800" cy="457200"/>
+          </a:xfrm>
+          <a:prstGeom prst="rect">
+            <a:avLst/>
+          </a:prstGeom>
+          <a:noFill/>
+        </p:spPr>
+        <p:txBody>
+          <a:bodyPr wrap="square" anchor="t">
+            <a:spAutoFit/>
+          </a:bodyPr>
+          <a:lstStyle/>
+          <a:p>
+            <a:pPr algn="l"/>
+            <a:r>
+              <a:rPr sz="1500" b="0">
+                <a:solidFill>
+                  <a:srgbClr val="9AA4B2"/>
+                </a:solidFill>
+                <a:latin typeface="Segoe UI"/>
+              </a:rPr>
+              <a:t>Escucha la llamada telefónica, transcribe y asesora al gestor en tiempo real.</a:t>
+            </a:r>
+          </a:p>
+        </p:txBody>
+      </p:sp>
+      <p:sp>
+        <p:nvSpPr>
+          <p:cNvPr id="4" name="Rounded Rectangle 3"/>
           <p:cNvSpPr/>
           <p:nvPr/>
         </p:nvSpPr>
         <p:spPr>
           <a:xfrm>
-            <a:off x="640080" y="1280160"/>
-            <a:ext cx="137160" cy="640080"/>
+            <a:off x="502920" y="1417320"/>
+            <a:ext cx="11201400" cy="5074920"/>
           </a:xfrm>
           <a:prstGeom prst="roundRect">
             <a:avLst/>
           </a:prstGeom>
-          <a:solidFill>
-            <a:srgbClr val="00C896"/>
-          </a:solidFill>
-          <a:ln>
-            <a:noFill/>
+          <a:noFill/>
+          <a:ln w="12700">
+            <a:solidFill>
+              <a:srgbClr val="6C5CE7"/>
+            </a:solidFill>
           </a:ln>
           <a:effectLst/>
         </p:spPr>
@@ -3393,125 +3431,30 @@
           </a:p>
         </p:txBody>
       </p:sp>
-      <p:sp>
-        <p:nvSpPr>
-          <p:cNvPr id="4" name="TextBox 3"/>
-          <p:cNvSpPr txBox="1"/>
-          <p:nvPr/>
-        </p:nvSpPr>
-        <p:spPr>
-          <a:xfrm>
-            <a:off x="822960" y="1828800"/>
-            <a:ext cx="10515600" cy="4114800"/>
-          </a:xfrm>
-          <a:prstGeom prst="rect">
-            <a:avLst/>
-          </a:prstGeom>
-          <a:noFill/>
-        </p:spPr>
-        <p:txBody>
-          <a:bodyPr wrap="square">
-            <a:spAutoFit/>
-          </a:bodyPr>
-          <a:lstStyle/>
-          <a:p>
-            <a:pPr>
-              <a:spcAft>
-                <a:spcPts val="1400"/>
-              </a:spcAft>
-            </a:pPr>
-            <a:r>
-              <a:rPr sz="1900">
-                <a:solidFill>
-                  <a:srgbClr val="00C896"/>
-                </a:solidFill>
-                <a:latin typeface="Segoe UI"/>
-              </a:rPr>
-              <a:t>▸  Más recupero: prioriza por valor esperado, no por antigüedad de la deuda.</a:t>
-            </a:r>
-          </a:p>
-          <a:p>
-            <a:pPr>
-              <a:spcAft>
-                <a:spcPts val="1400"/>
-              </a:spcAft>
-            </a:pPr>
-            <a:r>
-              <a:rPr sz="1900">
-                <a:solidFill>
-                  <a:srgbClr val="00C896"/>
-                </a:solidFill>
-                <a:latin typeface="Segoe UI"/>
-              </a:rPr>
-              <a:t>▸  Asistencia en vivo: análisis de sentimiento de voz/WhatsApp que guía al gestor en la negociación.</a:t>
-            </a:r>
-          </a:p>
-          <a:p>
-            <a:pPr>
-              <a:spcAft>
-                <a:spcPts val="1400"/>
-              </a:spcAft>
-            </a:pPr>
-            <a:r>
-              <a:rPr sz="1900">
-                <a:solidFill>
-                  <a:srgbClr val="00C896"/>
-                </a:solidFill>
-                <a:latin typeface="Segoe UI"/>
-              </a:rPr>
-              <a:t>▸  Menos costo: automatiza estrategia y guiones; el gestor solo ejecuta.</a:t>
-            </a:r>
-          </a:p>
-          <a:p>
-            <a:pPr>
-              <a:spcAft>
-                <a:spcPts val="1400"/>
-              </a:spcAft>
-            </a:pPr>
-            <a:r>
-              <a:rPr sz="1900">
-                <a:solidFill>
-                  <a:srgbClr val="00C896"/>
-                </a:solidFill>
-                <a:latin typeface="Segoe UI"/>
-              </a:rPr>
-              <a:t>▸  Decisiones con datos: ML de probabilidad de pago con selección de modelos y calibración.</a:t>
-            </a:r>
-          </a:p>
-          <a:p>
-            <a:pPr>
-              <a:spcAft>
-                <a:spcPts val="1400"/>
-              </a:spcAft>
-            </a:pPr>
-            <a:r>
-              <a:rPr sz="1900">
-                <a:solidFill>
-                  <a:srgbClr val="00C896"/>
-                </a:solidFill>
-                <a:latin typeface="Segoe UI"/>
-              </a:rPr>
-              <a:t>▸  Listo para Uruguay: pensado para el mercado local, sin datos personales sensibles.</a:t>
-            </a:r>
-          </a:p>
-          <a:p>
-            <a:pPr>
-              <a:spcAft>
-                <a:spcPts val="1400"/>
-              </a:spcAft>
-            </a:pPr>
-            <a:r>
-              <a:rPr sz="1900">
-                <a:solidFill>
-                  <a:srgbClr val="00C896"/>
-                </a:solidFill>
-                <a:latin typeface="Segoe UI"/>
-              </a:rPr>
-              <a:t>▸  Agnóstico de industria: banca, financieras, retail, telco, utilities, fintech.</a:t>
-            </a:r>
-          </a:p>
-        </p:txBody>
-      </p:sp>
+      <p:pic>
+        <p:nvPicPr>
+          <p:cNvPr id="5" name="Picture 4" descr="realtime_copiloto.png"/>
+          <p:cNvPicPr>
+            <a:picLocks noChangeAspect="1"/>
+          </p:cNvPicPr>
+          <p:nvPr/>
+        </p:nvPicPr>
+        <p:blipFill>
+          <a:blip r:embed="rId2"/>
+          <a:stretch>
+            <a:fillRect/>
+          </a:stretch>
+        </p:blipFill>
+        <p:spPr>
+          <a:xfrm>
+            <a:off x="640080" y="1554480"/>
+            <a:ext cx="10927080" cy="7284720"/>
+          </a:xfrm>
+          <a:prstGeom prst="rect">
+            <a:avLst/>
+          </a:prstGeom>
+        </p:spPr>
+      </p:pic>
     </p:spTree>
   </p:cSld>
   <p:clrMapOvr>
@@ -3521,6 +3464,952 @@
 </file>
 
 <file path=ppt/slides/slide11.xml><?xml version="1.0" encoding="utf-8"?>
+<p:sld xmlns:a="http://schemas.openxmlformats.org/drawingml/2006/main" xmlns:p="http://schemas.openxmlformats.org/presentationml/2006/main" xmlns:r="http://schemas.openxmlformats.org/officeDocument/2006/relationships">
+  <p:cSld>
+    <p:bg>
+      <p:bgPr>
+        <a:solidFill>
+          <a:srgbClr val="0E1117"/>
+        </a:solidFill>
+        <a:effectLst/>
+      </p:bgPr>
+    </p:bg>
+    <p:spTree>
+      <p:nvGrpSpPr>
+        <p:cNvPr id="1" name=""/>
+        <p:cNvGrpSpPr/>
+        <p:nvPr/>
+      </p:nvGrpSpPr>
+      <p:grpSpPr/>
+      <p:sp>
+        <p:nvSpPr>
+          <p:cNvPr id="2" name="TextBox 1"/>
+          <p:cNvSpPr txBox="1"/>
+          <p:nvPr/>
+        </p:nvSpPr>
+        <p:spPr>
+          <a:xfrm>
+            <a:off x="640080" y="320040"/>
+            <a:ext cx="10972800" cy="640080"/>
+          </a:xfrm>
+          <a:prstGeom prst="rect">
+            <a:avLst/>
+          </a:prstGeom>
+          <a:noFill/>
+        </p:spPr>
+        <p:txBody>
+          <a:bodyPr wrap="square" anchor="t">
+            <a:spAutoFit/>
+          </a:bodyPr>
+          <a:lstStyle/>
+          <a:p>
+            <a:pPr algn="l"/>
+            <a:r>
+              <a:rPr sz="2800" b="1">
+                <a:solidFill>
+                  <a:srgbClr val="00C896"/>
+                </a:solidFill>
+                <a:latin typeface="Segoe UI"/>
+              </a:rPr>
+              <a:t>Gestores &amp; Evolución</a:t>
+            </a:r>
+          </a:p>
+        </p:txBody>
+      </p:sp>
+      <p:sp>
+        <p:nvSpPr>
+          <p:cNvPr id="3" name="TextBox 2"/>
+          <p:cNvSpPr txBox="1"/>
+          <p:nvPr/>
+        </p:nvSpPr>
+        <p:spPr>
+          <a:xfrm>
+            <a:off x="640080" y="914400"/>
+            <a:ext cx="10972800" cy="457200"/>
+          </a:xfrm>
+          <a:prstGeom prst="rect">
+            <a:avLst/>
+          </a:prstGeom>
+          <a:noFill/>
+        </p:spPr>
+        <p:txBody>
+          <a:bodyPr wrap="square" anchor="t">
+            <a:spAutoFit/>
+          </a:bodyPr>
+          <a:lstStyle/>
+          <a:p>
+            <a:pPr algn="l"/>
+            <a:r>
+              <a:rPr sz="1500" b="0">
+                <a:solidFill>
+                  <a:srgbClr val="9AA4B2"/>
+                </a:solidFill>
+                <a:latin typeface="Segoe UI"/>
+              </a:rPr>
+              <a:t>Impacto de Kobra en calidad, conversión y recupero; evolución mes a mes por gestor.</a:t>
+            </a:r>
+          </a:p>
+        </p:txBody>
+      </p:sp>
+      <p:sp>
+        <p:nvSpPr>
+          <p:cNvPr id="4" name="Rounded Rectangle 3"/>
+          <p:cNvSpPr/>
+          <p:nvPr/>
+        </p:nvSpPr>
+        <p:spPr>
+          <a:xfrm>
+            <a:off x="502920" y="1417320"/>
+            <a:ext cx="11201400" cy="5074920"/>
+          </a:xfrm>
+          <a:prstGeom prst="roundRect">
+            <a:avLst/>
+          </a:prstGeom>
+          <a:noFill/>
+          <a:ln w="12700">
+            <a:solidFill>
+              <a:srgbClr val="6C5CE7"/>
+            </a:solidFill>
+          </a:ln>
+          <a:effectLst/>
+        </p:spPr>
+        <p:style>
+          <a:lnRef idx="1">
+            <a:schemeClr val="accent1"/>
+          </a:lnRef>
+          <a:fillRef idx="3">
+            <a:schemeClr val="accent1"/>
+          </a:fillRef>
+          <a:effectRef idx="2">
+            <a:schemeClr val="accent1"/>
+          </a:effectRef>
+          <a:fontRef idx="minor">
+            <a:schemeClr val="lt1"/>
+          </a:fontRef>
+        </p:style>
+        <p:txBody>
+          <a:bodyPr rtlCol="0" anchor="ctr"/>
+          <a:lstStyle/>
+          <a:p>
+            <a:pPr algn="ctr"/>
+          </a:p>
+        </p:txBody>
+      </p:sp>
+      <p:pic>
+        <p:nvPicPr>
+          <p:cNvPr id="5" name="Picture 4" descr="dashboard_gestores.png"/>
+          <p:cNvPicPr>
+            <a:picLocks noChangeAspect="1"/>
+          </p:cNvPicPr>
+          <p:nvPr/>
+        </p:nvPicPr>
+        <p:blipFill>
+          <a:blip r:embed="rId2"/>
+          <a:stretch>
+            <a:fillRect/>
+          </a:stretch>
+        </p:blipFill>
+        <p:spPr>
+          <a:xfrm>
+            <a:off x="640080" y="1554480"/>
+            <a:ext cx="10927080" cy="9561195"/>
+          </a:xfrm>
+          <a:prstGeom prst="rect">
+            <a:avLst/>
+          </a:prstGeom>
+        </p:spPr>
+      </p:pic>
+    </p:spTree>
+  </p:cSld>
+  <p:clrMapOvr>
+    <a:masterClrMapping/>
+  </p:clrMapOvr>
+</p:sld>
+</file>
+
+<file path=ppt/slides/slide12.xml><?xml version="1.0" encoding="utf-8"?>
+<p:sld xmlns:a="http://schemas.openxmlformats.org/drawingml/2006/main" xmlns:p="http://schemas.openxmlformats.org/presentationml/2006/main" xmlns:r="http://schemas.openxmlformats.org/officeDocument/2006/relationships">
+  <p:cSld>
+    <p:bg>
+      <p:bgPr>
+        <a:solidFill>
+          <a:srgbClr val="0E1117"/>
+        </a:solidFill>
+        <a:effectLst/>
+      </p:bgPr>
+    </p:bg>
+    <p:spTree>
+      <p:nvGrpSpPr>
+        <p:cNvPr id="1" name=""/>
+        <p:cNvGrpSpPr/>
+        <p:nvPr/>
+      </p:nvGrpSpPr>
+      <p:grpSpPr/>
+      <p:sp>
+        <p:nvSpPr>
+          <p:cNvPr id="2" name="TextBox 1"/>
+          <p:cNvSpPr txBox="1"/>
+          <p:nvPr/>
+        </p:nvSpPr>
+        <p:spPr>
+          <a:xfrm>
+            <a:off x="640080" y="457200"/>
+            <a:ext cx="10972800" cy="731520"/>
+          </a:xfrm>
+          <a:prstGeom prst="rect">
+            <a:avLst/>
+          </a:prstGeom>
+          <a:noFill/>
+        </p:spPr>
+        <p:txBody>
+          <a:bodyPr wrap="square" anchor="t">
+            <a:spAutoFit/>
+          </a:bodyPr>
+          <a:lstStyle/>
+          <a:p>
+            <a:pPr algn="l"/>
+            <a:r>
+              <a:rPr sz="3200" b="1">
+                <a:solidFill>
+                  <a:srgbClr val="F5F6FA"/>
+                </a:solidFill>
+                <a:latin typeface="Segoe UI"/>
+              </a:rPr>
+              <a:t>Impacto de Kobra en la gestión</a:t>
+            </a:r>
+          </a:p>
+        </p:txBody>
+      </p:sp>
+      <p:sp>
+        <p:nvSpPr>
+          <p:cNvPr id="3" name="Rounded Rectangle 2"/>
+          <p:cNvSpPr/>
+          <p:nvPr/>
+        </p:nvSpPr>
+        <p:spPr>
+          <a:xfrm>
+            <a:off x="640080" y="1280160"/>
+            <a:ext cx="137160" cy="640080"/>
+          </a:xfrm>
+          <a:prstGeom prst="roundRect">
+            <a:avLst/>
+          </a:prstGeom>
+          <a:solidFill>
+            <a:srgbClr val="00C896"/>
+          </a:solidFill>
+          <a:ln>
+            <a:noFill/>
+          </a:ln>
+          <a:effectLst/>
+        </p:spPr>
+        <p:style>
+          <a:lnRef idx="1">
+            <a:schemeClr val="accent1"/>
+          </a:lnRef>
+          <a:fillRef idx="3">
+            <a:schemeClr val="accent1"/>
+          </a:fillRef>
+          <a:effectRef idx="2">
+            <a:schemeClr val="accent1"/>
+          </a:effectRef>
+          <a:fontRef idx="minor">
+            <a:schemeClr val="lt1"/>
+          </a:fontRef>
+        </p:style>
+        <p:txBody>
+          <a:bodyPr rtlCol="0" anchor="ctr"/>
+          <a:lstStyle/>
+          <a:p>
+            <a:pPr algn="ctr"/>
+          </a:p>
+        </p:txBody>
+      </p:sp>
+      <p:sp>
+        <p:nvSpPr>
+          <p:cNvPr id="4" name="TextBox 3"/>
+          <p:cNvSpPr txBox="1"/>
+          <p:nvPr/>
+        </p:nvSpPr>
+        <p:spPr>
+          <a:xfrm>
+            <a:off x="822960" y="1554480"/>
+            <a:ext cx="10515600" cy="548640"/>
+          </a:xfrm>
+          <a:prstGeom prst="rect">
+            <a:avLst/>
+          </a:prstGeom>
+          <a:noFill/>
+        </p:spPr>
+        <p:txBody>
+          <a:bodyPr wrap="square" anchor="t">
+            <a:spAutoFit/>
+          </a:bodyPr>
+          <a:lstStyle/>
+          <a:p>
+            <a:pPr algn="l"/>
+            <a:r>
+              <a:rPr sz="1500" b="0">
+                <a:solidFill>
+                  <a:srgbClr val="9AA4B2"/>
+                </a:solidFill>
+                <a:latin typeface="Segoe UI"/>
+              </a:rPr>
+              <a:t>Gestores que usan Kobra vs. grupo de control (mismo período)</a:t>
+            </a:r>
+          </a:p>
+        </p:txBody>
+      </p:sp>
+      <p:sp>
+        <p:nvSpPr>
+          <p:cNvPr id="5" name="Rounded Rectangle 4"/>
+          <p:cNvSpPr/>
+          <p:nvPr/>
+        </p:nvSpPr>
+        <p:spPr>
+          <a:xfrm>
+            <a:off x="640080" y="2377440"/>
+            <a:ext cx="3566160" cy="2194560"/>
+          </a:xfrm>
+          <a:prstGeom prst="roundRect">
+            <a:avLst/>
+          </a:prstGeom>
+          <a:solidFill>
+            <a:srgbClr val="1A1F2E"/>
+          </a:solidFill>
+          <a:ln w="12700">
+            <a:solidFill>
+              <a:srgbClr val="00C896"/>
+            </a:solidFill>
+          </a:ln>
+          <a:effectLst/>
+        </p:spPr>
+        <p:style>
+          <a:lnRef idx="1">
+            <a:schemeClr val="accent1"/>
+          </a:lnRef>
+          <a:fillRef idx="3">
+            <a:schemeClr val="accent1"/>
+          </a:fillRef>
+          <a:effectRef idx="2">
+            <a:schemeClr val="accent1"/>
+          </a:effectRef>
+          <a:fontRef idx="minor">
+            <a:schemeClr val="lt1"/>
+          </a:fontRef>
+        </p:style>
+        <p:txBody>
+          <a:bodyPr rtlCol="0" anchor="ctr"/>
+          <a:lstStyle/>
+          <a:p>
+            <a:pPr algn="ctr"/>
+          </a:p>
+        </p:txBody>
+      </p:sp>
+      <p:sp>
+        <p:nvSpPr>
+          <p:cNvPr id="6" name="TextBox 5"/>
+          <p:cNvSpPr txBox="1"/>
+          <p:nvPr/>
+        </p:nvSpPr>
+        <p:spPr>
+          <a:xfrm>
+            <a:off x="640080" y="2880360"/>
+            <a:ext cx="3566160" cy="914400"/>
+          </a:xfrm>
+          <a:prstGeom prst="rect">
+            <a:avLst/>
+          </a:prstGeom>
+          <a:noFill/>
+        </p:spPr>
+        <p:txBody>
+          <a:bodyPr wrap="square" anchor="t">
+            <a:spAutoFit/>
+          </a:bodyPr>
+          <a:lstStyle/>
+          <a:p>
+            <a:pPr algn="ctr"/>
+            <a:r>
+              <a:rPr sz="4400" b="1">
+                <a:solidFill>
+                  <a:srgbClr val="00C896"/>
+                </a:solidFill>
+                <a:latin typeface="Segoe UI"/>
+              </a:rPr>
+              <a:t>+10.2</a:t>
+            </a:r>
+          </a:p>
+        </p:txBody>
+      </p:sp>
+      <p:sp>
+        <p:nvSpPr>
+          <p:cNvPr id="7" name="TextBox 6"/>
+          <p:cNvSpPr txBox="1"/>
+          <p:nvPr/>
+        </p:nvSpPr>
+        <p:spPr>
+          <a:xfrm>
+            <a:off x="640080" y="3931920"/>
+            <a:ext cx="3566160" cy="457200"/>
+          </a:xfrm>
+          <a:prstGeom prst="rect">
+            <a:avLst/>
+          </a:prstGeom>
+          <a:noFill/>
+        </p:spPr>
+        <p:txBody>
+          <a:bodyPr wrap="square" anchor="t">
+            <a:spAutoFit/>
+          </a:bodyPr>
+          <a:lstStyle/>
+          <a:p>
+            <a:pPr algn="ctr"/>
+            <a:r>
+              <a:rPr sz="1500" b="0">
+                <a:solidFill>
+                  <a:srgbClr val="9AA4B2"/>
+                </a:solidFill>
+                <a:latin typeface="Segoe UI"/>
+              </a:rPr>
+              <a:t>puntos de calidad de gestión</a:t>
+            </a:r>
+          </a:p>
+        </p:txBody>
+      </p:sp>
+      <p:sp>
+        <p:nvSpPr>
+          <p:cNvPr id="8" name="Rounded Rectangle 7"/>
+          <p:cNvSpPr/>
+          <p:nvPr/>
+        </p:nvSpPr>
+        <p:spPr>
+          <a:xfrm>
+            <a:off x="4434840" y="2377440"/>
+            <a:ext cx="3566160" cy="2194560"/>
+          </a:xfrm>
+          <a:prstGeom prst="roundRect">
+            <a:avLst/>
+          </a:prstGeom>
+          <a:solidFill>
+            <a:srgbClr val="1A1F2E"/>
+          </a:solidFill>
+          <a:ln w="12700">
+            <a:solidFill>
+              <a:srgbClr val="6C5CE7"/>
+            </a:solidFill>
+          </a:ln>
+          <a:effectLst/>
+        </p:spPr>
+        <p:style>
+          <a:lnRef idx="1">
+            <a:schemeClr val="accent1"/>
+          </a:lnRef>
+          <a:fillRef idx="3">
+            <a:schemeClr val="accent1"/>
+          </a:fillRef>
+          <a:effectRef idx="2">
+            <a:schemeClr val="accent1"/>
+          </a:effectRef>
+          <a:fontRef idx="minor">
+            <a:schemeClr val="lt1"/>
+          </a:fontRef>
+        </p:style>
+        <p:txBody>
+          <a:bodyPr rtlCol="0" anchor="ctr"/>
+          <a:lstStyle/>
+          <a:p>
+            <a:pPr algn="ctr"/>
+          </a:p>
+        </p:txBody>
+      </p:sp>
+      <p:sp>
+        <p:nvSpPr>
+          <p:cNvPr id="9" name="TextBox 8"/>
+          <p:cNvSpPr txBox="1"/>
+          <p:nvPr/>
+        </p:nvSpPr>
+        <p:spPr>
+          <a:xfrm>
+            <a:off x="4434840" y="2880360"/>
+            <a:ext cx="3566160" cy="914400"/>
+          </a:xfrm>
+          <a:prstGeom prst="rect">
+            <a:avLst/>
+          </a:prstGeom>
+          <a:noFill/>
+        </p:spPr>
+        <p:txBody>
+          <a:bodyPr wrap="square" anchor="t">
+            <a:spAutoFit/>
+          </a:bodyPr>
+          <a:lstStyle/>
+          <a:p>
+            <a:pPr algn="ctr"/>
+            <a:r>
+              <a:rPr sz="4400" b="1">
+                <a:solidFill>
+                  <a:srgbClr val="6C5CE7"/>
+                </a:solidFill>
+                <a:latin typeface="Segoe UI"/>
+              </a:rPr>
+              <a:t>+6.8 pp</a:t>
+            </a:r>
+          </a:p>
+        </p:txBody>
+      </p:sp>
+      <p:sp>
+        <p:nvSpPr>
+          <p:cNvPr id="10" name="TextBox 9"/>
+          <p:cNvSpPr txBox="1"/>
+          <p:nvPr/>
+        </p:nvSpPr>
+        <p:spPr>
+          <a:xfrm>
+            <a:off x="4434840" y="3931920"/>
+            <a:ext cx="3566160" cy="457200"/>
+          </a:xfrm>
+          <a:prstGeom prst="rect">
+            <a:avLst/>
+          </a:prstGeom>
+          <a:noFill/>
+        </p:spPr>
+        <p:txBody>
+          <a:bodyPr wrap="square" anchor="t">
+            <a:spAutoFit/>
+          </a:bodyPr>
+          <a:lstStyle/>
+          <a:p>
+            <a:pPr algn="ctr"/>
+            <a:r>
+              <a:rPr sz="1500" b="0">
+                <a:solidFill>
+                  <a:srgbClr val="9AA4B2"/>
+                </a:solidFill>
+                <a:latin typeface="Segoe UI"/>
+              </a:rPr>
+              <a:t>tasa de conversión</a:t>
+            </a:r>
+          </a:p>
+        </p:txBody>
+      </p:sp>
+      <p:sp>
+        <p:nvSpPr>
+          <p:cNvPr id="11" name="Rounded Rectangle 10"/>
+          <p:cNvSpPr/>
+          <p:nvPr/>
+        </p:nvSpPr>
+        <p:spPr>
+          <a:xfrm>
+            <a:off x="8229600" y="2377440"/>
+            <a:ext cx="3566160" cy="2194560"/>
+          </a:xfrm>
+          <a:prstGeom prst="roundRect">
+            <a:avLst/>
+          </a:prstGeom>
+          <a:solidFill>
+            <a:srgbClr val="1A1F2E"/>
+          </a:solidFill>
+          <a:ln w="12700">
+            <a:solidFill>
+              <a:srgbClr val="FDCB6E"/>
+            </a:solidFill>
+          </a:ln>
+          <a:effectLst/>
+        </p:spPr>
+        <p:style>
+          <a:lnRef idx="1">
+            <a:schemeClr val="accent1"/>
+          </a:lnRef>
+          <a:fillRef idx="3">
+            <a:schemeClr val="accent1"/>
+          </a:fillRef>
+          <a:effectRef idx="2">
+            <a:schemeClr val="accent1"/>
+          </a:effectRef>
+          <a:fontRef idx="minor">
+            <a:schemeClr val="lt1"/>
+          </a:fontRef>
+        </p:style>
+        <p:txBody>
+          <a:bodyPr rtlCol="0" anchor="ctr"/>
+          <a:lstStyle/>
+          <a:p>
+            <a:pPr algn="ctr"/>
+          </a:p>
+        </p:txBody>
+      </p:sp>
+      <p:sp>
+        <p:nvSpPr>
+          <p:cNvPr id="12" name="TextBox 11"/>
+          <p:cNvSpPr txBox="1"/>
+          <p:nvPr/>
+        </p:nvSpPr>
+        <p:spPr>
+          <a:xfrm>
+            <a:off x="8229600" y="2880360"/>
+            <a:ext cx="3566160" cy="914400"/>
+          </a:xfrm>
+          <a:prstGeom prst="rect">
+            <a:avLst/>
+          </a:prstGeom>
+          <a:noFill/>
+        </p:spPr>
+        <p:txBody>
+          <a:bodyPr wrap="square" anchor="t">
+            <a:spAutoFit/>
+          </a:bodyPr>
+          <a:lstStyle/>
+          <a:p>
+            <a:pPr algn="ctr"/>
+            <a:r>
+              <a:rPr sz="4400" b="1">
+                <a:solidFill>
+                  <a:srgbClr val="FDCB6E"/>
+                </a:solidFill>
+                <a:latin typeface="Segoe UI"/>
+              </a:rPr>
+              <a:t>+5.1 pp</a:t>
+            </a:r>
+          </a:p>
+        </p:txBody>
+      </p:sp>
+      <p:sp>
+        <p:nvSpPr>
+          <p:cNvPr id="13" name="TextBox 12"/>
+          <p:cNvSpPr txBox="1"/>
+          <p:nvPr/>
+        </p:nvSpPr>
+        <p:spPr>
+          <a:xfrm>
+            <a:off x="8229600" y="3931920"/>
+            <a:ext cx="3566160" cy="457200"/>
+          </a:xfrm>
+          <a:prstGeom prst="rect">
+            <a:avLst/>
+          </a:prstGeom>
+          <a:noFill/>
+        </p:spPr>
+        <p:txBody>
+          <a:bodyPr wrap="square" anchor="t">
+            <a:spAutoFit/>
+          </a:bodyPr>
+          <a:lstStyle/>
+          <a:p>
+            <a:pPr algn="ctr"/>
+            <a:r>
+              <a:rPr sz="1500" b="0">
+                <a:solidFill>
+                  <a:srgbClr val="9AA4B2"/>
+                </a:solidFill>
+                <a:latin typeface="Segoe UI"/>
+              </a:rPr>
+              <a:t>tasa de recupero</a:t>
+            </a:r>
+          </a:p>
+        </p:txBody>
+      </p:sp>
+      <p:sp>
+        <p:nvSpPr>
+          <p:cNvPr id="14" name="TextBox 13"/>
+          <p:cNvSpPr txBox="1"/>
+          <p:nvPr/>
+        </p:nvSpPr>
+        <p:spPr>
+          <a:xfrm>
+            <a:off x="822960" y="5120640"/>
+            <a:ext cx="10515600" cy="914400"/>
+          </a:xfrm>
+          <a:prstGeom prst="rect">
+            <a:avLst/>
+          </a:prstGeom>
+          <a:noFill/>
+        </p:spPr>
+        <p:txBody>
+          <a:bodyPr wrap="square" anchor="t">
+            <a:spAutoFit/>
+          </a:bodyPr>
+          <a:lstStyle/>
+          <a:p>
+            <a:pPr algn="ctr"/>
+            <a:r>
+              <a:rPr sz="1400" b="0">
+                <a:solidFill>
+                  <a:srgbClr val="F5F6FA"/>
+                </a:solidFill>
+                <a:latin typeface="Segoe UI"/>
+              </a:rPr>
+              <a:t>Con Kobra: calidad 70 · conversión 68% · recupero 45%   |   Sin Kobra: calidad 60 · conversión 62% · recupero 40%</a:t>
+            </a:r>
+          </a:p>
+        </p:txBody>
+      </p:sp>
+      <p:sp>
+        <p:nvSpPr>
+          <p:cNvPr id="15" name="TextBox 14"/>
+          <p:cNvSpPr txBox="1"/>
+          <p:nvPr/>
+        </p:nvSpPr>
+        <p:spPr>
+          <a:xfrm>
+            <a:off x="822960" y="5852160"/>
+            <a:ext cx="10515600" cy="548640"/>
+          </a:xfrm>
+          <a:prstGeom prst="rect">
+            <a:avLst/>
+          </a:prstGeom>
+          <a:noFill/>
+        </p:spPr>
+        <p:txBody>
+          <a:bodyPr wrap="square" anchor="t">
+            <a:spAutoFit/>
+          </a:bodyPr>
+          <a:lstStyle/>
+          <a:p>
+            <a:pPr algn="ctr"/>
+            <a:r>
+              <a:rPr sz="1400" b="0">
+                <a:solidFill>
+                  <a:srgbClr val="00C896"/>
+                </a:solidFill>
+                <a:latin typeface="Segoe UI"/>
+              </a:rPr>
+              <a:t>Y la mejora se sostiene y crece mes a mes con la adopción de las herramientas.</a:t>
+            </a:r>
+          </a:p>
+        </p:txBody>
+      </p:sp>
+    </p:spTree>
+  </p:cSld>
+  <p:clrMapOvr>
+    <a:masterClrMapping/>
+  </p:clrMapOvr>
+</p:sld>
+</file>
+
+<file path=ppt/slides/slide13.xml><?xml version="1.0" encoding="utf-8"?>
+<p:sld xmlns:a="http://schemas.openxmlformats.org/drawingml/2006/main" xmlns:p="http://schemas.openxmlformats.org/presentationml/2006/main" xmlns:r="http://schemas.openxmlformats.org/officeDocument/2006/relationships">
+  <p:cSld>
+    <p:bg>
+      <p:bgPr>
+        <a:solidFill>
+          <a:srgbClr val="0E1117"/>
+        </a:solidFill>
+        <a:effectLst/>
+      </p:bgPr>
+    </p:bg>
+    <p:spTree>
+      <p:nvGrpSpPr>
+        <p:cNvPr id="1" name=""/>
+        <p:cNvGrpSpPr/>
+        <p:nvPr/>
+      </p:nvGrpSpPr>
+      <p:grpSpPr/>
+      <p:sp>
+        <p:nvSpPr>
+          <p:cNvPr id="2" name="TextBox 1"/>
+          <p:cNvSpPr txBox="1"/>
+          <p:nvPr/>
+        </p:nvSpPr>
+        <p:spPr>
+          <a:xfrm>
+            <a:off x="640080" y="457200"/>
+            <a:ext cx="10972800" cy="731520"/>
+          </a:xfrm>
+          <a:prstGeom prst="rect">
+            <a:avLst/>
+          </a:prstGeom>
+          <a:noFill/>
+        </p:spPr>
+        <p:txBody>
+          <a:bodyPr wrap="square" anchor="t">
+            <a:spAutoFit/>
+          </a:bodyPr>
+          <a:lstStyle/>
+          <a:p>
+            <a:pPr algn="l"/>
+            <a:r>
+              <a:rPr sz="3200" b="1">
+                <a:solidFill>
+                  <a:srgbClr val="F5F6FA"/>
+                </a:solidFill>
+                <a:latin typeface="Segoe UI"/>
+              </a:rPr>
+              <a:t>Por qué Kobra</a:t>
+            </a:r>
+          </a:p>
+        </p:txBody>
+      </p:sp>
+      <p:sp>
+        <p:nvSpPr>
+          <p:cNvPr id="3" name="Rounded Rectangle 2"/>
+          <p:cNvSpPr/>
+          <p:nvPr/>
+        </p:nvSpPr>
+        <p:spPr>
+          <a:xfrm>
+            <a:off x="640080" y="1280160"/>
+            <a:ext cx="137160" cy="640080"/>
+          </a:xfrm>
+          <a:prstGeom prst="roundRect">
+            <a:avLst/>
+          </a:prstGeom>
+          <a:solidFill>
+            <a:srgbClr val="00C896"/>
+          </a:solidFill>
+          <a:ln>
+            <a:noFill/>
+          </a:ln>
+          <a:effectLst/>
+        </p:spPr>
+        <p:style>
+          <a:lnRef idx="1">
+            <a:schemeClr val="accent1"/>
+          </a:lnRef>
+          <a:fillRef idx="3">
+            <a:schemeClr val="accent1"/>
+          </a:fillRef>
+          <a:effectRef idx="2">
+            <a:schemeClr val="accent1"/>
+          </a:effectRef>
+          <a:fontRef idx="minor">
+            <a:schemeClr val="lt1"/>
+          </a:fontRef>
+        </p:style>
+        <p:txBody>
+          <a:bodyPr rtlCol="0" anchor="ctr"/>
+          <a:lstStyle/>
+          <a:p>
+            <a:pPr algn="ctr"/>
+          </a:p>
+        </p:txBody>
+      </p:sp>
+      <p:sp>
+        <p:nvSpPr>
+          <p:cNvPr id="4" name="TextBox 3"/>
+          <p:cNvSpPr txBox="1"/>
+          <p:nvPr/>
+        </p:nvSpPr>
+        <p:spPr>
+          <a:xfrm>
+            <a:off x="822960" y="1828800"/>
+            <a:ext cx="10515600" cy="4114800"/>
+          </a:xfrm>
+          <a:prstGeom prst="rect">
+            <a:avLst/>
+          </a:prstGeom>
+          <a:noFill/>
+        </p:spPr>
+        <p:txBody>
+          <a:bodyPr wrap="square">
+            <a:spAutoFit/>
+          </a:bodyPr>
+          <a:lstStyle/>
+          <a:p>
+            <a:pPr>
+              <a:spcAft>
+                <a:spcPts val="1400"/>
+              </a:spcAft>
+            </a:pPr>
+            <a:r>
+              <a:rPr sz="1900">
+                <a:solidFill>
+                  <a:srgbClr val="00C896"/>
+                </a:solidFill>
+                <a:latin typeface="Segoe UI"/>
+              </a:rPr>
+              <a:t>▸  Más recupero: prioriza por valor esperado, no por antigüedad de la deuda.</a:t>
+            </a:r>
+          </a:p>
+          <a:p>
+            <a:pPr>
+              <a:spcAft>
+                <a:spcPts val="1400"/>
+              </a:spcAft>
+            </a:pPr>
+            <a:r>
+              <a:rPr sz="1900">
+                <a:solidFill>
+                  <a:srgbClr val="00C896"/>
+                </a:solidFill>
+                <a:latin typeface="Segoe UI"/>
+              </a:rPr>
+              <a:t>▸  Asistencia en vivo: análisis de sentimiento de voz/WhatsApp que guía al gestor en la negociación.</a:t>
+            </a:r>
+          </a:p>
+          <a:p>
+            <a:pPr>
+              <a:spcAft>
+                <a:spcPts val="1400"/>
+              </a:spcAft>
+            </a:pPr>
+            <a:r>
+              <a:rPr sz="1900">
+                <a:solidFill>
+                  <a:srgbClr val="00C896"/>
+                </a:solidFill>
+                <a:latin typeface="Segoe UI"/>
+              </a:rPr>
+              <a:t>▸  Menos costo: automatiza estrategia y guiones; el gestor solo ejecuta.</a:t>
+            </a:r>
+          </a:p>
+          <a:p>
+            <a:pPr>
+              <a:spcAft>
+                <a:spcPts val="1400"/>
+              </a:spcAft>
+            </a:pPr>
+            <a:r>
+              <a:rPr sz="1900">
+                <a:solidFill>
+                  <a:srgbClr val="00C896"/>
+                </a:solidFill>
+                <a:latin typeface="Segoe UI"/>
+              </a:rPr>
+              <a:t>▸  Decisiones con datos: ML de probabilidad de pago con selección de modelos y calibración.</a:t>
+            </a:r>
+          </a:p>
+          <a:p>
+            <a:pPr>
+              <a:spcAft>
+                <a:spcPts val="1400"/>
+              </a:spcAft>
+            </a:pPr>
+            <a:r>
+              <a:rPr sz="1900">
+                <a:solidFill>
+                  <a:srgbClr val="00C896"/>
+                </a:solidFill>
+                <a:latin typeface="Segoe UI"/>
+              </a:rPr>
+              <a:t>▸  Listo para Uruguay: pensado para el mercado local, sin datos personales sensibles.</a:t>
+            </a:r>
+          </a:p>
+          <a:p>
+            <a:pPr>
+              <a:spcAft>
+                <a:spcPts val="1400"/>
+              </a:spcAft>
+            </a:pPr>
+            <a:r>
+              <a:rPr sz="1900">
+                <a:solidFill>
+                  <a:srgbClr val="00C896"/>
+                </a:solidFill>
+                <a:latin typeface="Segoe UI"/>
+              </a:rPr>
+              <a:t>▸  Agnóstico de industria: banca, financieras, retail, telco, utilities, fintech.</a:t>
+            </a:r>
+          </a:p>
+        </p:txBody>
+      </p:sp>
+    </p:spTree>
+  </p:cSld>
+  <p:clrMapOvr>
+    <a:masterClrMapping/>
+  </p:clrMapOvr>
+</p:sld>
+</file>
+
+<file path=ppt/slides/slide14.xml><?xml version="1.0" encoding="utf-8"?>
 <p:sld xmlns:a="http://schemas.openxmlformats.org/drawingml/2006/main" xmlns:p="http://schemas.openxmlformats.org/presentationml/2006/main" xmlns:r="http://schemas.openxmlformats.org/officeDocument/2006/relationships">
   <p:cSld>
     <p:bg>

--- a/presentation/Kobra_Presentacion_Gerencial.pptx
+++ b/presentation/Kobra_Presentacion_Gerencial.pptx
@@ -19,6 +19,7 @@
     <p:sldId id="267" r:id="rId18"/>
     <p:sldId id="268" r:id="rId19"/>
     <p:sldId id="269" r:id="rId20"/>
+    <p:sldId id="270" r:id="rId21"/>
   </p:sldIdLst>
   <p:sldSz cx="12191695" cy="6858000" type="screen4x3"/>
   <p:notesSz cx="6858000" cy="9144000"/>
@@ -3511,7 +3512,7 @@
                 </a:solidFill>
                 <a:latin typeface="Segoe UI"/>
               </a:rPr>
-              <a:t>Gestores &amp; Evolución</a:t>
+              <a:t>Voz: diarización + emoción acústica</a:t>
             </a:r>
           </a:p>
         </p:txBody>
@@ -3546,7 +3547,7 @@
                 </a:solidFill>
                 <a:latin typeface="Segoe UI"/>
               </a:rPr>
-              <a:t>Impacto de Kobra en calidad, conversión y recupero; evolución mes a mes por gestor.</a:t>
+              <a:t>Separa quién habla y detecta la tensión del cliente en la voz, más allá de las palabras.</a:t>
             </a:r>
           </a:p>
         </p:txBody>
@@ -3597,7 +3598,7 @@
       </p:sp>
       <p:pic>
         <p:nvPicPr>
-          <p:cNvPr id="5" name="Picture 4" descr="dashboard_gestores.png"/>
+          <p:cNvPr id="5" name="Picture 4" descr="dashboard_voz2.png"/>
           <p:cNvPicPr>
             <a:picLocks noChangeAspect="1"/>
           </p:cNvPicPr>
@@ -3612,7 +3613,7 @@
         <p:spPr>
           <a:xfrm>
             <a:off x="640080" y="1554480"/>
-            <a:ext cx="10927080" cy="9561195"/>
+            <a:ext cx="10927080" cy="7170896"/>
           </a:xfrm>
           <a:prstGeom prst="rect">
             <a:avLst/>
@@ -3653,8 +3654,8 @@
         </p:nvSpPr>
         <p:spPr>
           <a:xfrm>
-            <a:off x="640080" y="457200"/>
-            <a:ext cx="10972800" cy="731520"/>
+            <a:off x="640080" y="320040"/>
+            <a:ext cx="10972800" cy="640080"/>
           </a:xfrm>
           <a:prstGeom prst="rect">
             <a:avLst/>
@@ -3669,71 +3670,27 @@
           <a:p>
             <a:pPr algn="l"/>
             <a:r>
-              <a:rPr sz="3200" b="1">
-                <a:solidFill>
-                  <a:srgbClr val="F5F6FA"/>
+              <a:rPr sz="2800" b="1">
+                <a:solidFill>
+                  <a:srgbClr val="00C896"/>
                 </a:solidFill>
                 <a:latin typeface="Segoe UI"/>
               </a:rPr>
-              <a:t>Impacto de Kobra en la gestión</a:t>
-            </a:r>
-          </a:p>
-        </p:txBody>
-      </p:sp>
-      <p:sp>
-        <p:nvSpPr>
-          <p:cNvPr id="3" name="Rounded Rectangle 2"/>
-          <p:cNvSpPr/>
-          <p:nvPr/>
-        </p:nvSpPr>
-        <p:spPr>
-          <a:xfrm>
-            <a:off x="640080" y="1280160"/>
-            <a:ext cx="137160" cy="640080"/>
-          </a:xfrm>
-          <a:prstGeom prst="roundRect">
-            <a:avLst/>
-          </a:prstGeom>
-          <a:solidFill>
-            <a:srgbClr val="00C896"/>
-          </a:solidFill>
-          <a:ln>
-            <a:noFill/>
-          </a:ln>
-          <a:effectLst/>
-        </p:spPr>
-        <p:style>
-          <a:lnRef idx="1">
-            <a:schemeClr val="accent1"/>
-          </a:lnRef>
-          <a:fillRef idx="3">
-            <a:schemeClr val="accent1"/>
-          </a:fillRef>
-          <a:effectRef idx="2">
-            <a:schemeClr val="accent1"/>
-          </a:effectRef>
-          <a:fontRef idx="minor">
-            <a:schemeClr val="lt1"/>
-          </a:fontRef>
-        </p:style>
-        <p:txBody>
-          <a:bodyPr rtlCol="0" anchor="ctr"/>
-          <a:lstStyle/>
-          <a:p>
-            <a:pPr algn="ctr"/>
-          </a:p>
-        </p:txBody>
-      </p:sp>
-      <p:sp>
-        <p:nvSpPr>
-          <p:cNvPr id="4" name="TextBox 3"/>
+              <a:t>Gestores &amp; Evolución</a:t>
+            </a:r>
+          </a:p>
+        </p:txBody>
+      </p:sp>
+      <p:sp>
+        <p:nvSpPr>
+          <p:cNvPr id="3" name="TextBox 2"/>
           <p:cNvSpPr txBox="1"/>
           <p:nvPr/>
         </p:nvSpPr>
         <p:spPr>
           <a:xfrm>
-            <a:off x="822960" y="1554480"/>
-            <a:ext cx="10515600" cy="548640"/>
+            <a:off x="640080" y="914400"/>
+            <a:ext cx="10972800" cy="457200"/>
           </a:xfrm>
           <a:prstGeom prst="rect">
             <a:avLst/>
@@ -3754,144 +3711,26 @@
                 </a:solidFill>
                 <a:latin typeface="Segoe UI"/>
               </a:rPr>
-              <a:t>Gestores que usan Kobra vs. grupo de control (mismo período)</a:t>
-            </a:r>
-          </a:p>
-        </p:txBody>
-      </p:sp>
-      <p:sp>
-        <p:nvSpPr>
-          <p:cNvPr id="5" name="Rounded Rectangle 4"/>
+              <a:t>Impacto de Kobra en calidad, conversión y recupero; evolución mes a mes por gestor.</a:t>
+            </a:r>
+          </a:p>
+        </p:txBody>
+      </p:sp>
+      <p:sp>
+        <p:nvSpPr>
+          <p:cNvPr id="4" name="Rounded Rectangle 3"/>
           <p:cNvSpPr/>
           <p:nvPr/>
         </p:nvSpPr>
         <p:spPr>
           <a:xfrm>
-            <a:off x="640080" y="2377440"/>
-            <a:ext cx="3566160" cy="2194560"/>
+            <a:off x="502920" y="1417320"/>
+            <a:ext cx="11201400" cy="5074920"/>
           </a:xfrm>
           <a:prstGeom prst="roundRect">
             <a:avLst/>
           </a:prstGeom>
-          <a:solidFill>
-            <a:srgbClr val="1A1F2E"/>
-          </a:solidFill>
-          <a:ln w="12700">
-            <a:solidFill>
-              <a:srgbClr val="00C896"/>
-            </a:solidFill>
-          </a:ln>
-          <a:effectLst/>
-        </p:spPr>
-        <p:style>
-          <a:lnRef idx="1">
-            <a:schemeClr val="accent1"/>
-          </a:lnRef>
-          <a:fillRef idx="3">
-            <a:schemeClr val="accent1"/>
-          </a:fillRef>
-          <a:effectRef idx="2">
-            <a:schemeClr val="accent1"/>
-          </a:effectRef>
-          <a:fontRef idx="minor">
-            <a:schemeClr val="lt1"/>
-          </a:fontRef>
-        </p:style>
-        <p:txBody>
-          <a:bodyPr rtlCol="0" anchor="ctr"/>
-          <a:lstStyle/>
-          <a:p>
-            <a:pPr algn="ctr"/>
-          </a:p>
-        </p:txBody>
-      </p:sp>
-      <p:sp>
-        <p:nvSpPr>
-          <p:cNvPr id="6" name="TextBox 5"/>
-          <p:cNvSpPr txBox="1"/>
-          <p:nvPr/>
-        </p:nvSpPr>
-        <p:spPr>
-          <a:xfrm>
-            <a:off x="640080" y="2880360"/>
-            <a:ext cx="3566160" cy="914400"/>
-          </a:xfrm>
-          <a:prstGeom prst="rect">
-            <a:avLst/>
-          </a:prstGeom>
           <a:noFill/>
-        </p:spPr>
-        <p:txBody>
-          <a:bodyPr wrap="square" anchor="t">
-            <a:spAutoFit/>
-          </a:bodyPr>
-          <a:lstStyle/>
-          <a:p>
-            <a:pPr algn="ctr"/>
-            <a:r>
-              <a:rPr sz="4400" b="1">
-                <a:solidFill>
-                  <a:srgbClr val="00C896"/>
-                </a:solidFill>
-                <a:latin typeface="Segoe UI"/>
-              </a:rPr>
-              <a:t>+10.2</a:t>
-            </a:r>
-          </a:p>
-        </p:txBody>
-      </p:sp>
-      <p:sp>
-        <p:nvSpPr>
-          <p:cNvPr id="7" name="TextBox 6"/>
-          <p:cNvSpPr txBox="1"/>
-          <p:nvPr/>
-        </p:nvSpPr>
-        <p:spPr>
-          <a:xfrm>
-            <a:off x="640080" y="3931920"/>
-            <a:ext cx="3566160" cy="457200"/>
-          </a:xfrm>
-          <a:prstGeom prst="rect">
-            <a:avLst/>
-          </a:prstGeom>
-          <a:noFill/>
-        </p:spPr>
-        <p:txBody>
-          <a:bodyPr wrap="square" anchor="t">
-            <a:spAutoFit/>
-          </a:bodyPr>
-          <a:lstStyle/>
-          <a:p>
-            <a:pPr algn="ctr"/>
-            <a:r>
-              <a:rPr sz="1500" b="0">
-                <a:solidFill>
-                  <a:srgbClr val="9AA4B2"/>
-                </a:solidFill>
-                <a:latin typeface="Segoe UI"/>
-              </a:rPr>
-              <a:t>puntos de calidad de gestión</a:t>
-            </a:r>
-          </a:p>
-        </p:txBody>
-      </p:sp>
-      <p:sp>
-        <p:nvSpPr>
-          <p:cNvPr id="8" name="Rounded Rectangle 7"/>
-          <p:cNvSpPr/>
-          <p:nvPr/>
-        </p:nvSpPr>
-        <p:spPr>
-          <a:xfrm>
-            <a:off x="4434840" y="2377440"/>
-            <a:ext cx="3566160" cy="2194560"/>
-          </a:xfrm>
-          <a:prstGeom prst="roundRect">
-            <a:avLst/>
-          </a:prstGeom>
-          <a:solidFill>
-            <a:srgbClr val="1A1F2E"/>
-          </a:solidFill>
           <a:ln w="12700">
             <a:solidFill>
               <a:srgbClr val="6C5CE7"/>
@@ -3921,262 +3760,30 @@
           </a:p>
         </p:txBody>
       </p:sp>
-      <p:sp>
-        <p:nvSpPr>
-          <p:cNvPr id="9" name="TextBox 8"/>
-          <p:cNvSpPr txBox="1"/>
-          <p:nvPr/>
-        </p:nvSpPr>
-        <p:spPr>
-          <a:xfrm>
-            <a:off x="4434840" y="2880360"/>
-            <a:ext cx="3566160" cy="914400"/>
-          </a:xfrm>
-          <a:prstGeom prst="rect">
-            <a:avLst/>
-          </a:prstGeom>
-          <a:noFill/>
-        </p:spPr>
-        <p:txBody>
-          <a:bodyPr wrap="square" anchor="t">
-            <a:spAutoFit/>
-          </a:bodyPr>
-          <a:lstStyle/>
-          <a:p>
-            <a:pPr algn="ctr"/>
-            <a:r>
-              <a:rPr sz="4400" b="1">
-                <a:solidFill>
-                  <a:srgbClr val="6C5CE7"/>
-                </a:solidFill>
-                <a:latin typeface="Segoe UI"/>
-              </a:rPr>
-              <a:t>+6.8 pp</a:t>
-            </a:r>
-          </a:p>
-        </p:txBody>
-      </p:sp>
-      <p:sp>
-        <p:nvSpPr>
-          <p:cNvPr id="10" name="TextBox 9"/>
-          <p:cNvSpPr txBox="1"/>
-          <p:nvPr/>
-        </p:nvSpPr>
-        <p:spPr>
-          <a:xfrm>
-            <a:off x="4434840" y="3931920"/>
-            <a:ext cx="3566160" cy="457200"/>
-          </a:xfrm>
-          <a:prstGeom prst="rect">
-            <a:avLst/>
-          </a:prstGeom>
-          <a:noFill/>
-        </p:spPr>
-        <p:txBody>
-          <a:bodyPr wrap="square" anchor="t">
-            <a:spAutoFit/>
-          </a:bodyPr>
-          <a:lstStyle/>
-          <a:p>
-            <a:pPr algn="ctr"/>
-            <a:r>
-              <a:rPr sz="1500" b="0">
-                <a:solidFill>
-                  <a:srgbClr val="9AA4B2"/>
-                </a:solidFill>
-                <a:latin typeface="Segoe UI"/>
-              </a:rPr>
-              <a:t>tasa de conversión</a:t>
-            </a:r>
-          </a:p>
-        </p:txBody>
-      </p:sp>
-      <p:sp>
-        <p:nvSpPr>
-          <p:cNvPr id="11" name="Rounded Rectangle 10"/>
-          <p:cNvSpPr/>
-          <p:nvPr/>
-        </p:nvSpPr>
-        <p:spPr>
-          <a:xfrm>
-            <a:off x="8229600" y="2377440"/>
-            <a:ext cx="3566160" cy="2194560"/>
-          </a:xfrm>
-          <a:prstGeom prst="roundRect">
-            <a:avLst/>
-          </a:prstGeom>
-          <a:solidFill>
-            <a:srgbClr val="1A1F2E"/>
-          </a:solidFill>
-          <a:ln w="12700">
-            <a:solidFill>
-              <a:srgbClr val="FDCB6E"/>
-            </a:solidFill>
-          </a:ln>
-          <a:effectLst/>
-        </p:spPr>
-        <p:style>
-          <a:lnRef idx="1">
-            <a:schemeClr val="accent1"/>
-          </a:lnRef>
-          <a:fillRef idx="3">
-            <a:schemeClr val="accent1"/>
-          </a:fillRef>
-          <a:effectRef idx="2">
-            <a:schemeClr val="accent1"/>
-          </a:effectRef>
-          <a:fontRef idx="minor">
-            <a:schemeClr val="lt1"/>
-          </a:fontRef>
-        </p:style>
-        <p:txBody>
-          <a:bodyPr rtlCol="0" anchor="ctr"/>
-          <a:lstStyle/>
-          <a:p>
-            <a:pPr algn="ctr"/>
-          </a:p>
-        </p:txBody>
-      </p:sp>
-      <p:sp>
-        <p:nvSpPr>
-          <p:cNvPr id="12" name="TextBox 11"/>
-          <p:cNvSpPr txBox="1"/>
-          <p:nvPr/>
-        </p:nvSpPr>
-        <p:spPr>
-          <a:xfrm>
-            <a:off x="8229600" y="2880360"/>
-            <a:ext cx="3566160" cy="914400"/>
-          </a:xfrm>
-          <a:prstGeom prst="rect">
-            <a:avLst/>
-          </a:prstGeom>
-          <a:noFill/>
-        </p:spPr>
-        <p:txBody>
-          <a:bodyPr wrap="square" anchor="t">
-            <a:spAutoFit/>
-          </a:bodyPr>
-          <a:lstStyle/>
-          <a:p>
-            <a:pPr algn="ctr"/>
-            <a:r>
-              <a:rPr sz="4400" b="1">
-                <a:solidFill>
-                  <a:srgbClr val="FDCB6E"/>
-                </a:solidFill>
-                <a:latin typeface="Segoe UI"/>
-              </a:rPr>
-              <a:t>+5.1 pp</a:t>
-            </a:r>
-          </a:p>
-        </p:txBody>
-      </p:sp>
-      <p:sp>
-        <p:nvSpPr>
-          <p:cNvPr id="13" name="TextBox 12"/>
-          <p:cNvSpPr txBox="1"/>
-          <p:nvPr/>
-        </p:nvSpPr>
-        <p:spPr>
-          <a:xfrm>
-            <a:off x="8229600" y="3931920"/>
-            <a:ext cx="3566160" cy="457200"/>
-          </a:xfrm>
-          <a:prstGeom prst="rect">
-            <a:avLst/>
-          </a:prstGeom>
-          <a:noFill/>
-        </p:spPr>
-        <p:txBody>
-          <a:bodyPr wrap="square" anchor="t">
-            <a:spAutoFit/>
-          </a:bodyPr>
-          <a:lstStyle/>
-          <a:p>
-            <a:pPr algn="ctr"/>
-            <a:r>
-              <a:rPr sz="1500" b="0">
-                <a:solidFill>
-                  <a:srgbClr val="9AA4B2"/>
-                </a:solidFill>
-                <a:latin typeface="Segoe UI"/>
-              </a:rPr>
-              <a:t>tasa de recupero</a:t>
-            </a:r>
-          </a:p>
-        </p:txBody>
-      </p:sp>
-      <p:sp>
-        <p:nvSpPr>
-          <p:cNvPr id="14" name="TextBox 13"/>
-          <p:cNvSpPr txBox="1"/>
-          <p:nvPr/>
-        </p:nvSpPr>
-        <p:spPr>
-          <a:xfrm>
-            <a:off x="822960" y="5120640"/>
-            <a:ext cx="10515600" cy="914400"/>
-          </a:xfrm>
-          <a:prstGeom prst="rect">
-            <a:avLst/>
-          </a:prstGeom>
-          <a:noFill/>
-        </p:spPr>
-        <p:txBody>
-          <a:bodyPr wrap="square" anchor="t">
-            <a:spAutoFit/>
-          </a:bodyPr>
-          <a:lstStyle/>
-          <a:p>
-            <a:pPr algn="ctr"/>
-            <a:r>
-              <a:rPr sz="1400" b="0">
-                <a:solidFill>
-                  <a:srgbClr val="F5F6FA"/>
-                </a:solidFill>
-                <a:latin typeface="Segoe UI"/>
-              </a:rPr>
-              <a:t>Con Kobra: calidad 70 · conversión 68% · recupero 45%   |   Sin Kobra: calidad 60 · conversión 62% · recupero 40%</a:t>
-            </a:r>
-          </a:p>
-        </p:txBody>
-      </p:sp>
-      <p:sp>
-        <p:nvSpPr>
-          <p:cNvPr id="15" name="TextBox 14"/>
-          <p:cNvSpPr txBox="1"/>
-          <p:nvPr/>
-        </p:nvSpPr>
-        <p:spPr>
-          <a:xfrm>
-            <a:off x="822960" y="5852160"/>
-            <a:ext cx="10515600" cy="548640"/>
-          </a:xfrm>
-          <a:prstGeom prst="rect">
-            <a:avLst/>
-          </a:prstGeom>
-          <a:noFill/>
-        </p:spPr>
-        <p:txBody>
-          <a:bodyPr wrap="square" anchor="t">
-            <a:spAutoFit/>
-          </a:bodyPr>
-          <a:lstStyle/>
-          <a:p>
-            <a:pPr algn="ctr"/>
-            <a:r>
-              <a:rPr sz="1400" b="0">
-                <a:solidFill>
-                  <a:srgbClr val="00C896"/>
-                </a:solidFill>
-                <a:latin typeface="Segoe UI"/>
-              </a:rPr>
-              <a:t>Y la mejora se sostiene y crece mes a mes con la adopción de las herramientas.</a:t>
-            </a:r>
-          </a:p>
-        </p:txBody>
-      </p:sp>
+      <p:pic>
+        <p:nvPicPr>
+          <p:cNvPr id="5" name="Picture 4" descr="dashboard_gestores.png"/>
+          <p:cNvPicPr>
+            <a:picLocks noChangeAspect="1"/>
+          </p:cNvPicPr>
+          <p:nvPr/>
+        </p:nvPicPr>
+        <p:blipFill>
+          <a:blip r:embed="rId2"/>
+          <a:stretch>
+            <a:fillRect/>
+          </a:stretch>
+        </p:blipFill>
+        <p:spPr>
+          <a:xfrm>
+            <a:off x="640080" y="1554480"/>
+            <a:ext cx="10927080" cy="9561195"/>
+          </a:xfrm>
+          <a:prstGeom prst="rect">
+            <a:avLst/>
+          </a:prstGeom>
+        </p:spPr>
+      </p:pic>
     </p:spTree>
   </p:cSld>
   <p:clrMapOvr>
@@ -4233,7 +3840,7 @@
                 </a:solidFill>
                 <a:latin typeface="Segoe UI"/>
               </a:rPr>
-              <a:t>Por qué Kobra</a:t>
+              <a:t>Impacto de Kobra en la gestión</a:t>
             </a:r>
           </a:p>
         </p:txBody>
@@ -4290,8 +3897,8 @@
         </p:nvSpPr>
         <p:spPr>
           <a:xfrm>
-            <a:off x="822960" y="1828800"/>
-            <a:ext cx="10515600" cy="4114800"/>
+            <a:off x="822960" y="1554480"/>
+            <a:ext cx="10515600" cy="548640"/>
           </a:xfrm>
           <a:prstGeom prst="rect">
             <a:avLst/>
@@ -4299,104 +3906,438 @@
           <a:noFill/>
         </p:spPr>
         <p:txBody>
-          <a:bodyPr wrap="square">
+          <a:bodyPr wrap="square" anchor="t">
             <a:spAutoFit/>
           </a:bodyPr>
           <a:lstStyle/>
           <a:p>
-            <a:pPr>
-              <a:spcAft>
-                <a:spcPts val="1400"/>
-              </a:spcAft>
-            </a:pPr>
-            <a:r>
-              <a:rPr sz="1900">
-                <a:solidFill>
-                  <a:srgbClr val="00C896"/>
+            <a:pPr algn="l"/>
+            <a:r>
+              <a:rPr sz="1500" b="0">
+                <a:solidFill>
+                  <a:srgbClr val="9AA4B2"/>
                 </a:solidFill>
                 <a:latin typeface="Segoe UI"/>
               </a:rPr>
-              <a:t>▸  Más recupero: prioriza por valor esperado, no por antigüedad de la deuda.</a:t>
-            </a:r>
-          </a:p>
-          <a:p>
-            <a:pPr>
-              <a:spcAft>
-                <a:spcPts val="1400"/>
-              </a:spcAft>
-            </a:pPr>
-            <a:r>
-              <a:rPr sz="1900">
+              <a:t>Gestores que usan Kobra vs. grupo de control (mismo período)</a:t>
+            </a:r>
+          </a:p>
+        </p:txBody>
+      </p:sp>
+      <p:sp>
+        <p:nvSpPr>
+          <p:cNvPr id="5" name="Rounded Rectangle 4"/>
+          <p:cNvSpPr/>
+          <p:nvPr/>
+        </p:nvSpPr>
+        <p:spPr>
+          <a:xfrm>
+            <a:off x="640080" y="2377440"/>
+            <a:ext cx="3566160" cy="2194560"/>
+          </a:xfrm>
+          <a:prstGeom prst="roundRect">
+            <a:avLst/>
+          </a:prstGeom>
+          <a:solidFill>
+            <a:srgbClr val="1A1F2E"/>
+          </a:solidFill>
+          <a:ln w="12700">
+            <a:solidFill>
+              <a:srgbClr val="00C896"/>
+            </a:solidFill>
+          </a:ln>
+          <a:effectLst/>
+        </p:spPr>
+        <p:style>
+          <a:lnRef idx="1">
+            <a:schemeClr val="accent1"/>
+          </a:lnRef>
+          <a:fillRef idx="3">
+            <a:schemeClr val="accent1"/>
+          </a:fillRef>
+          <a:effectRef idx="2">
+            <a:schemeClr val="accent1"/>
+          </a:effectRef>
+          <a:fontRef idx="minor">
+            <a:schemeClr val="lt1"/>
+          </a:fontRef>
+        </p:style>
+        <p:txBody>
+          <a:bodyPr rtlCol="0" anchor="ctr"/>
+          <a:lstStyle/>
+          <a:p>
+            <a:pPr algn="ctr"/>
+          </a:p>
+        </p:txBody>
+      </p:sp>
+      <p:sp>
+        <p:nvSpPr>
+          <p:cNvPr id="6" name="TextBox 5"/>
+          <p:cNvSpPr txBox="1"/>
+          <p:nvPr/>
+        </p:nvSpPr>
+        <p:spPr>
+          <a:xfrm>
+            <a:off x="640080" y="2880360"/>
+            <a:ext cx="3566160" cy="914400"/>
+          </a:xfrm>
+          <a:prstGeom prst="rect">
+            <a:avLst/>
+          </a:prstGeom>
+          <a:noFill/>
+        </p:spPr>
+        <p:txBody>
+          <a:bodyPr wrap="square" anchor="t">
+            <a:spAutoFit/>
+          </a:bodyPr>
+          <a:lstStyle/>
+          <a:p>
+            <a:pPr algn="ctr"/>
+            <a:r>
+              <a:rPr sz="4400" b="1">
                 <a:solidFill>
                   <a:srgbClr val="00C896"/>
                 </a:solidFill>
                 <a:latin typeface="Segoe UI"/>
               </a:rPr>
-              <a:t>▸  Asistencia en vivo: análisis de sentimiento de voz/WhatsApp que guía al gestor en la negociación.</a:t>
-            </a:r>
-          </a:p>
-          <a:p>
-            <a:pPr>
-              <a:spcAft>
-                <a:spcPts val="1400"/>
-              </a:spcAft>
-            </a:pPr>
-            <a:r>
-              <a:rPr sz="1900">
-                <a:solidFill>
-                  <a:srgbClr val="00C896"/>
+              <a:t>+10.2</a:t>
+            </a:r>
+          </a:p>
+        </p:txBody>
+      </p:sp>
+      <p:sp>
+        <p:nvSpPr>
+          <p:cNvPr id="7" name="TextBox 6"/>
+          <p:cNvSpPr txBox="1"/>
+          <p:nvPr/>
+        </p:nvSpPr>
+        <p:spPr>
+          <a:xfrm>
+            <a:off x="640080" y="3931920"/>
+            <a:ext cx="3566160" cy="457200"/>
+          </a:xfrm>
+          <a:prstGeom prst="rect">
+            <a:avLst/>
+          </a:prstGeom>
+          <a:noFill/>
+        </p:spPr>
+        <p:txBody>
+          <a:bodyPr wrap="square" anchor="t">
+            <a:spAutoFit/>
+          </a:bodyPr>
+          <a:lstStyle/>
+          <a:p>
+            <a:pPr algn="ctr"/>
+            <a:r>
+              <a:rPr sz="1500" b="0">
+                <a:solidFill>
+                  <a:srgbClr val="9AA4B2"/>
                 </a:solidFill>
                 <a:latin typeface="Segoe UI"/>
               </a:rPr>
-              <a:t>▸  Menos costo: automatiza estrategia y guiones; el gestor solo ejecuta.</a:t>
-            </a:r>
-          </a:p>
-          <a:p>
-            <a:pPr>
-              <a:spcAft>
-                <a:spcPts val="1400"/>
-              </a:spcAft>
-            </a:pPr>
-            <a:r>
-              <a:rPr sz="1900">
-                <a:solidFill>
-                  <a:srgbClr val="00C896"/>
+              <a:t>puntos de calidad de gestión</a:t>
+            </a:r>
+          </a:p>
+        </p:txBody>
+      </p:sp>
+      <p:sp>
+        <p:nvSpPr>
+          <p:cNvPr id="8" name="Rounded Rectangle 7"/>
+          <p:cNvSpPr/>
+          <p:nvPr/>
+        </p:nvSpPr>
+        <p:spPr>
+          <a:xfrm>
+            <a:off x="4434840" y="2377440"/>
+            <a:ext cx="3566160" cy="2194560"/>
+          </a:xfrm>
+          <a:prstGeom prst="roundRect">
+            <a:avLst/>
+          </a:prstGeom>
+          <a:solidFill>
+            <a:srgbClr val="1A1F2E"/>
+          </a:solidFill>
+          <a:ln w="12700">
+            <a:solidFill>
+              <a:srgbClr val="6C5CE7"/>
+            </a:solidFill>
+          </a:ln>
+          <a:effectLst/>
+        </p:spPr>
+        <p:style>
+          <a:lnRef idx="1">
+            <a:schemeClr val="accent1"/>
+          </a:lnRef>
+          <a:fillRef idx="3">
+            <a:schemeClr val="accent1"/>
+          </a:fillRef>
+          <a:effectRef idx="2">
+            <a:schemeClr val="accent1"/>
+          </a:effectRef>
+          <a:fontRef idx="minor">
+            <a:schemeClr val="lt1"/>
+          </a:fontRef>
+        </p:style>
+        <p:txBody>
+          <a:bodyPr rtlCol="0" anchor="ctr"/>
+          <a:lstStyle/>
+          <a:p>
+            <a:pPr algn="ctr"/>
+          </a:p>
+        </p:txBody>
+      </p:sp>
+      <p:sp>
+        <p:nvSpPr>
+          <p:cNvPr id="9" name="TextBox 8"/>
+          <p:cNvSpPr txBox="1"/>
+          <p:nvPr/>
+        </p:nvSpPr>
+        <p:spPr>
+          <a:xfrm>
+            <a:off x="4434840" y="2880360"/>
+            <a:ext cx="3566160" cy="914400"/>
+          </a:xfrm>
+          <a:prstGeom prst="rect">
+            <a:avLst/>
+          </a:prstGeom>
+          <a:noFill/>
+        </p:spPr>
+        <p:txBody>
+          <a:bodyPr wrap="square" anchor="t">
+            <a:spAutoFit/>
+          </a:bodyPr>
+          <a:lstStyle/>
+          <a:p>
+            <a:pPr algn="ctr"/>
+            <a:r>
+              <a:rPr sz="4400" b="1">
+                <a:solidFill>
+                  <a:srgbClr val="6C5CE7"/>
                 </a:solidFill>
                 <a:latin typeface="Segoe UI"/>
               </a:rPr>
-              <a:t>▸  Decisiones con datos: ML de probabilidad de pago con selección de modelos y calibración.</a:t>
-            </a:r>
-          </a:p>
-          <a:p>
-            <a:pPr>
-              <a:spcAft>
-                <a:spcPts val="1400"/>
-              </a:spcAft>
-            </a:pPr>
-            <a:r>
-              <a:rPr sz="1900">
-                <a:solidFill>
-                  <a:srgbClr val="00C896"/>
+              <a:t>+6.8 pp</a:t>
+            </a:r>
+          </a:p>
+        </p:txBody>
+      </p:sp>
+      <p:sp>
+        <p:nvSpPr>
+          <p:cNvPr id="10" name="TextBox 9"/>
+          <p:cNvSpPr txBox="1"/>
+          <p:nvPr/>
+        </p:nvSpPr>
+        <p:spPr>
+          <a:xfrm>
+            <a:off x="4434840" y="3931920"/>
+            <a:ext cx="3566160" cy="457200"/>
+          </a:xfrm>
+          <a:prstGeom prst="rect">
+            <a:avLst/>
+          </a:prstGeom>
+          <a:noFill/>
+        </p:spPr>
+        <p:txBody>
+          <a:bodyPr wrap="square" anchor="t">
+            <a:spAutoFit/>
+          </a:bodyPr>
+          <a:lstStyle/>
+          <a:p>
+            <a:pPr algn="ctr"/>
+            <a:r>
+              <a:rPr sz="1500" b="0">
+                <a:solidFill>
+                  <a:srgbClr val="9AA4B2"/>
                 </a:solidFill>
                 <a:latin typeface="Segoe UI"/>
               </a:rPr>
-              <a:t>▸  Listo para Uruguay: pensado para el mercado local, sin datos personales sensibles.</a:t>
-            </a:r>
-          </a:p>
-          <a:p>
-            <a:pPr>
-              <a:spcAft>
-                <a:spcPts val="1400"/>
-              </a:spcAft>
-            </a:pPr>
-            <a:r>
-              <a:rPr sz="1900">
-                <a:solidFill>
-                  <a:srgbClr val="00C896"/>
+              <a:t>tasa de conversión</a:t>
+            </a:r>
+          </a:p>
+        </p:txBody>
+      </p:sp>
+      <p:sp>
+        <p:nvSpPr>
+          <p:cNvPr id="11" name="Rounded Rectangle 10"/>
+          <p:cNvSpPr/>
+          <p:nvPr/>
+        </p:nvSpPr>
+        <p:spPr>
+          <a:xfrm>
+            <a:off x="8229600" y="2377440"/>
+            <a:ext cx="3566160" cy="2194560"/>
+          </a:xfrm>
+          <a:prstGeom prst="roundRect">
+            <a:avLst/>
+          </a:prstGeom>
+          <a:solidFill>
+            <a:srgbClr val="1A1F2E"/>
+          </a:solidFill>
+          <a:ln w="12700">
+            <a:solidFill>
+              <a:srgbClr val="FDCB6E"/>
+            </a:solidFill>
+          </a:ln>
+          <a:effectLst/>
+        </p:spPr>
+        <p:style>
+          <a:lnRef idx="1">
+            <a:schemeClr val="accent1"/>
+          </a:lnRef>
+          <a:fillRef idx="3">
+            <a:schemeClr val="accent1"/>
+          </a:fillRef>
+          <a:effectRef idx="2">
+            <a:schemeClr val="accent1"/>
+          </a:effectRef>
+          <a:fontRef idx="minor">
+            <a:schemeClr val="lt1"/>
+          </a:fontRef>
+        </p:style>
+        <p:txBody>
+          <a:bodyPr rtlCol="0" anchor="ctr"/>
+          <a:lstStyle/>
+          <a:p>
+            <a:pPr algn="ctr"/>
+          </a:p>
+        </p:txBody>
+      </p:sp>
+      <p:sp>
+        <p:nvSpPr>
+          <p:cNvPr id="12" name="TextBox 11"/>
+          <p:cNvSpPr txBox="1"/>
+          <p:nvPr/>
+        </p:nvSpPr>
+        <p:spPr>
+          <a:xfrm>
+            <a:off x="8229600" y="2880360"/>
+            <a:ext cx="3566160" cy="914400"/>
+          </a:xfrm>
+          <a:prstGeom prst="rect">
+            <a:avLst/>
+          </a:prstGeom>
+          <a:noFill/>
+        </p:spPr>
+        <p:txBody>
+          <a:bodyPr wrap="square" anchor="t">
+            <a:spAutoFit/>
+          </a:bodyPr>
+          <a:lstStyle/>
+          <a:p>
+            <a:pPr algn="ctr"/>
+            <a:r>
+              <a:rPr sz="4400" b="1">
+                <a:solidFill>
+                  <a:srgbClr val="FDCB6E"/>
                 </a:solidFill>
                 <a:latin typeface="Segoe UI"/>
               </a:rPr>
-              <a:t>▸  Agnóstico de industria: banca, financieras, retail, telco, utilities, fintech.</a:t>
+              <a:t>+5.1 pp</a:t>
+            </a:r>
+          </a:p>
+        </p:txBody>
+      </p:sp>
+      <p:sp>
+        <p:nvSpPr>
+          <p:cNvPr id="13" name="TextBox 12"/>
+          <p:cNvSpPr txBox="1"/>
+          <p:nvPr/>
+        </p:nvSpPr>
+        <p:spPr>
+          <a:xfrm>
+            <a:off x="8229600" y="3931920"/>
+            <a:ext cx="3566160" cy="457200"/>
+          </a:xfrm>
+          <a:prstGeom prst="rect">
+            <a:avLst/>
+          </a:prstGeom>
+          <a:noFill/>
+        </p:spPr>
+        <p:txBody>
+          <a:bodyPr wrap="square" anchor="t">
+            <a:spAutoFit/>
+          </a:bodyPr>
+          <a:lstStyle/>
+          <a:p>
+            <a:pPr algn="ctr"/>
+            <a:r>
+              <a:rPr sz="1500" b="0">
+                <a:solidFill>
+                  <a:srgbClr val="9AA4B2"/>
+                </a:solidFill>
+                <a:latin typeface="Segoe UI"/>
+              </a:rPr>
+              <a:t>tasa de recupero</a:t>
+            </a:r>
+          </a:p>
+        </p:txBody>
+      </p:sp>
+      <p:sp>
+        <p:nvSpPr>
+          <p:cNvPr id="14" name="TextBox 13"/>
+          <p:cNvSpPr txBox="1"/>
+          <p:nvPr/>
+        </p:nvSpPr>
+        <p:spPr>
+          <a:xfrm>
+            <a:off x="822960" y="5120640"/>
+            <a:ext cx="10515600" cy="914400"/>
+          </a:xfrm>
+          <a:prstGeom prst="rect">
+            <a:avLst/>
+          </a:prstGeom>
+          <a:noFill/>
+        </p:spPr>
+        <p:txBody>
+          <a:bodyPr wrap="square" anchor="t">
+            <a:spAutoFit/>
+          </a:bodyPr>
+          <a:lstStyle/>
+          <a:p>
+            <a:pPr algn="ctr"/>
+            <a:r>
+              <a:rPr sz="1400" b="0">
+                <a:solidFill>
+                  <a:srgbClr val="F5F6FA"/>
+                </a:solidFill>
+                <a:latin typeface="Segoe UI"/>
+              </a:rPr>
+              <a:t>Con Kobra: calidad 70 · conversión 68% · recupero 45%   |   Sin Kobra: calidad 60 · conversión 62% · recupero 40%</a:t>
+            </a:r>
+          </a:p>
+        </p:txBody>
+      </p:sp>
+      <p:sp>
+        <p:nvSpPr>
+          <p:cNvPr id="15" name="TextBox 14"/>
+          <p:cNvSpPr txBox="1"/>
+          <p:nvPr/>
+        </p:nvSpPr>
+        <p:spPr>
+          <a:xfrm>
+            <a:off x="822960" y="5852160"/>
+            <a:ext cx="10515600" cy="548640"/>
+          </a:xfrm>
+          <a:prstGeom prst="rect">
+            <a:avLst/>
+          </a:prstGeom>
+          <a:noFill/>
+        </p:spPr>
+        <p:txBody>
+          <a:bodyPr wrap="square" anchor="t">
+            <a:spAutoFit/>
+          </a:bodyPr>
+          <a:lstStyle/>
+          <a:p>
+            <a:pPr algn="ctr"/>
+            <a:r>
+              <a:rPr sz="1400" b="0">
+                <a:solidFill>
+                  <a:srgbClr val="00C896"/>
+                </a:solidFill>
+                <a:latin typeface="Segoe UI"/>
+              </a:rPr>
+              <a:t>Y la mejora se sostiene y crece mes a mes con la adopción de las herramientas.</a:t>
             </a:r>
           </a:p>
         </p:txBody>
@@ -4410,6 +4351,230 @@
 </file>
 
 <file path=ppt/slides/slide14.xml><?xml version="1.0" encoding="utf-8"?>
+<p:sld xmlns:a="http://schemas.openxmlformats.org/drawingml/2006/main" xmlns:p="http://schemas.openxmlformats.org/presentationml/2006/main" xmlns:r="http://schemas.openxmlformats.org/officeDocument/2006/relationships">
+  <p:cSld>
+    <p:bg>
+      <p:bgPr>
+        <a:solidFill>
+          <a:srgbClr val="0E1117"/>
+        </a:solidFill>
+        <a:effectLst/>
+      </p:bgPr>
+    </p:bg>
+    <p:spTree>
+      <p:nvGrpSpPr>
+        <p:cNvPr id="1" name=""/>
+        <p:cNvGrpSpPr/>
+        <p:nvPr/>
+      </p:nvGrpSpPr>
+      <p:grpSpPr/>
+      <p:sp>
+        <p:nvSpPr>
+          <p:cNvPr id="2" name="TextBox 1"/>
+          <p:cNvSpPr txBox="1"/>
+          <p:nvPr/>
+        </p:nvSpPr>
+        <p:spPr>
+          <a:xfrm>
+            <a:off x="640080" y="457200"/>
+            <a:ext cx="10972800" cy="731520"/>
+          </a:xfrm>
+          <a:prstGeom prst="rect">
+            <a:avLst/>
+          </a:prstGeom>
+          <a:noFill/>
+        </p:spPr>
+        <p:txBody>
+          <a:bodyPr wrap="square" anchor="t">
+            <a:spAutoFit/>
+          </a:bodyPr>
+          <a:lstStyle/>
+          <a:p>
+            <a:pPr algn="l"/>
+            <a:r>
+              <a:rPr sz="3200" b="1">
+                <a:solidFill>
+                  <a:srgbClr val="F5F6FA"/>
+                </a:solidFill>
+                <a:latin typeface="Segoe UI"/>
+              </a:rPr>
+              <a:t>Por qué Kobra</a:t>
+            </a:r>
+          </a:p>
+        </p:txBody>
+      </p:sp>
+      <p:sp>
+        <p:nvSpPr>
+          <p:cNvPr id="3" name="Rounded Rectangle 2"/>
+          <p:cNvSpPr/>
+          <p:nvPr/>
+        </p:nvSpPr>
+        <p:spPr>
+          <a:xfrm>
+            <a:off x="640080" y="1280160"/>
+            <a:ext cx="137160" cy="640080"/>
+          </a:xfrm>
+          <a:prstGeom prst="roundRect">
+            <a:avLst/>
+          </a:prstGeom>
+          <a:solidFill>
+            <a:srgbClr val="00C896"/>
+          </a:solidFill>
+          <a:ln>
+            <a:noFill/>
+          </a:ln>
+          <a:effectLst/>
+        </p:spPr>
+        <p:style>
+          <a:lnRef idx="1">
+            <a:schemeClr val="accent1"/>
+          </a:lnRef>
+          <a:fillRef idx="3">
+            <a:schemeClr val="accent1"/>
+          </a:fillRef>
+          <a:effectRef idx="2">
+            <a:schemeClr val="accent1"/>
+          </a:effectRef>
+          <a:fontRef idx="minor">
+            <a:schemeClr val="lt1"/>
+          </a:fontRef>
+        </p:style>
+        <p:txBody>
+          <a:bodyPr rtlCol="0" anchor="ctr"/>
+          <a:lstStyle/>
+          <a:p>
+            <a:pPr algn="ctr"/>
+          </a:p>
+        </p:txBody>
+      </p:sp>
+      <p:sp>
+        <p:nvSpPr>
+          <p:cNvPr id="4" name="TextBox 3"/>
+          <p:cNvSpPr txBox="1"/>
+          <p:nvPr/>
+        </p:nvSpPr>
+        <p:spPr>
+          <a:xfrm>
+            <a:off x="822960" y="1828800"/>
+            <a:ext cx="10515600" cy="4114800"/>
+          </a:xfrm>
+          <a:prstGeom prst="rect">
+            <a:avLst/>
+          </a:prstGeom>
+          <a:noFill/>
+        </p:spPr>
+        <p:txBody>
+          <a:bodyPr wrap="square">
+            <a:spAutoFit/>
+          </a:bodyPr>
+          <a:lstStyle/>
+          <a:p>
+            <a:pPr>
+              <a:spcAft>
+                <a:spcPts val="1400"/>
+              </a:spcAft>
+            </a:pPr>
+            <a:r>
+              <a:rPr sz="1900">
+                <a:solidFill>
+                  <a:srgbClr val="00C896"/>
+                </a:solidFill>
+                <a:latin typeface="Segoe UI"/>
+              </a:rPr>
+              <a:t>▸  Más recupero: prioriza por valor esperado, no por antigüedad de la deuda.</a:t>
+            </a:r>
+          </a:p>
+          <a:p>
+            <a:pPr>
+              <a:spcAft>
+                <a:spcPts val="1400"/>
+              </a:spcAft>
+            </a:pPr>
+            <a:r>
+              <a:rPr sz="1900">
+                <a:solidFill>
+                  <a:srgbClr val="00C896"/>
+                </a:solidFill>
+                <a:latin typeface="Segoe UI"/>
+              </a:rPr>
+              <a:t>▸  Asistencia en vivo: análisis de sentimiento de voz/WhatsApp que guía al gestor en la negociación.</a:t>
+            </a:r>
+          </a:p>
+          <a:p>
+            <a:pPr>
+              <a:spcAft>
+                <a:spcPts val="1400"/>
+              </a:spcAft>
+            </a:pPr>
+            <a:r>
+              <a:rPr sz="1900">
+                <a:solidFill>
+                  <a:srgbClr val="00C896"/>
+                </a:solidFill>
+                <a:latin typeface="Segoe UI"/>
+              </a:rPr>
+              <a:t>▸  Menos costo: automatiza estrategia y guiones; el gestor solo ejecuta.</a:t>
+            </a:r>
+          </a:p>
+          <a:p>
+            <a:pPr>
+              <a:spcAft>
+                <a:spcPts val="1400"/>
+              </a:spcAft>
+            </a:pPr>
+            <a:r>
+              <a:rPr sz="1900">
+                <a:solidFill>
+                  <a:srgbClr val="00C896"/>
+                </a:solidFill>
+                <a:latin typeface="Segoe UI"/>
+              </a:rPr>
+              <a:t>▸  Decisiones con datos: ML de probabilidad de pago con selección de modelos y calibración.</a:t>
+            </a:r>
+          </a:p>
+          <a:p>
+            <a:pPr>
+              <a:spcAft>
+                <a:spcPts val="1400"/>
+              </a:spcAft>
+            </a:pPr>
+            <a:r>
+              <a:rPr sz="1900">
+                <a:solidFill>
+                  <a:srgbClr val="00C896"/>
+                </a:solidFill>
+                <a:latin typeface="Segoe UI"/>
+              </a:rPr>
+              <a:t>▸  Listo para Uruguay: pensado para el mercado local, sin datos personales sensibles.</a:t>
+            </a:r>
+          </a:p>
+          <a:p>
+            <a:pPr>
+              <a:spcAft>
+                <a:spcPts val="1400"/>
+              </a:spcAft>
+            </a:pPr>
+            <a:r>
+              <a:rPr sz="1900">
+                <a:solidFill>
+                  <a:srgbClr val="00C896"/>
+                </a:solidFill>
+                <a:latin typeface="Segoe UI"/>
+              </a:rPr>
+              <a:t>▸  Agnóstico de industria: banca, financieras, retail, telco, utilities, fintech.</a:t>
+            </a:r>
+          </a:p>
+        </p:txBody>
+      </p:sp>
+    </p:spTree>
+  </p:cSld>
+  <p:clrMapOvr>
+    <a:masterClrMapping/>
+  </p:clrMapOvr>
+</p:sld>
+</file>
+
+<file path=ppt/slides/slide15.xml><?xml version="1.0" encoding="utf-8"?>
 <p:sld xmlns:a="http://schemas.openxmlformats.org/drawingml/2006/main" xmlns:p="http://schemas.openxmlformats.org/presentationml/2006/main" xmlns:r="http://schemas.openxmlformats.org/officeDocument/2006/relationships">
   <p:cSld>
     <p:bg>

--- a/presentation/Kobra_Presentacion_Gerencial.pptx
+++ b/presentation/Kobra_Presentacion_Gerencial.pptx
@@ -20,6 +20,7 @@
     <p:sldId id="268" r:id="rId19"/>
     <p:sldId id="269" r:id="rId20"/>
     <p:sldId id="270" r:id="rId21"/>
+    <p:sldId id="271" r:id="rId22"/>
   </p:sldIdLst>
   <p:sldSz cx="12191695" cy="6858000" type="screen4x3"/>
   <p:notesSz cx="6858000" cy="9144000"/>
@@ -3676,7 +3677,7 @@
                 </a:solidFill>
                 <a:latin typeface="Segoe UI"/>
               </a:rPr>
-              <a:t>Gestores &amp; Evolución</a:t>
+              <a:t>Integración telefónica + transcripción por hablante</a:t>
             </a:r>
           </a:p>
         </p:txBody>
@@ -3711,7 +3712,7 @@
                 </a:solidFill>
                 <a:latin typeface="Segoe UI"/>
               </a:rPr>
-              <a:t>Impacto de Kobra en calidad, conversión y recupero; evolución mes a mes por gestor.</a:t>
+              <a:t>Conecta al audio de la central (Avaya, Genesys…); transcribe por hablante y fusiona voz + texto.</a:t>
             </a:r>
           </a:p>
         </p:txBody>
@@ -3762,7 +3763,7 @@
       </p:sp>
       <p:pic>
         <p:nvPicPr>
-          <p:cNvPr id="5" name="Picture 4" descr="dashboard_gestores.png"/>
+          <p:cNvPr id="5" name="Picture 4" descr="realtime_telefonia.png"/>
           <p:cNvPicPr>
             <a:picLocks noChangeAspect="1"/>
           </p:cNvPicPr>
@@ -3777,7 +3778,7 @@
         <p:spPr>
           <a:xfrm>
             <a:off x="640080" y="1554480"/>
-            <a:ext cx="10927080" cy="9561195"/>
+            <a:ext cx="10927080" cy="8253588"/>
           </a:xfrm>
           <a:prstGeom prst="rect">
             <a:avLst/>
@@ -3818,8 +3819,8 @@
         </p:nvSpPr>
         <p:spPr>
           <a:xfrm>
-            <a:off x="640080" y="457200"/>
-            <a:ext cx="10972800" cy="731520"/>
+            <a:off x="640080" y="320040"/>
+            <a:ext cx="10972800" cy="640080"/>
           </a:xfrm>
           <a:prstGeom prst="rect">
             <a:avLst/>
@@ -3834,71 +3835,27 @@
           <a:p>
             <a:pPr algn="l"/>
             <a:r>
-              <a:rPr sz="3200" b="1">
-                <a:solidFill>
-                  <a:srgbClr val="F5F6FA"/>
+              <a:rPr sz="2800" b="1">
+                <a:solidFill>
+                  <a:srgbClr val="00C896"/>
                 </a:solidFill>
                 <a:latin typeface="Segoe UI"/>
               </a:rPr>
-              <a:t>Impacto de Kobra en la gestión</a:t>
-            </a:r>
-          </a:p>
-        </p:txBody>
-      </p:sp>
-      <p:sp>
-        <p:nvSpPr>
-          <p:cNvPr id="3" name="Rounded Rectangle 2"/>
-          <p:cNvSpPr/>
-          <p:nvPr/>
-        </p:nvSpPr>
-        <p:spPr>
-          <a:xfrm>
-            <a:off x="640080" y="1280160"/>
-            <a:ext cx="137160" cy="640080"/>
-          </a:xfrm>
-          <a:prstGeom prst="roundRect">
-            <a:avLst/>
-          </a:prstGeom>
-          <a:solidFill>
-            <a:srgbClr val="00C896"/>
-          </a:solidFill>
-          <a:ln>
-            <a:noFill/>
-          </a:ln>
-          <a:effectLst/>
-        </p:spPr>
-        <p:style>
-          <a:lnRef idx="1">
-            <a:schemeClr val="accent1"/>
-          </a:lnRef>
-          <a:fillRef idx="3">
-            <a:schemeClr val="accent1"/>
-          </a:fillRef>
-          <a:effectRef idx="2">
-            <a:schemeClr val="accent1"/>
-          </a:effectRef>
-          <a:fontRef idx="minor">
-            <a:schemeClr val="lt1"/>
-          </a:fontRef>
-        </p:style>
-        <p:txBody>
-          <a:bodyPr rtlCol="0" anchor="ctr"/>
-          <a:lstStyle/>
-          <a:p>
-            <a:pPr algn="ctr"/>
-          </a:p>
-        </p:txBody>
-      </p:sp>
-      <p:sp>
-        <p:nvSpPr>
-          <p:cNvPr id="4" name="TextBox 3"/>
+              <a:t>Gestores &amp; Evolución</a:t>
+            </a:r>
+          </a:p>
+        </p:txBody>
+      </p:sp>
+      <p:sp>
+        <p:nvSpPr>
+          <p:cNvPr id="3" name="TextBox 2"/>
           <p:cNvSpPr txBox="1"/>
           <p:nvPr/>
         </p:nvSpPr>
         <p:spPr>
           <a:xfrm>
-            <a:off x="822960" y="1554480"/>
-            <a:ext cx="10515600" cy="548640"/>
+            <a:off x="640080" y="914400"/>
+            <a:ext cx="10972800" cy="457200"/>
           </a:xfrm>
           <a:prstGeom prst="rect">
             <a:avLst/>
@@ -3919,144 +3876,26 @@
                 </a:solidFill>
                 <a:latin typeface="Segoe UI"/>
               </a:rPr>
-              <a:t>Gestores que usan Kobra vs. grupo de control (mismo período)</a:t>
-            </a:r>
-          </a:p>
-        </p:txBody>
-      </p:sp>
-      <p:sp>
-        <p:nvSpPr>
-          <p:cNvPr id="5" name="Rounded Rectangle 4"/>
+              <a:t>Impacto de Kobra en calidad, conversión y recupero; evolución mes a mes por gestor.</a:t>
+            </a:r>
+          </a:p>
+        </p:txBody>
+      </p:sp>
+      <p:sp>
+        <p:nvSpPr>
+          <p:cNvPr id="4" name="Rounded Rectangle 3"/>
           <p:cNvSpPr/>
           <p:nvPr/>
         </p:nvSpPr>
         <p:spPr>
           <a:xfrm>
-            <a:off x="640080" y="2377440"/>
-            <a:ext cx="3566160" cy="2194560"/>
+            <a:off x="502920" y="1417320"/>
+            <a:ext cx="11201400" cy="5074920"/>
           </a:xfrm>
           <a:prstGeom prst="roundRect">
             <a:avLst/>
           </a:prstGeom>
-          <a:solidFill>
-            <a:srgbClr val="1A1F2E"/>
-          </a:solidFill>
-          <a:ln w="12700">
-            <a:solidFill>
-              <a:srgbClr val="00C896"/>
-            </a:solidFill>
-          </a:ln>
-          <a:effectLst/>
-        </p:spPr>
-        <p:style>
-          <a:lnRef idx="1">
-            <a:schemeClr val="accent1"/>
-          </a:lnRef>
-          <a:fillRef idx="3">
-            <a:schemeClr val="accent1"/>
-          </a:fillRef>
-          <a:effectRef idx="2">
-            <a:schemeClr val="accent1"/>
-          </a:effectRef>
-          <a:fontRef idx="minor">
-            <a:schemeClr val="lt1"/>
-          </a:fontRef>
-        </p:style>
-        <p:txBody>
-          <a:bodyPr rtlCol="0" anchor="ctr"/>
-          <a:lstStyle/>
-          <a:p>
-            <a:pPr algn="ctr"/>
-          </a:p>
-        </p:txBody>
-      </p:sp>
-      <p:sp>
-        <p:nvSpPr>
-          <p:cNvPr id="6" name="TextBox 5"/>
-          <p:cNvSpPr txBox="1"/>
-          <p:nvPr/>
-        </p:nvSpPr>
-        <p:spPr>
-          <a:xfrm>
-            <a:off x="640080" y="2880360"/>
-            <a:ext cx="3566160" cy="914400"/>
-          </a:xfrm>
-          <a:prstGeom prst="rect">
-            <a:avLst/>
-          </a:prstGeom>
           <a:noFill/>
-        </p:spPr>
-        <p:txBody>
-          <a:bodyPr wrap="square" anchor="t">
-            <a:spAutoFit/>
-          </a:bodyPr>
-          <a:lstStyle/>
-          <a:p>
-            <a:pPr algn="ctr"/>
-            <a:r>
-              <a:rPr sz="4400" b="1">
-                <a:solidFill>
-                  <a:srgbClr val="00C896"/>
-                </a:solidFill>
-                <a:latin typeface="Segoe UI"/>
-              </a:rPr>
-              <a:t>+10.2</a:t>
-            </a:r>
-          </a:p>
-        </p:txBody>
-      </p:sp>
-      <p:sp>
-        <p:nvSpPr>
-          <p:cNvPr id="7" name="TextBox 6"/>
-          <p:cNvSpPr txBox="1"/>
-          <p:nvPr/>
-        </p:nvSpPr>
-        <p:spPr>
-          <a:xfrm>
-            <a:off x="640080" y="3931920"/>
-            <a:ext cx="3566160" cy="457200"/>
-          </a:xfrm>
-          <a:prstGeom prst="rect">
-            <a:avLst/>
-          </a:prstGeom>
-          <a:noFill/>
-        </p:spPr>
-        <p:txBody>
-          <a:bodyPr wrap="square" anchor="t">
-            <a:spAutoFit/>
-          </a:bodyPr>
-          <a:lstStyle/>
-          <a:p>
-            <a:pPr algn="ctr"/>
-            <a:r>
-              <a:rPr sz="1500" b="0">
-                <a:solidFill>
-                  <a:srgbClr val="9AA4B2"/>
-                </a:solidFill>
-                <a:latin typeface="Segoe UI"/>
-              </a:rPr>
-              <a:t>puntos de calidad de gestión</a:t>
-            </a:r>
-          </a:p>
-        </p:txBody>
-      </p:sp>
-      <p:sp>
-        <p:nvSpPr>
-          <p:cNvPr id="8" name="Rounded Rectangle 7"/>
-          <p:cNvSpPr/>
-          <p:nvPr/>
-        </p:nvSpPr>
-        <p:spPr>
-          <a:xfrm>
-            <a:off x="4434840" y="2377440"/>
-            <a:ext cx="3566160" cy="2194560"/>
-          </a:xfrm>
-          <a:prstGeom prst="roundRect">
-            <a:avLst/>
-          </a:prstGeom>
-          <a:solidFill>
-            <a:srgbClr val="1A1F2E"/>
-          </a:solidFill>
           <a:ln w="12700">
             <a:solidFill>
               <a:srgbClr val="6C5CE7"/>
@@ -4086,262 +3925,30 @@
           </a:p>
         </p:txBody>
       </p:sp>
-      <p:sp>
-        <p:nvSpPr>
-          <p:cNvPr id="9" name="TextBox 8"/>
-          <p:cNvSpPr txBox="1"/>
-          <p:nvPr/>
-        </p:nvSpPr>
-        <p:spPr>
-          <a:xfrm>
-            <a:off x="4434840" y="2880360"/>
-            <a:ext cx="3566160" cy="914400"/>
-          </a:xfrm>
-          <a:prstGeom prst="rect">
-            <a:avLst/>
-          </a:prstGeom>
-          <a:noFill/>
-        </p:spPr>
-        <p:txBody>
-          <a:bodyPr wrap="square" anchor="t">
-            <a:spAutoFit/>
-          </a:bodyPr>
-          <a:lstStyle/>
-          <a:p>
-            <a:pPr algn="ctr"/>
-            <a:r>
-              <a:rPr sz="4400" b="1">
-                <a:solidFill>
-                  <a:srgbClr val="6C5CE7"/>
-                </a:solidFill>
-                <a:latin typeface="Segoe UI"/>
-              </a:rPr>
-              <a:t>+6.8 pp</a:t>
-            </a:r>
-          </a:p>
-        </p:txBody>
-      </p:sp>
-      <p:sp>
-        <p:nvSpPr>
-          <p:cNvPr id="10" name="TextBox 9"/>
-          <p:cNvSpPr txBox="1"/>
-          <p:nvPr/>
-        </p:nvSpPr>
-        <p:spPr>
-          <a:xfrm>
-            <a:off x="4434840" y="3931920"/>
-            <a:ext cx="3566160" cy="457200"/>
-          </a:xfrm>
-          <a:prstGeom prst="rect">
-            <a:avLst/>
-          </a:prstGeom>
-          <a:noFill/>
-        </p:spPr>
-        <p:txBody>
-          <a:bodyPr wrap="square" anchor="t">
-            <a:spAutoFit/>
-          </a:bodyPr>
-          <a:lstStyle/>
-          <a:p>
-            <a:pPr algn="ctr"/>
-            <a:r>
-              <a:rPr sz="1500" b="0">
-                <a:solidFill>
-                  <a:srgbClr val="9AA4B2"/>
-                </a:solidFill>
-                <a:latin typeface="Segoe UI"/>
-              </a:rPr>
-              <a:t>tasa de conversión</a:t>
-            </a:r>
-          </a:p>
-        </p:txBody>
-      </p:sp>
-      <p:sp>
-        <p:nvSpPr>
-          <p:cNvPr id="11" name="Rounded Rectangle 10"/>
-          <p:cNvSpPr/>
-          <p:nvPr/>
-        </p:nvSpPr>
-        <p:spPr>
-          <a:xfrm>
-            <a:off x="8229600" y="2377440"/>
-            <a:ext cx="3566160" cy="2194560"/>
-          </a:xfrm>
-          <a:prstGeom prst="roundRect">
-            <a:avLst/>
-          </a:prstGeom>
-          <a:solidFill>
-            <a:srgbClr val="1A1F2E"/>
-          </a:solidFill>
-          <a:ln w="12700">
-            <a:solidFill>
-              <a:srgbClr val="FDCB6E"/>
-            </a:solidFill>
-          </a:ln>
-          <a:effectLst/>
-        </p:spPr>
-        <p:style>
-          <a:lnRef idx="1">
-            <a:schemeClr val="accent1"/>
-          </a:lnRef>
-          <a:fillRef idx="3">
-            <a:schemeClr val="accent1"/>
-          </a:fillRef>
-          <a:effectRef idx="2">
-            <a:schemeClr val="accent1"/>
-          </a:effectRef>
-          <a:fontRef idx="minor">
-            <a:schemeClr val="lt1"/>
-          </a:fontRef>
-        </p:style>
-        <p:txBody>
-          <a:bodyPr rtlCol="0" anchor="ctr"/>
-          <a:lstStyle/>
-          <a:p>
-            <a:pPr algn="ctr"/>
-          </a:p>
-        </p:txBody>
-      </p:sp>
-      <p:sp>
-        <p:nvSpPr>
-          <p:cNvPr id="12" name="TextBox 11"/>
-          <p:cNvSpPr txBox="1"/>
-          <p:nvPr/>
-        </p:nvSpPr>
-        <p:spPr>
-          <a:xfrm>
-            <a:off x="8229600" y="2880360"/>
-            <a:ext cx="3566160" cy="914400"/>
-          </a:xfrm>
-          <a:prstGeom prst="rect">
-            <a:avLst/>
-          </a:prstGeom>
-          <a:noFill/>
-        </p:spPr>
-        <p:txBody>
-          <a:bodyPr wrap="square" anchor="t">
-            <a:spAutoFit/>
-          </a:bodyPr>
-          <a:lstStyle/>
-          <a:p>
-            <a:pPr algn="ctr"/>
-            <a:r>
-              <a:rPr sz="4400" b="1">
-                <a:solidFill>
-                  <a:srgbClr val="FDCB6E"/>
-                </a:solidFill>
-                <a:latin typeface="Segoe UI"/>
-              </a:rPr>
-              <a:t>+5.1 pp</a:t>
-            </a:r>
-          </a:p>
-        </p:txBody>
-      </p:sp>
-      <p:sp>
-        <p:nvSpPr>
-          <p:cNvPr id="13" name="TextBox 12"/>
-          <p:cNvSpPr txBox="1"/>
-          <p:nvPr/>
-        </p:nvSpPr>
-        <p:spPr>
-          <a:xfrm>
-            <a:off x="8229600" y="3931920"/>
-            <a:ext cx="3566160" cy="457200"/>
-          </a:xfrm>
-          <a:prstGeom prst="rect">
-            <a:avLst/>
-          </a:prstGeom>
-          <a:noFill/>
-        </p:spPr>
-        <p:txBody>
-          <a:bodyPr wrap="square" anchor="t">
-            <a:spAutoFit/>
-          </a:bodyPr>
-          <a:lstStyle/>
-          <a:p>
-            <a:pPr algn="ctr"/>
-            <a:r>
-              <a:rPr sz="1500" b="0">
-                <a:solidFill>
-                  <a:srgbClr val="9AA4B2"/>
-                </a:solidFill>
-                <a:latin typeface="Segoe UI"/>
-              </a:rPr>
-              <a:t>tasa de recupero</a:t>
-            </a:r>
-          </a:p>
-        </p:txBody>
-      </p:sp>
-      <p:sp>
-        <p:nvSpPr>
-          <p:cNvPr id="14" name="TextBox 13"/>
-          <p:cNvSpPr txBox="1"/>
-          <p:nvPr/>
-        </p:nvSpPr>
-        <p:spPr>
-          <a:xfrm>
-            <a:off x="822960" y="5120640"/>
-            <a:ext cx="10515600" cy="914400"/>
-          </a:xfrm>
-          <a:prstGeom prst="rect">
-            <a:avLst/>
-          </a:prstGeom>
-          <a:noFill/>
-        </p:spPr>
-        <p:txBody>
-          <a:bodyPr wrap="square" anchor="t">
-            <a:spAutoFit/>
-          </a:bodyPr>
-          <a:lstStyle/>
-          <a:p>
-            <a:pPr algn="ctr"/>
-            <a:r>
-              <a:rPr sz="1400" b="0">
-                <a:solidFill>
-                  <a:srgbClr val="F5F6FA"/>
-                </a:solidFill>
-                <a:latin typeface="Segoe UI"/>
-              </a:rPr>
-              <a:t>Con Kobra: calidad 70 · conversión 68% · recupero 45%   |   Sin Kobra: calidad 60 · conversión 62% · recupero 40%</a:t>
-            </a:r>
-          </a:p>
-        </p:txBody>
-      </p:sp>
-      <p:sp>
-        <p:nvSpPr>
-          <p:cNvPr id="15" name="TextBox 14"/>
-          <p:cNvSpPr txBox="1"/>
-          <p:nvPr/>
-        </p:nvSpPr>
-        <p:spPr>
-          <a:xfrm>
-            <a:off x="822960" y="5852160"/>
-            <a:ext cx="10515600" cy="548640"/>
-          </a:xfrm>
-          <a:prstGeom prst="rect">
-            <a:avLst/>
-          </a:prstGeom>
-          <a:noFill/>
-        </p:spPr>
-        <p:txBody>
-          <a:bodyPr wrap="square" anchor="t">
-            <a:spAutoFit/>
-          </a:bodyPr>
-          <a:lstStyle/>
-          <a:p>
-            <a:pPr algn="ctr"/>
-            <a:r>
-              <a:rPr sz="1400" b="0">
-                <a:solidFill>
-                  <a:srgbClr val="00C896"/>
-                </a:solidFill>
-                <a:latin typeface="Segoe UI"/>
-              </a:rPr>
-              <a:t>Y la mejora se sostiene y crece mes a mes con la adopción de las herramientas.</a:t>
-            </a:r>
-          </a:p>
-        </p:txBody>
-      </p:sp>
+      <p:pic>
+        <p:nvPicPr>
+          <p:cNvPr id="5" name="Picture 4" descr="dashboard_gestores.png"/>
+          <p:cNvPicPr>
+            <a:picLocks noChangeAspect="1"/>
+          </p:cNvPicPr>
+          <p:nvPr/>
+        </p:nvPicPr>
+        <p:blipFill>
+          <a:blip r:embed="rId2"/>
+          <a:stretch>
+            <a:fillRect/>
+          </a:stretch>
+        </p:blipFill>
+        <p:spPr>
+          <a:xfrm>
+            <a:off x="640080" y="1554480"/>
+            <a:ext cx="10927080" cy="9561195"/>
+          </a:xfrm>
+          <a:prstGeom prst="rect">
+            <a:avLst/>
+          </a:prstGeom>
+        </p:spPr>
+      </p:pic>
     </p:spTree>
   </p:cSld>
   <p:clrMapOvr>
@@ -4398,7 +4005,7 @@
                 </a:solidFill>
                 <a:latin typeface="Segoe UI"/>
               </a:rPr>
-              <a:t>Por qué Kobra</a:t>
+              <a:t>Impacto de Kobra en la gestión</a:t>
             </a:r>
           </a:p>
         </p:txBody>
@@ -4455,8 +4062,8 @@
         </p:nvSpPr>
         <p:spPr>
           <a:xfrm>
-            <a:off x="822960" y="1828800"/>
-            <a:ext cx="10515600" cy="4114800"/>
+            <a:off x="822960" y="1554480"/>
+            <a:ext cx="10515600" cy="548640"/>
           </a:xfrm>
           <a:prstGeom prst="rect">
             <a:avLst/>
@@ -4464,104 +4071,438 @@
           <a:noFill/>
         </p:spPr>
         <p:txBody>
-          <a:bodyPr wrap="square">
+          <a:bodyPr wrap="square" anchor="t">
             <a:spAutoFit/>
           </a:bodyPr>
           <a:lstStyle/>
           <a:p>
-            <a:pPr>
-              <a:spcAft>
-                <a:spcPts val="1400"/>
-              </a:spcAft>
-            </a:pPr>
-            <a:r>
-              <a:rPr sz="1900">
-                <a:solidFill>
-                  <a:srgbClr val="00C896"/>
+            <a:pPr algn="l"/>
+            <a:r>
+              <a:rPr sz="1500" b="0">
+                <a:solidFill>
+                  <a:srgbClr val="9AA4B2"/>
                 </a:solidFill>
                 <a:latin typeface="Segoe UI"/>
               </a:rPr>
-              <a:t>▸  Más recupero: prioriza por valor esperado, no por antigüedad de la deuda.</a:t>
-            </a:r>
-          </a:p>
-          <a:p>
-            <a:pPr>
-              <a:spcAft>
-                <a:spcPts val="1400"/>
-              </a:spcAft>
-            </a:pPr>
-            <a:r>
-              <a:rPr sz="1900">
+              <a:t>Gestores que usan Kobra vs. grupo de control (mismo período)</a:t>
+            </a:r>
+          </a:p>
+        </p:txBody>
+      </p:sp>
+      <p:sp>
+        <p:nvSpPr>
+          <p:cNvPr id="5" name="Rounded Rectangle 4"/>
+          <p:cNvSpPr/>
+          <p:nvPr/>
+        </p:nvSpPr>
+        <p:spPr>
+          <a:xfrm>
+            <a:off x="640080" y="2377440"/>
+            <a:ext cx="3566160" cy="2194560"/>
+          </a:xfrm>
+          <a:prstGeom prst="roundRect">
+            <a:avLst/>
+          </a:prstGeom>
+          <a:solidFill>
+            <a:srgbClr val="1A1F2E"/>
+          </a:solidFill>
+          <a:ln w="12700">
+            <a:solidFill>
+              <a:srgbClr val="00C896"/>
+            </a:solidFill>
+          </a:ln>
+          <a:effectLst/>
+        </p:spPr>
+        <p:style>
+          <a:lnRef idx="1">
+            <a:schemeClr val="accent1"/>
+          </a:lnRef>
+          <a:fillRef idx="3">
+            <a:schemeClr val="accent1"/>
+          </a:fillRef>
+          <a:effectRef idx="2">
+            <a:schemeClr val="accent1"/>
+          </a:effectRef>
+          <a:fontRef idx="minor">
+            <a:schemeClr val="lt1"/>
+          </a:fontRef>
+        </p:style>
+        <p:txBody>
+          <a:bodyPr rtlCol="0" anchor="ctr"/>
+          <a:lstStyle/>
+          <a:p>
+            <a:pPr algn="ctr"/>
+          </a:p>
+        </p:txBody>
+      </p:sp>
+      <p:sp>
+        <p:nvSpPr>
+          <p:cNvPr id="6" name="TextBox 5"/>
+          <p:cNvSpPr txBox="1"/>
+          <p:nvPr/>
+        </p:nvSpPr>
+        <p:spPr>
+          <a:xfrm>
+            <a:off x="640080" y="2880360"/>
+            <a:ext cx="3566160" cy="914400"/>
+          </a:xfrm>
+          <a:prstGeom prst="rect">
+            <a:avLst/>
+          </a:prstGeom>
+          <a:noFill/>
+        </p:spPr>
+        <p:txBody>
+          <a:bodyPr wrap="square" anchor="t">
+            <a:spAutoFit/>
+          </a:bodyPr>
+          <a:lstStyle/>
+          <a:p>
+            <a:pPr algn="ctr"/>
+            <a:r>
+              <a:rPr sz="4400" b="1">
                 <a:solidFill>
                   <a:srgbClr val="00C896"/>
                 </a:solidFill>
                 <a:latin typeface="Segoe UI"/>
               </a:rPr>
-              <a:t>▸  Asistencia en vivo: análisis de sentimiento de voz/WhatsApp que guía al gestor en la negociación.</a:t>
-            </a:r>
-          </a:p>
-          <a:p>
-            <a:pPr>
-              <a:spcAft>
-                <a:spcPts val="1400"/>
-              </a:spcAft>
-            </a:pPr>
-            <a:r>
-              <a:rPr sz="1900">
-                <a:solidFill>
-                  <a:srgbClr val="00C896"/>
+              <a:t>+10.2</a:t>
+            </a:r>
+          </a:p>
+        </p:txBody>
+      </p:sp>
+      <p:sp>
+        <p:nvSpPr>
+          <p:cNvPr id="7" name="TextBox 6"/>
+          <p:cNvSpPr txBox="1"/>
+          <p:nvPr/>
+        </p:nvSpPr>
+        <p:spPr>
+          <a:xfrm>
+            <a:off x="640080" y="3931920"/>
+            <a:ext cx="3566160" cy="457200"/>
+          </a:xfrm>
+          <a:prstGeom prst="rect">
+            <a:avLst/>
+          </a:prstGeom>
+          <a:noFill/>
+        </p:spPr>
+        <p:txBody>
+          <a:bodyPr wrap="square" anchor="t">
+            <a:spAutoFit/>
+          </a:bodyPr>
+          <a:lstStyle/>
+          <a:p>
+            <a:pPr algn="ctr"/>
+            <a:r>
+              <a:rPr sz="1500" b="0">
+                <a:solidFill>
+                  <a:srgbClr val="9AA4B2"/>
                 </a:solidFill>
                 <a:latin typeface="Segoe UI"/>
               </a:rPr>
-              <a:t>▸  Menos costo: automatiza estrategia y guiones; el gestor solo ejecuta.</a:t>
-            </a:r>
-          </a:p>
-          <a:p>
-            <a:pPr>
-              <a:spcAft>
-                <a:spcPts val="1400"/>
-              </a:spcAft>
-            </a:pPr>
-            <a:r>
-              <a:rPr sz="1900">
-                <a:solidFill>
-                  <a:srgbClr val="00C896"/>
+              <a:t>puntos de calidad de gestión</a:t>
+            </a:r>
+          </a:p>
+        </p:txBody>
+      </p:sp>
+      <p:sp>
+        <p:nvSpPr>
+          <p:cNvPr id="8" name="Rounded Rectangle 7"/>
+          <p:cNvSpPr/>
+          <p:nvPr/>
+        </p:nvSpPr>
+        <p:spPr>
+          <a:xfrm>
+            <a:off x="4434840" y="2377440"/>
+            <a:ext cx="3566160" cy="2194560"/>
+          </a:xfrm>
+          <a:prstGeom prst="roundRect">
+            <a:avLst/>
+          </a:prstGeom>
+          <a:solidFill>
+            <a:srgbClr val="1A1F2E"/>
+          </a:solidFill>
+          <a:ln w="12700">
+            <a:solidFill>
+              <a:srgbClr val="6C5CE7"/>
+            </a:solidFill>
+          </a:ln>
+          <a:effectLst/>
+        </p:spPr>
+        <p:style>
+          <a:lnRef idx="1">
+            <a:schemeClr val="accent1"/>
+          </a:lnRef>
+          <a:fillRef idx="3">
+            <a:schemeClr val="accent1"/>
+          </a:fillRef>
+          <a:effectRef idx="2">
+            <a:schemeClr val="accent1"/>
+          </a:effectRef>
+          <a:fontRef idx="minor">
+            <a:schemeClr val="lt1"/>
+          </a:fontRef>
+        </p:style>
+        <p:txBody>
+          <a:bodyPr rtlCol="0" anchor="ctr"/>
+          <a:lstStyle/>
+          <a:p>
+            <a:pPr algn="ctr"/>
+          </a:p>
+        </p:txBody>
+      </p:sp>
+      <p:sp>
+        <p:nvSpPr>
+          <p:cNvPr id="9" name="TextBox 8"/>
+          <p:cNvSpPr txBox="1"/>
+          <p:nvPr/>
+        </p:nvSpPr>
+        <p:spPr>
+          <a:xfrm>
+            <a:off x="4434840" y="2880360"/>
+            <a:ext cx="3566160" cy="914400"/>
+          </a:xfrm>
+          <a:prstGeom prst="rect">
+            <a:avLst/>
+          </a:prstGeom>
+          <a:noFill/>
+        </p:spPr>
+        <p:txBody>
+          <a:bodyPr wrap="square" anchor="t">
+            <a:spAutoFit/>
+          </a:bodyPr>
+          <a:lstStyle/>
+          <a:p>
+            <a:pPr algn="ctr"/>
+            <a:r>
+              <a:rPr sz="4400" b="1">
+                <a:solidFill>
+                  <a:srgbClr val="6C5CE7"/>
                 </a:solidFill>
                 <a:latin typeface="Segoe UI"/>
               </a:rPr>
-              <a:t>▸  Decisiones con datos: ML de probabilidad de pago con selección de modelos y calibración.</a:t>
-            </a:r>
-          </a:p>
-          <a:p>
-            <a:pPr>
-              <a:spcAft>
-                <a:spcPts val="1400"/>
-              </a:spcAft>
-            </a:pPr>
-            <a:r>
-              <a:rPr sz="1900">
-                <a:solidFill>
-                  <a:srgbClr val="00C896"/>
+              <a:t>+6.8 pp</a:t>
+            </a:r>
+          </a:p>
+        </p:txBody>
+      </p:sp>
+      <p:sp>
+        <p:nvSpPr>
+          <p:cNvPr id="10" name="TextBox 9"/>
+          <p:cNvSpPr txBox="1"/>
+          <p:nvPr/>
+        </p:nvSpPr>
+        <p:spPr>
+          <a:xfrm>
+            <a:off x="4434840" y="3931920"/>
+            <a:ext cx="3566160" cy="457200"/>
+          </a:xfrm>
+          <a:prstGeom prst="rect">
+            <a:avLst/>
+          </a:prstGeom>
+          <a:noFill/>
+        </p:spPr>
+        <p:txBody>
+          <a:bodyPr wrap="square" anchor="t">
+            <a:spAutoFit/>
+          </a:bodyPr>
+          <a:lstStyle/>
+          <a:p>
+            <a:pPr algn="ctr"/>
+            <a:r>
+              <a:rPr sz="1500" b="0">
+                <a:solidFill>
+                  <a:srgbClr val="9AA4B2"/>
                 </a:solidFill>
                 <a:latin typeface="Segoe UI"/>
               </a:rPr>
-              <a:t>▸  Listo para Uruguay: pensado para el mercado local, sin datos personales sensibles.</a:t>
-            </a:r>
-          </a:p>
-          <a:p>
-            <a:pPr>
-              <a:spcAft>
-                <a:spcPts val="1400"/>
-              </a:spcAft>
-            </a:pPr>
-            <a:r>
-              <a:rPr sz="1900">
-                <a:solidFill>
-                  <a:srgbClr val="00C896"/>
+              <a:t>tasa de conversión</a:t>
+            </a:r>
+          </a:p>
+        </p:txBody>
+      </p:sp>
+      <p:sp>
+        <p:nvSpPr>
+          <p:cNvPr id="11" name="Rounded Rectangle 10"/>
+          <p:cNvSpPr/>
+          <p:nvPr/>
+        </p:nvSpPr>
+        <p:spPr>
+          <a:xfrm>
+            <a:off x="8229600" y="2377440"/>
+            <a:ext cx="3566160" cy="2194560"/>
+          </a:xfrm>
+          <a:prstGeom prst="roundRect">
+            <a:avLst/>
+          </a:prstGeom>
+          <a:solidFill>
+            <a:srgbClr val="1A1F2E"/>
+          </a:solidFill>
+          <a:ln w="12700">
+            <a:solidFill>
+              <a:srgbClr val="FDCB6E"/>
+            </a:solidFill>
+          </a:ln>
+          <a:effectLst/>
+        </p:spPr>
+        <p:style>
+          <a:lnRef idx="1">
+            <a:schemeClr val="accent1"/>
+          </a:lnRef>
+          <a:fillRef idx="3">
+            <a:schemeClr val="accent1"/>
+          </a:fillRef>
+          <a:effectRef idx="2">
+            <a:schemeClr val="accent1"/>
+          </a:effectRef>
+          <a:fontRef idx="minor">
+            <a:schemeClr val="lt1"/>
+          </a:fontRef>
+        </p:style>
+        <p:txBody>
+          <a:bodyPr rtlCol="0" anchor="ctr"/>
+          <a:lstStyle/>
+          <a:p>
+            <a:pPr algn="ctr"/>
+          </a:p>
+        </p:txBody>
+      </p:sp>
+      <p:sp>
+        <p:nvSpPr>
+          <p:cNvPr id="12" name="TextBox 11"/>
+          <p:cNvSpPr txBox="1"/>
+          <p:nvPr/>
+        </p:nvSpPr>
+        <p:spPr>
+          <a:xfrm>
+            <a:off x="8229600" y="2880360"/>
+            <a:ext cx="3566160" cy="914400"/>
+          </a:xfrm>
+          <a:prstGeom prst="rect">
+            <a:avLst/>
+          </a:prstGeom>
+          <a:noFill/>
+        </p:spPr>
+        <p:txBody>
+          <a:bodyPr wrap="square" anchor="t">
+            <a:spAutoFit/>
+          </a:bodyPr>
+          <a:lstStyle/>
+          <a:p>
+            <a:pPr algn="ctr"/>
+            <a:r>
+              <a:rPr sz="4400" b="1">
+                <a:solidFill>
+                  <a:srgbClr val="FDCB6E"/>
                 </a:solidFill>
                 <a:latin typeface="Segoe UI"/>
               </a:rPr>
-              <a:t>▸  Agnóstico de industria: banca, financieras, retail, telco, utilities, fintech.</a:t>
+              <a:t>+5.1 pp</a:t>
+            </a:r>
+          </a:p>
+        </p:txBody>
+      </p:sp>
+      <p:sp>
+        <p:nvSpPr>
+          <p:cNvPr id="13" name="TextBox 12"/>
+          <p:cNvSpPr txBox="1"/>
+          <p:nvPr/>
+        </p:nvSpPr>
+        <p:spPr>
+          <a:xfrm>
+            <a:off x="8229600" y="3931920"/>
+            <a:ext cx="3566160" cy="457200"/>
+          </a:xfrm>
+          <a:prstGeom prst="rect">
+            <a:avLst/>
+          </a:prstGeom>
+          <a:noFill/>
+        </p:spPr>
+        <p:txBody>
+          <a:bodyPr wrap="square" anchor="t">
+            <a:spAutoFit/>
+          </a:bodyPr>
+          <a:lstStyle/>
+          <a:p>
+            <a:pPr algn="ctr"/>
+            <a:r>
+              <a:rPr sz="1500" b="0">
+                <a:solidFill>
+                  <a:srgbClr val="9AA4B2"/>
+                </a:solidFill>
+                <a:latin typeface="Segoe UI"/>
+              </a:rPr>
+              <a:t>tasa de recupero</a:t>
+            </a:r>
+          </a:p>
+        </p:txBody>
+      </p:sp>
+      <p:sp>
+        <p:nvSpPr>
+          <p:cNvPr id="14" name="TextBox 13"/>
+          <p:cNvSpPr txBox="1"/>
+          <p:nvPr/>
+        </p:nvSpPr>
+        <p:spPr>
+          <a:xfrm>
+            <a:off x="822960" y="5120640"/>
+            <a:ext cx="10515600" cy="914400"/>
+          </a:xfrm>
+          <a:prstGeom prst="rect">
+            <a:avLst/>
+          </a:prstGeom>
+          <a:noFill/>
+        </p:spPr>
+        <p:txBody>
+          <a:bodyPr wrap="square" anchor="t">
+            <a:spAutoFit/>
+          </a:bodyPr>
+          <a:lstStyle/>
+          <a:p>
+            <a:pPr algn="ctr"/>
+            <a:r>
+              <a:rPr sz="1400" b="0">
+                <a:solidFill>
+                  <a:srgbClr val="F5F6FA"/>
+                </a:solidFill>
+                <a:latin typeface="Segoe UI"/>
+              </a:rPr>
+              <a:t>Con Kobra: calidad 70 · conversión 68% · recupero 45%   |   Sin Kobra: calidad 60 · conversión 62% · recupero 40%</a:t>
+            </a:r>
+          </a:p>
+        </p:txBody>
+      </p:sp>
+      <p:sp>
+        <p:nvSpPr>
+          <p:cNvPr id="15" name="TextBox 14"/>
+          <p:cNvSpPr txBox="1"/>
+          <p:nvPr/>
+        </p:nvSpPr>
+        <p:spPr>
+          <a:xfrm>
+            <a:off x="822960" y="5852160"/>
+            <a:ext cx="10515600" cy="548640"/>
+          </a:xfrm>
+          <a:prstGeom prst="rect">
+            <a:avLst/>
+          </a:prstGeom>
+          <a:noFill/>
+        </p:spPr>
+        <p:txBody>
+          <a:bodyPr wrap="square" anchor="t">
+            <a:spAutoFit/>
+          </a:bodyPr>
+          <a:lstStyle/>
+          <a:p>
+            <a:pPr algn="ctr"/>
+            <a:r>
+              <a:rPr sz="1400" b="0">
+                <a:solidFill>
+                  <a:srgbClr val="00C896"/>
+                </a:solidFill>
+                <a:latin typeface="Segoe UI"/>
+              </a:rPr>
+              <a:t>Y la mejora se sostiene y crece mes a mes con la adopción de las herramientas.</a:t>
             </a:r>
           </a:p>
         </p:txBody>
@@ -4575,6 +4516,230 @@
 </file>
 
 <file path=ppt/slides/slide15.xml><?xml version="1.0" encoding="utf-8"?>
+<p:sld xmlns:a="http://schemas.openxmlformats.org/drawingml/2006/main" xmlns:p="http://schemas.openxmlformats.org/presentationml/2006/main" xmlns:r="http://schemas.openxmlformats.org/officeDocument/2006/relationships">
+  <p:cSld>
+    <p:bg>
+      <p:bgPr>
+        <a:solidFill>
+          <a:srgbClr val="0E1117"/>
+        </a:solidFill>
+        <a:effectLst/>
+      </p:bgPr>
+    </p:bg>
+    <p:spTree>
+      <p:nvGrpSpPr>
+        <p:cNvPr id="1" name=""/>
+        <p:cNvGrpSpPr/>
+        <p:nvPr/>
+      </p:nvGrpSpPr>
+      <p:grpSpPr/>
+      <p:sp>
+        <p:nvSpPr>
+          <p:cNvPr id="2" name="TextBox 1"/>
+          <p:cNvSpPr txBox="1"/>
+          <p:nvPr/>
+        </p:nvSpPr>
+        <p:spPr>
+          <a:xfrm>
+            <a:off x="640080" y="457200"/>
+            <a:ext cx="10972800" cy="731520"/>
+          </a:xfrm>
+          <a:prstGeom prst="rect">
+            <a:avLst/>
+          </a:prstGeom>
+          <a:noFill/>
+        </p:spPr>
+        <p:txBody>
+          <a:bodyPr wrap="square" anchor="t">
+            <a:spAutoFit/>
+          </a:bodyPr>
+          <a:lstStyle/>
+          <a:p>
+            <a:pPr algn="l"/>
+            <a:r>
+              <a:rPr sz="3200" b="1">
+                <a:solidFill>
+                  <a:srgbClr val="F5F6FA"/>
+                </a:solidFill>
+                <a:latin typeface="Segoe UI"/>
+              </a:rPr>
+              <a:t>Por qué Kobra</a:t>
+            </a:r>
+          </a:p>
+        </p:txBody>
+      </p:sp>
+      <p:sp>
+        <p:nvSpPr>
+          <p:cNvPr id="3" name="Rounded Rectangle 2"/>
+          <p:cNvSpPr/>
+          <p:nvPr/>
+        </p:nvSpPr>
+        <p:spPr>
+          <a:xfrm>
+            <a:off x="640080" y="1280160"/>
+            <a:ext cx="137160" cy="640080"/>
+          </a:xfrm>
+          <a:prstGeom prst="roundRect">
+            <a:avLst/>
+          </a:prstGeom>
+          <a:solidFill>
+            <a:srgbClr val="00C896"/>
+          </a:solidFill>
+          <a:ln>
+            <a:noFill/>
+          </a:ln>
+          <a:effectLst/>
+        </p:spPr>
+        <p:style>
+          <a:lnRef idx="1">
+            <a:schemeClr val="accent1"/>
+          </a:lnRef>
+          <a:fillRef idx="3">
+            <a:schemeClr val="accent1"/>
+          </a:fillRef>
+          <a:effectRef idx="2">
+            <a:schemeClr val="accent1"/>
+          </a:effectRef>
+          <a:fontRef idx="minor">
+            <a:schemeClr val="lt1"/>
+          </a:fontRef>
+        </p:style>
+        <p:txBody>
+          <a:bodyPr rtlCol="0" anchor="ctr"/>
+          <a:lstStyle/>
+          <a:p>
+            <a:pPr algn="ctr"/>
+          </a:p>
+        </p:txBody>
+      </p:sp>
+      <p:sp>
+        <p:nvSpPr>
+          <p:cNvPr id="4" name="TextBox 3"/>
+          <p:cNvSpPr txBox="1"/>
+          <p:nvPr/>
+        </p:nvSpPr>
+        <p:spPr>
+          <a:xfrm>
+            <a:off x="822960" y="1828800"/>
+            <a:ext cx="10515600" cy="4114800"/>
+          </a:xfrm>
+          <a:prstGeom prst="rect">
+            <a:avLst/>
+          </a:prstGeom>
+          <a:noFill/>
+        </p:spPr>
+        <p:txBody>
+          <a:bodyPr wrap="square">
+            <a:spAutoFit/>
+          </a:bodyPr>
+          <a:lstStyle/>
+          <a:p>
+            <a:pPr>
+              <a:spcAft>
+                <a:spcPts val="1400"/>
+              </a:spcAft>
+            </a:pPr>
+            <a:r>
+              <a:rPr sz="1900">
+                <a:solidFill>
+                  <a:srgbClr val="00C896"/>
+                </a:solidFill>
+                <a:latin typeface="Segoe UI"/>
+              </a:rPr>
+              <a:t>▸  Más recupero: prioriza por valor esperado, no por antigüedad de la deuda.</a:t>
+            </a:r>
+          </a:p>
+          <a:p>
+            <a:pPr>
+              <a:spcAft>
+                <a:spcPts val="1400"/>
+              </a:spcAft>
+            </a:pPr>
+            <a:r>
+              <a:rPr sz="1900">
+                <a:solidFill>
+                  <a:srgbClr val="00C896"/>
+                </a:solidFill>
+                <a:latin typeface="Segoe UI"/>
+              </a:rPr>
+              <a:t>▸  Asistencia en vivo: análisis de sentimiento de voz/WhatsApp que guía al gestor en la negociación.</a:t>
+            </a:r>
+          </a:p>
+          <a:p>
+            <a:pPr>
+              <a:spcAft>
+                <a:spcPts val="1400"/>
+              </a:spcAft>
+            </a:pPr>
+            <a:r>
+              <a:rPr sz="1900">
+                <a:solidFill>
+                  <a:srgbClr val="00C896"/>
+                </a:solidFill>
+                <a:latin typeface="Segoe UI"/>
+              </a:rPr>
+              <a:t>▸  Menos costo: automatiza estrategia y guiones; el gestor solo ejecuta.</a:t>
+            </a:r>
+          </a:p>
+          <a:p>
+            <a:pPr>
+              <a:spcAft>
+                <a:spcPts val="1400"/>
+              </a:spcAft>
+            </a:pPr>
+            <a:r>
+              <a:rPr sz="1900">
+                <a:solidFill>
+                  <a:srgbClr val="00C896"/>
+                </a:solidFill>
+                <a:latin typeface="Segoe UI"/>
+              </a:rPr>
+              <a:t>▸  Decisiones con datos: ML de probabilidad de pago con selección de modelos y calibración.</a:t>
+            </a:r>
+          </a:p>
+          <a:p>
+            <a:pPr>
+              <a:spcAft>
+                <a:spcPts val="1400"/>
+              </a:spcAft>
+            </a:pPr>
+            <a:r>
+              <a:rPr sz="1900">
+                <a:solidFill>
+                  <a:srgbClr val="00C896"/>
+                </a:solidFill>
+                <a:latin typeface="Segoe UI"/>
+              </a:rPr>
+              <a:t>▸  Listo para Uruguay: pensado para el mercado local, sin datos personales sensibles.</a:t>
+            </a:r>
+          </a:p>
+          <a:p>
+            <a:pPr>
+              <a:spcAft>
+                <a:spcPts val="1400"/>
+              </a:spcAft>
+            </a:pPr>
+            <a:r>
+              <a:rPr sz="1900">
+                <a:solidFill>
+                  <a:srgbClr val="00C896"/>
+                </a:solidFill>
+                <a:latin typeface="Segoe UI"/>
+              </a:rPr>
+              <a:t>▸  Agnóstico de industria: banca, financieras, retail, telco, utilities, fintech.</a:t>
+            </a:r>
+          </a:p>
+        </p:txBody>
+      </p:sp>
+    </p:spTree>
+  </p:cSld>
+  <p:clrMapOvr>
+    <a:masterClrMapping/>
+  </p:clrMapOvr>
+</p:sld>
+</file>
+
+<file path=ppt/slides/slide16.xml><?xml version="1.0" encoding="utf-8"?>
 <p:sld xmlns:a="http://schemas.openxmlformats.org/drawingml/2006/main" xmlns:p="http://schemas.openxmlformats.org/presentationml/2006/main" xmlns:r="http://schemas.openxmlformats.org/officeDocument/2006/relationships">
   <p:cSld>
     <p:bg>

--- a/presentation/Kobra_Presentacion_Gerencial.pptx
+++ b/presentation/Kobra_Presentacion_Gerencial.pptx
@@ -21,6 +21,7 @@
     <p:sldId id="269" r:id="rId20"/>
     <p:sldId id="270" r:id="rId21"/>
     <p:sldId id="271" r:id="rId22"/>
+    <p:sldId id="272" r:id="rId23"/>
   </p:sldIdLst>
   <p:sldSz cx="12191695" cy="6858000" type="screen4x3"/>
   <p:notesSz cx="6858000" cy="9144000"/>
@@ -3841,7 +3842,7 @@
                 </a:solidFill>
                 <a:latin typeface="Segoe UI"/>
               </a:rPr>
-              <a:t>Gestores &amp; Evolución</a:t>
+              <a:t>Streaming en vivo durante la llamada</a:t>
             </a:r>
           </a:p>
         </p:txBody>
@@ -3876,7 +3877,7 @@
                 </a:solidFill>
                 <a:latin typeface="Segoe UI"/>
               </a:rPr>
-              <a:t>Impacto de Kobra en calidad, conversión y recupero; evolución mes a mes por gestor.</a:t>
+              <a:t>SIPREC / Twilio Media Streams / Avaya DMCC: asesoría turno a turno mientras la llamada ocurre.</a:t>
             </a:r>
           </a:p>
         </p:txBody>
@@ -3927,7 +3928,7 @@
       </p:sp>
       <p:pic>
         <p:nvPicPr>
-          <p:cNvPr id="5" name="Picture 4" descr="dashboard_gestores.png"/>
+          <p:cNvPr id="5" name="Picture 4" descr="realtime_stream.png"/>
           <p:cNvPicPr>
             <a:picLocks noChangeAspect="1"/>
           </p:cNvPicPr>
@@ -3942,7 +3943,7 @@
         <p:spPr>
           <a:xfrm>
             <a:off x="640080" y="1554480"/>
-            <a:ext cx="10927080" cy="9561195"/>
+            <a:ext cx="10927080" cy="10326091"/>
           </a:xfrm>
           <a:prstGeom prst="rect">
             <a:avLst/>
@@ -3983,8 +3984,8 @@
         </p:nvSpPr>
         <p:spPr>
           <a:xfrm>
-            <a:off x="640080" y="457200"/>
-            <a:ext cx="10972800" cy="731520"/>
+            <a:off x="640080" y="320040"/>
+            <a:ext cx="10972800" cy="640080"/>
           </a:xfrm>
           <a:prstGeom prst="rect">
             <a:avLst/>
@@ -3999,71 +4000,27 @@
           <a:p>
             <a:pPr algn="l"/>
             <a:r>
-              <a:rPr sz="3200" b="1">
-                <a:solidFill>
-                  <a:srgbClr val="F5F6FA"/>
+              <a:rPr sz="2800" b="1">
+                <a:solidFill>
+                  <a:srgbClr val="00C896"/>
                 </a:solidFill>
                 <a:latin typeface="Segoe UI"/>
               </a:rPr>
-              <a:t>Impacto de Kobra en la gestión</a:t>
-            </a:r>
-          </a:p>
-        </p:txBody>
-      </p:sp>
-      <p:sp>
-        <p:nvSpPr>
-          <p:cNvPr id="3" name="Rounded Rectangle 2"/>
-          <p:cNvSpPr/>
-          <p:nvPr/>
-        </p:nvSpPr>
-        <p:spPr>
-          <a:xfrm>
-            <a:off x="640080" y="1280160"/>
-            <a:ext cx="137160" cy="640080"/>
-          </a:xfrm>
-          <a:prstGeom prst="roundRect">
-            <a:avLst/>
-          </a:prstGeom>
-          <a:solidFill>
-            <a:srgbClr val="00C896"/>
-          </a:solidFill>
-          <a:ln>
-            <a:noFill/>
-          </a:ln>
-          <a:effectLst/>
-        </p:spPr>
-        <p:style>
-          <a:lnRef idx="1">
-            <a:schemeClr val="accent1"/>
-          </a:lnRef>
-          <a:fillRef idx="3">
-            <a:schemeClr val="accent1"/>
-          </a:fillRef>
-          <a:effectRef idx="2">
-            <a:schemeClr val="accent1"/>
-          </a:effectRef>
-          <a:fontRef idx="minor">
-            <a:schemeClr val="lt1"/>
-          </a:fontRef>
-        </p:style>
-        <p:txBody>
-          <a:bodyPr rtlCol="0" anchor="ctr"/>
-          <a:lstStyle/>
-          <a:p>
-            <a:pPr algn="ctr"/>
-          </a:p>
-        </p:txBody>
-      </p:sp>
-      <p:sp>
-        <p:nvSpPr>
-          <p:cNvPr id="4" name="TextBox 3"/>
+              <a:t>Gestores &amp; Evolución</a:t>
+            </a:r>
+          </a:p>
+        </p:txBody>
+      </p:sp>
+      <p:sp>
+        <p:nvSpPr>
+          <p:cNvPr id="3" name="TextBox 2"/>
           <p:cNvSpPr txBox="1"/>
           <p:nvPr/>
         </p:nvSpPr>
         <p:spPr>
           <a:xfrm>
-            <a:off x="822960" y="1554480"/>
-            <a:ext cx="10515600" cy="548640"/>
+            <a:off x="640080" y="914400"/>
+            <a:ext cx="10972800" cy="457200"/>
           </a:xfrm>
           <a:prstGeom prst="rect">
             <a:avLst/>
@@ -4084,144 +4041,26 @@
                 </a:solidFill>
                 <a:latin typeface="Segoe UI"/>
               </a:rPr>
-              <a:t>Gestores que usan Kobra vs. grupo de control (mismo período)</a:t>
-            </a:r>
-          </a:p>
-        </p:txBody>
-      </p:sp>
-      <p:sp>
-        <p:nvSpPr>
-          <p:cNvPr id="5" name="Rounded Rectangle 4"/>
+              <a:t>Impacto de Kobra en calidad, conversión y recupero; evolución mes a mes por gestor.</a:t>
+            </a:r>
+          </a:p>
+        </p:txBody>
+      </p:sp>
+      <p:sp>
+        <p:nvSpPr>
+          <p:cNvPr id="4" name="Rounded Rectangle 3"/>
           <p:cNvSpPr/>
           <p:nvPr/>
         </p:nvSpPr>
         <p:spPr>
           <a:xfrm>
-            <a:off x="640080" y="2377440"/>
-            <a:ext cx="3566160" cy="2194560"/>
+            <a:off x="502920" y="1417320"/>
+            <a:ext cx="11201400" cy="5074920"/>
           </a:xfrm>
           <a:prstGeom prst="roundRect">
             <a:avLst/>
           </a:prstGeom>
-          <a:solidFill>
-            <a:srgbClr val="1A1F2E"/>
-          </a:solidFill>
-          <a:ln w="12700">
-            <a:solidFill>
-              <a:srgbClr val="00C896"/>
-            </a:solidFill>
-          </a:ln>
-          <a:effectLst/>
-        </p:spPr>
-        <p:style>
-          <a:lnRef idx="1">
-            <a:schemeClr val="accent1"/>
-          </a:lnRef>
-          <a:fillRef idx="3">
-            <a:schemeClr val="accent1"/>
-          </a:fillRef>
-          <a:effectRef idx="2">
-            <a:schemeClr val="accent1"/>
-          </a:effectRef>
-          <a:fontRef idx="minor">
-            <a:schemeClr val="lt1"/>
-          </a:fontRef>
-        </p:style>
-        <p:txBody>
-          <a:bodyPr rtlCol="0" anchor="ctr"/>
-          <a:lstStyle/>
-          <a:p>
-            <a:pPr algn="ctr"/>
-          </a:p>
-        </p:txBody>
-      </p:sp>
-      <p:sp>
-        <p:nvSpPr>
-          <p:cNvPr id="6" name="TextBox 5"/>
-          <p:cNvSpPr txBox="1"/>
-          <p:nvPr/>
-        </p:nvSpPr>
-        <p:spPr>
-          <a:xfrm>
-            <a:off x="640080" y="2880360"/>
-            <a:ext cx="3566160" cy="914400"/>
-          </a:xfrm>
-          <a:prstGeom prst="rect">
-            <a:avLst/>
-          </a:prstGeom>
-          <a:noFill/>
-        </p:spPr>
-        <p:txBody>
-          <a:bodyPr wrap="square" anchor="t">
-            <a:spAutoFit/>
-          </a:bodyPr>
-          <a:lstStyle/>
-          <a:p>
-            <a:pPr algn="ctr"/>
-            <a:r>
-              <a:rPr sz="4400" b="1">
-                <a:solidFill>
-                  <a:srgbClr val="00C896"/>
-                </a:solidFill>
-                <a:latin typeface="Segoe UI"/>
-              </a:rPr>
-              <a:t>+10.2</a:t>
-            </a:r>
-          </a:p>
-        </p:txBody>
-      </p:sp>
-      <p:sp>
-        <p:nvSpPr>
-          <p:cNvPr id="7" name="TextBox 6"/>
-          <p:cNvSpPr txBox="1"/>
-          <p:nvPr/>
-        </p:nvSpPr>
-        <p:spPr>
-          <a:xfrm>
-            <a:off x="640080" y="3931920"/>
-            <a:ext cx="3566160" cy="457200"/>
-          </a:xfrm>
-          <a:prstGeom prst="rect">
-            <a:avLst/>
-          </a:prstGeom>
-          <a:noFill/>
-        </p:spPr>
-        <p:txBody>
-          <a:bodyPr wrap="square" anchor="t">
-            <a:spAutoFit/>
-          </a:bodyPr>
-          <a:lstStyle/>
-          <a:p>
-            <a:pPr algn="ctr"/>
-            <a:r>
-              <a:rPr sz="1500" b="0">
-                <a:solidFill>
-                  <a:srgbClr val="9AA4B2"/>
-                </a:solidFill>
-                <a:latin typeface="Segoe UI"/>
-              </a:rPr>
-              <a:t>puntos de calidad de gestión</a:t>
-            </a:r>
-          </a:p>
-        </p:txBody>
-      </p:sp>
-      <p:sp>
-        <p:nvSpPr>
-          <p:cNvPr id="8" name="Rounded Rectangle 7"/>
-          <p:cNvSpPr/>
-          <p:nvPr/>
-        </p:nvSpPr>
-        <p:spPr>
-          <a:xfrm>
-            <a:off x="4434840" y="2377440"/>
-            <a:ext cx="3566160" cy="2194560"/>
-          </a:xfrm>
-          <a:prstGeom prst="roundRect">
-            <a:avLst/>
-          </a:prstGeom>
-          <a:solidFill>
-            <a:srgbClr val="1A1F2E"/>
-          </a:solidFill>
+          <a:noFill/>
           <a:ln w="12700">
             <a:solidFill>
               <a:srgbClr val="6C5CE7"/>
@@ -4251,262 +4090,30 @@
           </a:p>
         </p:txBody>
       </p:sp>
-      <p:sp>
-        <p:nvSpPr>
-          <p:cNvPr id="9" name="TextBox 8"/>
-          <p:cNvSpPr txBox="1"/>
-          <p:nvPr/>
-        </p:nvSpPr>
-        <p:spPr>
-          <a:xfrm>
-            <a:off x="4434840" y="2880360"/>
-            <a:ext cx="3566160" cy="914400"/>
-          </a:xfrm>
-          <a:prstGeom prst="rect">
-            <a:avLst/>
-          </a:prstGeom>
-          <a:noFill/>
-        </p:spPr>
-        <p:txBody>
-          <a:bodyPr wrap="square" anchor="t">
-            <a:spAutoFit/>
-          </a:bodyPr>
-          <a:lstStyle/>
-          <a:p>
-            <a:pPr algn="ctr"/>
-            <a:r>
-              <a:rPr sz="4400" b="1">
-                <a:solidFill>
-                  <a:srgbClr val="6C5CE7"/>
-                </a:solidFill>
-                <a:latin typeface="Segoe UI"/>
-              </a:rPr>
-              <a:t>+6.8 pp</a:t>
-            </a:r>
-          </a:p>
-        </p:txBody>
-      </p:sp>
-      <p:sp>
-        <p:nvSpPr>
-          <p:cNvPr id="10" name="TextBox 9"/>
-          <p:cNvSpPr txBox="1"/>
-          <p:nvPr/>
-        </p:nvSpPr>
-        <p:spPr>
-          <a:xfrm>
-            <a:off x="4434840" y="3931920"/>
-            <a:ext cx="3566160" cy="457200"/>
-          </a:xfrm>
-          <a:prstGeom prst="rect">
-            <a:avLst/>
-          </a:prstGeom>
-          <a:noFill/>
-        </p:spPr>
-        <p:txBody>
-          <a:bodyPr wrap="square" anchor="t">
-            <a:spAutoFit/>
-          </a:bodyPr>
-          <a:lstStyle/>
-          <a:p>
-            <a:pPr algn="ctr"/>
-            <a:r>
-              <a:rPr sz="1500" b="0">
-                <a:solidFill>
-                  <a:srgbClr val="9AA4B2"/>
-                </a:solidFill>
-                <a:latin typeface="Segoe UI"/>
-              </a:rPr>
-              <a:t>tasa de conversión</a:t>
-            </a:r>
-          </a:p>
-        </p:txBody>
-      </p:sp>
-      <p:sp>
-        <p:nvSpPr>
-          <p:cNvPr id="11" name="Rounded Rectangle 10"/>
-          <p:cNvSpPr/>
-          <p:nvPr/>
-        </p:nvSpPr>
-        <p:spPr>
-          <a:xfrm>
-            <a:off x="8229600" y="2377440"/>
-            <a:ext cx="3566160" cy="2194560"/>
-          </a:xfrm>
-          <a:prstGeom prst="roundRect">
-            <a:avLst/>
-          </a:prstGeom>
-          <a:solidFill>
-            <a:srgbClr val="1A1F2E"/>
-          </a:solidFill>
-          <a:ln w="12700">
-            <a:solidFill>
-              <a:srgbClr val="FDCB6E"/>
-            </a:solidFill>
-          </a:ln>
-          <a:effectLst/>
-        </p:spPr>
-        <p:style>
-          <a:lnRef idx="1">
-            <a:schemeClr val="accent1"/>
-          </a:lnRef>
-          <a:fillRef idx="3">
-            <a:schemeClr val="accent1"/>
-          </a:fillRef>
-          <a:effectRef idx="2">
-            <a:schemeClr val="accent1"/>
-          </a:effectRef>
-          <a:fontRef idx="minor">
-            <a:schemeClr val="lt1"/>
-          </a:fontRef>
-        </p:style>
-        <p:txBody>
-          <a:bodyPr rtlCol="0" anchor="ctr"/>
-          <a:lstStyle/>
-          <a:p>
-            <a:pPr algn="ctr"/>
-          </a:p>
-        </p:txBody>
-      </p:sp>
-      <p:sp>
-        <p:nvSpPr>
-          <p:cNvPr id="12" name="TextBox 11"/>
-          <p:cNvSpPr txBox="1"/>
-          <p:nvPr/>
-        </p:nvSpPr>
-        <p:spPr>
-          <a:xfrm>
-            <a:off x="8229600" y="2880360"/>
-            <a:ext cx="3566160" cy="914400"/>
-          </a:xfrm>
-          <a:prstGeom prst="rect">
-            <a:avLst/>
-          </a:prstGeom>
-          <a:noFill/>
-        </p:spPr>
-        <p:txBody>
-          <a:bodyPr wrap="square" anchor="t">
-            <a:spAutoFit/>
-          </a:bodyPr>
-          <a:lstStyle/>
-          <a:p>
-            <a:pPr algn="ctr"/>
-            <a:r>
-              <a:rPr sz="4400" b="1">
-                <a:solidFill>
-                  <a:srgbClr val="FDCB6E"/>
-                </a:solidFill>
-                <a:latin typeface="Segoe UI"/>
-              </a:rPr>
-              <a:t>+5.1 pp</a:t>
-            </a:r>
-          </a:p>
-        </p:txBody>
-      </p:sp>
-      <p:sp>
-        <p:nvSpPr>
-          <p:cNvPr id="13" name="TextBox 12"/>
-          <p:cNvSpPr txBox="1"/>
-          <p:nvPr/>
-        </p:nvSpPr>
-        <p:spPr>
-          <a:xfrm>
-            <a:off x="8229600" y="3931920"/>
-            <a:ext cx="3566160" cy="457200"/>
-          </a:xfrm>
-          <a:prstGeom prst="rect">
-            <a:avLst/>
-          </a:prstGeom>
-          <a:noFill/>
-        </p:spPr>
-        <p:txBody>
-          <a:bodyPr wrap="square" anchor="t">
-            <a:spAutoFit/>
-          </a:bodyPr>
-          <a:lstStyle/>
-          <a:p>
-            <a:pPr algn="ctr"/>
-            <a:r>
-              <a:rPr sz="1500" b="0">
-                <a:solidFill>
-                  <a:srgbClr val="9AA4B2"/>
-                </a:solidFill>
-                <a:latin typeface="Segoe UI"/>
-              </a:rPr>
-              <a:t>tasa de recupero</a:t>
-            </a:r>
-          </a:p>
-        </p:txBody>
-      </p:sp>
-      <p:sp>
-        <p:nvSpPr>
-          <p:cNvPr id="14" name="TextBox 13"/>
-          <p:cNvSpPr txBox="1"/>
-          <p:nvPr/>
-        </p:nvSpPr>
-        <p:spPr>
-          <a:xfrm>
-            <a:off x="822960" y="5120640"/>
-            <a:ext cx="10515600" cy="914400"/>
-          </a:xfrm>
-          <a:prstGeom prst="rect">
-            <a:avLst/>
-          </a:prstGeom>
-          <a:noFill/>
-        </p:spPr>
-        <p:txBody>
-          <a:bodyPr wrap="square" anchor="t">
-            <a:spAutoFit/>
-          </a:bodyPr>
-          <a:lstStyle/>
-          <a:p>
-            <a:pPr algn="ctr"/>
-            <a:r>
-              <a:rPr sz="1400" b="0">
-                <a:solidFill>
-                  <a:srgbClr val="F5F6FA"/>
-                </a:solidFill>
-                <a:latin typeface="Segoe UI"/>
-              </a:rPr>
-              <a:t>Con Kobra: calidad 70 · conversión 68% · recupero 45%   |   Sin Kobra: calidad 60 · conversión 62% · recupero 40%</a:t>
-            </a:r>
-          </a:p>
-        </p:txBody>
-      </p:sp>
-      <p:sp>
-        <p:nvSpPr>
-          <p:cNvPr id="15" name="TextBox 14"/>
-          <p:cNvSpPr txBox="1"/>
-          <p:nvPr/>
-        </p:nvSpPr>
-        <p:spPr>
-          <a:xfrm>
-            <a:off x="822960" y="5852160"/>
-            <a:ext cx="10515600" cy="548640"/>
-          </a:xfrm>
-          <a:prstGeom prst="rect">
-            <a:avLst/>
-          </a:prstGeom>
-          <a:noFill/>
-        </p:spPr>
-        <p:txBody>
-          <a:bodyPr wrap="square" anchor="t">
-            <a:spAutoFit/>
-          </a:bodyPr>
-          <a:lstStyle/>
-          <a:p>
-            <a:pPr algn="ctr"/>
-            <a:r>
-              <a:rPr sz="1400" b="0">
-                <a:solidFill>
-                  <a:srgbClr val="00C896"/>
-                </a:solidFill>
-                <a:latin typeface="Segoe UI"/>
-              </a:rPr>
-              <a:t>Y la mejora se sostiene y crece mes a mes con la adopción de las herramientas.</a:t>
-            </a:r>
-          </a:p>
-        </p:txBody>
-      </p:sp>
+      <p:pic>
+        <p:nvPicPr>
+          <p:cNvPr id="5" name="Picture 4" descr="dashboard_gestores.png"/>
+          <p:cNvPicPr>
+            <a:picLocks noChangeAspect="1"/>
+          </p:cNvPicPr>
+          <p:nvPr/>
+        </p:nvPicPr>
+        <p:blipFill>
+          <a:blip r:embed="rId2"/>
+          <a:stretch>
+            <a:fillRect/>
+          </a:stretch>
+        </p:blipFill>
+        <p:spPr>
+          <a:xfrm>
+            <a:off x="640080" y="1554480"/>
+            <a:ext cx="10927080" cy="9561195"/>
+          </a:xfrm>
+          <a:prstGeom prst="rect">
+            <a:avLst/>
+          </a:prstGeom>
+        </p:spPr>
+      </p:pic>
     </p:spTree>
   </p:cSld>
   <p:clrMapOvr>
@@ -4563,7 +4170,7 @@
                 </a:solidFill>
                 <a:latin typeface="Segoe UI"/>
               </a:rPr>
-              <a:t>Por qué Kobra</a:t>
+              <a:t>Impacto de Kobra en la gestión</a:t>
             </a:r>
           </a:p>
         </p:txBody>
@@ -4620,113 +4227,447 @@
         </p:nvSpPr>
         <p:spPr>
           <a:xfrm>
-            <a:off x="822960" y="1828800"/>
-            <a:ext cx="10515600" cy="4114800"/>
-          </a:xfrm>
-          <a:prstGeom prst="rect">
-            <a:avLst/>
-          </a:prstGeom>
-          <a:noFill/>
-        </p:spPr>
-        <p:txBody>
-          <a:bodyPr wrap="square">
+            <a:off x="822960" y="1554480"/>
+            <a:ext cx="10515600" cy="548640"/>
+          </a:xfrm>
+          <a:prstGeom prst="rect">
+            <a:avLst/>
+          </a:prstGeom>
+          <a:noFill/>
+        </p:spPr>
+        <p:txBody>
+          <a:bodyPr wrap="square" anchor="t">
             <a:spAutoFit/>
           </a:bodyPr>
           <a:lstStyle/>
           <a:p>
-            <a:pPr>
-              <a:spcAft>
-                <a:spcPts val="1400"/>
-              </a:spcAft>
-            </a:pPr>
-            <a:r>
-              <a:rPr sz="1900">
-                <a:solidFill>
-                  <a:srgbClr val="00C896"/>
+            <a:pPr algn="l"/>
+            <a:r>
+              <a:rPr sz="1500" b="0">
+                <a:solidFill>
+                  <a:srgbClr val="9AA4B2"/>
                 </a:solidFill>
                 <a:latin typeface="Segoe UI"/>
               </a:rPr>
-              <a:t>▸  Más recupero: prioriza por valor esperado, no por antigüedad de la deuda.</a:t>
-            </a:r>
-          </a:p>
-          <a:p>
-            <a:pPr>
-              <a:spcAft>
-                <a:spcPts val="1400"/>
-              </a:spcAft>
-            </a:pPr>
-            <a:r>
-              <a:rPr sz="1900">
+              <a:t>Gestores que usan Kobra vs. grupo de control (mismo período)</a:t>
+            </a:r>
+          </a:p>
+        </p:txBody>
+      </p:sp>
+      <p:sp>
+        <p:nvSpPr>
+          <p:cNvPr id="5" name="Rounded Rectangle 4"/>
+          <p:cNvSpPr/>
+          <p:nvPr/>
+        </p:nvSpPr>
+        <p:spPr>
+          <a:xfrm>
+            <a:off x="640080" y="2377440"/>
+            <a:ext cx="3566160" cy="2194560"/>
+          </a:xfrm>
+          <a:prstGeom prst="roundRect">
+            <a:avLst/>
+          </a:prstGeom>
+          <a:solidFill>
+            <a:srgbClr val="1A1F2E"/>
+          </a:solidFill>
+          <a:ln w="12700">
+            <a:solidFill>
+              <a:srgbClr val="00C896"/>
+            </a:solidFill>
+          </a:ln>
+          <a:effectLst/>
+        </p:spPr>
+        <p:style>
+          <a:lnRef idx="1">
+            <a:schemeClr val="accent1"/>
+          </a:lnRef>
+          <a:fillRef idx="3">
+            <a:schemeClr val="accent1"/>
+          </a:fillRef>
+          <a:effectRef idx="2">
+            <a:schemeClr val="accent1"/>
+          </a:effectRef>
+          <a:fontRef idx="minor">
+            <a:schemeClr val="lt1"/>
+          </a:fontRef>
+        </p:style>
+        <p:txBody>
+          <a:bodyPr rtlCol="0" anchor="ctr"/>
+          <a:lstStyle/>
+          <a:p>
+            <a:pPr algn="ctr"/>
+          </a:p>
+        </p:txBody>
+      </p:sp>
+      <p:sp>
+        <p:nvSpPr>
+          <p:cNvPr id="6" name="TextBox 5"/>
+          <p:cNvSpPr txBox="1"/>
+          <p:nvPr/>
+        </p:nvSpPr>
+        <p:spPr>
+          <a:xfrm>
+            <a:off x="640080" y="2880360"/>
+            <a:ext cx="3566160" cy="914400"/>
+          </a:xfrm>
+          <a:prstGeom prst="rect">
+            <a:avLst/>
+          </a:prstGeom>
+          <a:noFill/>
+        </p:spPr>
+        <p:txBody>
+          <a:bodyPr wrap="square" anchor="t">
+            <a:spAutoFit/>
+          </a:bodyPr>
+          <a:lstStyle/>
+          <a:p>
+            <a:pPr algn="ctr"/>
+            <a:r>
+              <a:rPr sz="4400" b="1">
                 <a:solidFill>
                   <a:srgbClr val="00C896"/>
                 </a:solidFill>
                 <a:latin typeface="Segoe UI"/>
               </a:rPr>
-              <a:t>▸  Asistencia en vivo: análisis de sentimiento de voz/WhatsApp que guía al gestor en la negociación.</a:t>
-            </a:r>
-          </a:p>
-          <a:p>
-            <a:pPr>
-              <a:spcAft>
-                <a:spcPts val="1400"/>
-              </a:spcAft>
-            </a:pPr>
-            <a:r>
-              <a:rPr sz="1900">
-                <a:solidFill>
-                  <a:srgbClr val="00C896"/>
+              <a:t>+10.2</a:t>
+            </a:r>
+          </a:p>
+        </p:txBody>
+      </p:sp>
+      <p:sp>
+        <p:nvSpPr>
+          <p:cNvPr id="7" name="TextBox 6"/>
+          <p:cNvSpPr txBox="1"/>
+          <p:nvPr/>
+        </p:nvSpPr>
+        <p:spPr>
+          <a:xfrm>
+            <a:off x="640080" y="3931920"/>
+            <a:ext cx="3566160" cy="457200"/>
+          </a:xfrm>
+          <a:prstGeom prst="rect">
+            <a:avLst/>
+          </a:prstGeom>
+          <a:noFill/>
+        </p:spPr>
+        <p:txBody>
+          <a:bodyPr wrap="square" anchor="t">
+            <a:spAutoFit/>
+          </a:bodyPr>
+          <a:lstStyle/>
+          <a:p>
+            <a:pPr algn="ctr"/>
+            <a:r>
+              <a:rPr sz="1500" b="0">
+                <a:solidFill>
+                  <a:srgbClr val="9AA4B2"/>
                 </a:solidFill>
                 <a:latin typeface="Segoe UI"/>
               </a:rPr>
-              <a:t>▸  Menos costo: automatiza estrategia y guiones; el gestor solo ejecuta.</a:t>
-            </a:r>
-          </a:p>
-          <a:p>
-            <a:pPr>
-              <a:spcAft>
-                <a:spcPts val="1400"/>
-              </a:spcAft>
-            </a:pPr>
-            <a:r>
-              <a:rPr sz="1900">
-                <a:solidFill>
-                  <a:srgbClr val="00C896"/>
+              <a:t>puntos de calidad de gestión</a:t>
+            </a:r>
+          </a:p>
+        </p:txBody>
+      </p:sp>
+      <p:sp>
+        <p:nvSpPr>
+          <p:cNvPr id="8" name="Rounded Rectangle 7"/>
+          <p:cNvSpPr/>
+          <p:nvPr/>
+        </p:nvSpPr>
+        <p:spPr>
+          <a:xfrm>
+            <a:off x="4434840" y="2377440"/>
+            <a:ext cx="3566160" cy="2194560"/>
+          </a:xfrm>
+          <a:prstGeom prst="roundRect">
+            <a:avLst/>
+          </a:prstGeom>
+          <a:solidFill>
+            <a:srgbClr val="1A1F2E"/>
+          </a:solidFill>
+          <a:ln w="12700">
+            <a:solidFill>
+              <a:srgbClr val="6C5CE7"/>
+            </a:solidFill>
+          </a:ln>
+          <a:effectLst/>
+        </p:spPr>
+        <p:style>
+          <a:lnRef idx="1">
+            <a:schemeClr val="accent1"/>
+          </a:lnRef>
+          <a:fillRef idx="3">
+            <a:schemeClr val="accent1"/>
+          </a:fillRef>
+          <a:effectRef idx="2">
+            <a:schemeClr val="accent1"/>
+          </a:effectRef>
+          <a:fontRef idx="minor">
+            <a:schemeClr val="lt1"/>
+          </a:fontRef>
+        </p:style>
+        <p:txBody>
+          <a:bodyPr rtlCol="0" anchor="ctr"/>
+          <a:lstStyle/>
+          <a:p>
+            <a:pPr algn="ctr"/>
+          </a:p>
+        </p:txBody>
+      </p:sp>
+      <p:sp>
+        <p:nvSpPr>
+          <p:cNvPr id="9" name="TextBox 8"/>
+          <p:cNvSpPr txBox="1"/>
+          <p:nvPr/>
+        </p:nvSpPr>
+        <p:spPr>
+          <a:xfrm>
+            <a:off x="4434840" y="2880360"/>
+            <a:ext cx="3566160" cy="914400"/>
+          </a:xfrm>
+          <a:prstGeom prst="rect">
+            <a:avLst/>
+          </a:prstGeom>
+          <a:noFill/>
+        </p:spPr>
+        <p:txBody>
+          <a:bodyPr wrap="square" anchor="t">
+            <a:spAutoFit/>
+          </a:bodyPr>
+          <a:lstStyle/>
+          <a:p>
+            <a:pPr algn="ctr"/>
+            <a:r>
+              <a:rPr sz="4400" b="1">
+                <a:solidFill>
+                  <a:srgbClr val="6C5CE7"/>
                 </a:solidFill>
                 <a:latin typeface="Segoe UI"/>
               </a:rPr>
-              <a:t>▸  Decisiones con datos: ML de probabilidad de pago con selección de modelos y calibración.</a:t>
-            </a:r>
-          </a:p>
-          <a:p>
-            <a:pPr>
-              <a:spcAft>
-                <a:spcPts val="1400"/>
-              </a:spcAft>
-            </a:pPr>
-            <a:r>
-              <a:rPr sz="1900">
-                <a:solidFill>
-                  <a:srgbClr val="00C896"/>
+              <a:t>+6.8 pp</a:t>
+            </a:r>
+          </a:p>
+        </p:txBody>
+      </p:sp>
+      <p:sp>
+        <p:nvSpPr>
+          <p:cNvPr id="10" name="TextBox 9"/>
+          <p:cNvSpPr txBox="1"/>
+          <p:nvPr/>
+        </p:nvSpPr>
+        <p:spPr>
+          <a:xfrm>
+            <a:off x="4434840" y="3931920"/>
+            <a:ext cx="3566160" cy="457200"/>
+          </a:xfrm>
+          <a:prstGeom prst="rect">
+            <a:avLst/>
+          </a:prstGeom>
+          <a:noFill/>
+        </p:spPr>
+        <p:txBody>
+          <a:bodyPr wrap="square" anchor="t">
+            <a:spAutoFit/>
+          </a:bodyPr>
+          <a:lstStyle/>
+          <a:p>
+            <a:pPr algn="ctr"/>
+            <a:r>
+              <a:rPr sz="1500" b="0">
+                <a:solidFill>
+                  <a:srgbClr val="9AA4B2"/>
                 </a:solidFill>
                 <a:latin typeface="Segoe UI"/>
               </a:rPr>
-              <a:t>▸  Listo para Uruguay: pensado para el mercado local, sin datos personales sensibles.</a:t>
-            </a:r>
-          </a:p>
-          <a:p>
-            <a:pPr>
-              <a:spcAft>
-                <a:spcPts val="1400"/>
-              </a:spcAft>
-            </a:pPr>
-            <a:r>
-              <a:rPr sz="1900">
-                <a:solidFill>
-                  <a:srgbClr val="00C896"/>
+              <a:t>tasa de conversión</a:t>
+            </a:r>
+          </a:p>
+        </p:txBody>
+      </p:sp>
+      <p:sp>
+        <p:nvSpPr>
+          <p:cNvPr id="11" name="Rounded Rectangle 10"/>
+          <p:cNvSpPr/>
+          <p:nvPr/>
+        </p:nvSpPr>
+        <p:spPr>
+          <a:xfrm>
+            <a:off x="8229600" y="2377440"/>
+            <a:ext cx="3566160" cy="2194560"/>
+          </a:xfrm>
+          <a:prstGeom prst="roundRect">
+            <a:avLst/>
+          </a:prstGeom>
+          <a:solidFill>
+            <a:srgbClr val="1A1F2E"/>
+          </a:solidFill>
+          <a:ln w="12700">
+            <a:solidFill>
+              <a:srgbClr val="FDCB6E"/>
+            </a:solidFill>
+          </a:ln>
+          <a:effectLst/>
+        </p:spPr>
+        <p:style>
+          <a:lnRef idx="1">
+            <a:schemeClr val="accent1"/>
+          </a:lnRef>
+          <a:fillRef idx="3">
+            <a:schemeClr val="accent1"/>
+          </a:fillRef>
+          <a:effectRef idx="2">
+            <a:schemeClr val="accent1"/>
+          </a:effectRef>
+          <a:fontRef idx="minor">
+            <a:schemeClr val="lt1"/>
+          </a:fontRef>
+        </p:style>
+        <p:txBody>
+          <a:bodyPr rtlCol="0" anchor="ctr"/>
+          <a:lstStyle/>
+          <a:p>
+            <a:pPr algn="ctr"/>
+          </a:p>
+        </p:txBody>
+      </p:sp>
+      <p:sp>
+        <p:nvSpPr>
+          <p:cNvPr id="12" name="TextBox 11"/>
+          <p:cNvSpPr txBox="1"/>
+          <p:nvPr/>
+        </p:nvSpPr>
+        <p:spPr>
+          <a:xfrm>
+            <a:off x="8229600" y="2880360"/>
+            <a:ext cx="3566160" cy="914400"/>
+          </a:xfrm>
+          <a:prstGeom prst="rect">
+            <a:avLst/>
+          </a:prstGeom>
+          <a:noFill/>
+        </p:spPr>
+        <p:txBody>
+          <a:bodyPr wrap="square" anchor="t">
+            <a:spAutoFit/>
+          </a:bodyPr>
+          <a:lstStyle/>
+          <a:p>
+            <a:pPr algn="ctr"/>
+            <a:r>
+              <a:rPr sz="4400" b="1">
+                <a:solidFill>
+                  <a:srgbClr val="FDCB6E"/>
                 </a:solidFill>
                 <a:latin typeface="Segoe UI"/>
               </a:rPr>
-              <a:t>▸  Agnóstico de industria: banca, financieras, retail, telco, utilities, fintech.</a:t>
+              <a:t>+5.1 pp</a:t>
+            </a:r>
+          </a:p>
+        </p:txBody>
+      </p:sp>
+      <p:sp>
+        <p:nvSpPr>
+          <p:cNvPr id="13" name="TextBox 12"/>
+          <p:cNvSpPr txBox="1"/>
+          <p:nvPr/>
+        </p:nvSpPr>
+        <p:spPr>
+          <a:xfrm>
+            <a:off x="8229600" y="3931920"/>
+            <a:ext cx="3566160" cy="457200"/>
+          </a:xfrm>
+          <a:prstGeom prst="rect">
+            <a:avLst/>
+          </a:prstGeom>
+          <a:noFill/>
+        </p:spPr>
+        <p:txBody>
+          <a:bodyPr wrap="square" anchor="t">
+            <a:spAutoFit/>
+          </a:bodyPr>
+          <a:lstStyle/>
+          <a:p>
+            <a:pPr algn="ctr"/>
+            <a:r>
+              <a:rPr sz="1500" b="0">
+                <a:solidFill>
+                  <a:srgbClr val="9AA4B2"/>
+                </a:solidFill>
+                <a:latin typeface="Segoe UI"/>
+              </a:rPr>
+              <a:t>tasa de recupero</a:t>
+            </a:r>
+          </a:p>
+        </p:txBody>
+      </p:sp>
+      <p:sp>
+        <p:nvSpPr>
+          <p:cNvPr id="14" name="TextBox 13"/>
+          <p:cNvSpPr txBox="1"/>
+          <p:nvPr/>
+        </p:nvSpPr>
+        <p:spPr>
+          <a:xfrm>
+            <a:off x="822960" y="5120640"/>
+            <a:ext cx="10515600" cy="914400"/>
+          </a:xfrm>
+          <a:prstGeom prst="rect">
+            <a:avLst/>
+          </a:prstGeom>
+          <a:noFill/>
+        </p:spPr>
+        <p:txBody>
+          <a:bodyPr wrap="square" anchor="t">
+            <a:spAutoFit/>
+          </a:bodyPr>
+          <a:lstStyle/>
+          <a:p>
+            <a:pPr algn="ctr"/>
+            <a:r>
+              <a:rPr sz="1400" b="0">
+                <a:solidFill>
+                  <a:srgbClr val="F5F6FA"/>
+                </a:solidFill>
+                <a:latin typeface="Segoe UI"/>
+              </a:rPr>
+              <a:t>Con Kobra: calidad 70 · conversión 68% · recupero 45%   |   Sin Kobra: calidad 60 · conversión 62% · recupero 40%</a:t>
+            </a:r>
+          </a:p>
+        </p:txBody>
+      </p:sp>
+      <p:sp>
+        <p:nvSpPr>
+          <p:cNvPr id="15" name="TextBox 14"/>
+          <p:cNvSpPr txBox="1"/>
+          <p:nvPr/>
+        </p:nvSpPr>
+        <p:spPr>
+          <a:xfrm>
+            <a:off x="822960" y="5852160"/>
+            <a:ext cx="10515600" cy="548640"/>
+          </a:xfrm>
+          <a:prstGeom prst="rect">
+            <a:avLst/>
+          </a:prstGeom>
+          <a:noFill/>
+        </p:spPr>
+        <p:txBody>
+          <a:bodyPr wrap="square" anchor="t">
+            <a:spAutoFit/>
+          </a:bodyPr>
+          <a:lstStyle/>
+          <a:p>
+            <a:pPr algn="ctr"/>
+            <a:r>
+              <a:rPr sz="1400" b="0">
+                <a:solidFill>
+                  <a:srgbClr val="00C896"/>
+                </a:solidFill>
+                <a:latin typeface="Segoe UI"/>
+              </a:rPr>
+              <a:t>Y la mejora se sostiene y crece mes a mes con la adopción de las herramientas.</a:t>
             </a:r>
           </a:p>
         </p:txBody>
@@ -4740,6 +4681,230 @@
 </file>
 
 <file path=ppt/slides/slide16.xml><?xml version="1.0" encoding="utf-8"?>
+<p:sld xmlns:a="http://schemas.openxmlformats.org/drawingml/2006/main" xmlns:p="http://schemas.openxmlformats.org/presentationml/2006/main" xmlns:r="http://schemas.openxmlformats.org/officeDocument/2006/relationships">
+  <p:cSld>
+    <p:bg>
+      <p:bgPr>
+        <a:solidFill>
+          <a:srgbClr val="0E1117"/>
+        </a:solidFill>
+        <a:effectLst/>
+      </p:bgPr>
+    </p:bg>
+    <p:spTree>
+      <p:nvGrpSpPr>
+        <p:cNvPr id="1" name=""/>
+        <p:cNvGrpSpPr/>
+        <p:nvPr/>
+      </p:nvGrpSpPr>
+      <p:grpSpPr/>
+      <p:sp>
+        <p:nvSpPr>
+          <p:cNvPr id="2" name="TextBox 1"/>
+          <p:cNvSpPr txBox="1"/>
+          <p:nvPr/>
+        </p:nvSpPr>
+        <p:spPr>
+          <a:xfrm>
+            <a:off x="640080" y="457200"/>
+            <a:ext cx="10972800" cy="731520"/>
+          </a:xfrm>
+          <a:prstGeom prst="rect">
+            <a:avLst/>
+          </a:prstGeom>
+          <a:noFill/>
+        </p:spPr>
+        <p:txBody>
+          <a:bodyPr wrap="square" anchor="t">
+            <a:spAutoFit/>
+          </a:bodyPr>
+          <a:lstStyle/>
+          <a:p>
+            <a:pPr algn="l"/>
+            <a:r>
+              <a:rPr sz="3200" b="1">
+                <a:solidFill>
+                  <a:srgbClr val="F5F6FA"/>
+                </a:solidFill>
+                <a:latin typeface="Segoe UI"/>
+              </a:rPr>
+              <a:t>Por qué Kobra</a:t>
+            </a:r>
+          </a:p>
+        </p:txBody>
+      </p:sp>
+      <p:sp>
+        <p:nvSpPr>
+          <p:cNvPr id="3" name="Rounded Rectangle 2"/>
+          <p:cNvSpPr/>
+          <p:nvPr/>
+        </p:nvSpPr>
+        <p:spPr>
+          <a:xfrm>
+            <a:off x="640080" y="1280160"/>
+            <a:ext cx="137160" cy="640080"/>
+          </a:xfrm>
+          <a:prstGeom prst="roundRect">
+            <a:avLst/>
+          </a:prstGeom>
+          <a:solidFill>
+            <a:srgbClr val="00C896"/>
+          </a:solidFill>
+          <a:ln>
+            <a:noFill/>
+          </a:ln>
+          <a:effectLst/>
+        </p:spPr>
+        <p:style>
+          <a:lnRef idx="1">
+            <a:schemeClr val="accent1"/>
+          </a:lnRef>
+          <a:fillRef idx="3">
+            <a:schemeClr val="accent1"/>
+          </a:fillRef>
+          <a:effectRef idx="2">
+            <a:schemeClr val="accent1"/>
+          </a:effectRef>
+          <a:fontRef idx="minor">
+            <a:schemeClr val="lt1"/>
+          </a:fontRef>
+        </p:style>
+        <p:txBody>
+          <a:bodyPr rtlCol="0" anchor="ctr"/>
+          <a:lstStyle/>
+          <a:p>
+            <a:pPr algn="ctr"/>
+          </a:p>
+        </p:txBody>
+      </p:sp>
+      <p:sp>
+        <p:nvSpPr>
+          <p:cNvPr id="4" name="TextBox 3"/>
+          <p:cNvSpPr txBox="1"/>
+          <p:nvPr/>
+        </p:nvSpPr>
+        <p:spPr>
+          <a:xfrm>
+            <a:off x="822960" y="1828800"/>
+            <a:ext cx="10515600" cy="4114800"/>
+          </a:xfrm>
+          <a:prstGeom prst="rect">
+            <a:avLst/>
+          </a:prstGeom>
+          <a:noFill/>
+        </p:spPr>
+        <p:txBody>
+          <a:bodyPr wrap="square">
+            <a:spAutoFit/>
+          </a:bodyPr>
+          <a:lstStyle/>
+          <a:p>
+            <a:pPr>
+              <a:spcAft>
+                <a:spcPts val="1400"/>
+              </a:spcAft>
+            </a:pPr>
+            <a:r>
+              <a:rPr sz="1900">
+                <a:solidFill>
+                  <a:srgbClr val="00C896"/>
+                </a:solidFill>
+                <a:latin typeface="Segoe UI"/>
+              </a:rPr>
+              <a:t>▸  Más recupero: prioriza por valor esperado, no por antigüedad de la deuda.</a:t>
+            </a:r>
+          </a:p>
+          <a:p>
+            <a:pPr>
+              <a:spcAft>
+                <a:spcPts val="1400"/>
+              </a:spcAft>
+            </a:pPr>
+            <a:r>
+              <a:rPr sz="1900">
+                <a:solidFill>
+                  <a:srgbClr val="00C896"/>
+                </a:solidFill>
+                <a:latin typeface="Segoe UI"/>
+              </a:rPr>
+              <a:t>▸  Asistencia en vivo: análisis de sentimiento de voz/WhatsApp que guía al gestor en la negociación.</a:t>
+            </a:r>
+          </a:p>
+          <a:p>
+            <a:pPr>
+              <a:spcAft>
+                <a:spcPts val="1400"/>
+              </a:spcAft>
+            </a:pPr>
+            <a:r>
+              <a:rPr sz="1900">
+                <a:solidFill>
+                  <a:srgbClr val="00C896"/>
+                </a:solidFill>
+                <a:latin typeface="Segoe UI"/>
+              </a:rPr>
+              <a:t>▸  Menos costo: automatiza estrategia y guiones; el gestor solo ejecuta.</a:t>
+            </a:r>
+          </a:p>
+          <a:p>
+            <a:pPr>
+              <a:spcAft>
+                <a:spcPts val="1400"/>
+              </a:spcAft>
+            </a:pPr>
+            <a:r>
+              <a:rPr sz="1900">
+                <a:solidFill>
+                  <a:srgbClr val="00C896"/>
+                </a:solidFill>
+                <a:latin typeface="Segoe UI"/>
+              </a:rPr>
+              <a:t>▸  Decisiones con datos: ML de probabilidad de pago con selección de modelos y calibración.</a:t>
+            </a:r>
+          </a:p>
+          <a:p>
+            <a:pPr>
+              <a:spcAft>
+                <a:spcPts val="1400"/>
+              </a:spcAft>
+            </a:pPr>
+            <a:r>
+              <a:rPr sz="1900">
+                <a:solidFill>
+                  <a:srgbClr val="00C896"/>
+                </a:solidFill>
+                <a:latin typeface="Segoe UI"/>
+              </a:rPr>
+              <a:t>▸  Listo para Uruguay: pensado para el mercado local, sin datos personales sensibles.</a:t>
+            </a:r>
+          </a:p>
+          <a:p>
+            <a:pPr>
+              <a:spcAft>
+                <a:spcPts val="1400"/>
+              </a:spcAft>
+            </a:pPr>
+            <a:r>
+              <a:rPr sz="1900">
+                <a:solidFill>
+                  <a:srgbClr val="00C896"/>
+                </a:solidFill>
+                <a:latin typeface="Segoe UI"/>
+              </a:rPr>
+              <a:t>▸  Agnóstico de industria: banca, financieras, retail, telco, utilities, fintech.</a:t>
+            </a:r>
+          </a:p>
+        </p:txBody>
+      </p:sp>
+    </p:spTree>
+  </p:cSld>
+  <p:clrMapOvr>
+    <a:masterClrMapping/>
+  </p:clrMapOvr>
+</p:sld>
+</file>
+
+<file path=ppt/slides/slide17.xml><?xml version="1.0" encoding="utf-8"?>
 <p:sld xmlns:a="http://schemas.openxmlformats.org/drawingml/2006/main" xmlns:p="http://schemas.openxmlformats.org/presentationml/2006/main" xmlns:r="http://schemas.openxmlformats.org/officeDocument/2006/relationships">
   <p:cSld>
     <p:bg>

--- a/presentation/Kobra_Presentacion_Gerencial.pptx
+++ b/presentation/Kobra_Presentacion_Gerencial.pptx
@@ -22,6 +22,7 @@
     <p:sldId id="270" r:id="rId21"/>
     <p:sldId id="271" r:id="rId22"/>
     <p:sldId id="272" r:id="rId23"/>
+    <p:sldId id="273" r:id="rId24"/>
   </p:sldIdLst>
   <p:sldSz cx="12191695" cy="6858000" type="screen4x3"/>
   <p:notesSz cx="6858000" cy="9144000"/>
@@ -4905,6 +4906,691 @@
 </file>
 
 <file path=ppt/slides/slide17.xml><?xml version="1.0" encoding="utf-8"?>
+<p:sld xmlns:a="http://schemas.openxmlformats.org/drawingml/2006/main" xmlns:p="http://schemas.openxmlformats.org/presentationml/2006/main" xmlns:r="http://schemas.openxmlformats.org/officeDocument/2006/relationships">
+  <p:cSld>
+    <p:bg>
+      <p:bgPr>
+        <a:solidFill>
+          <a:srgbClr val="0E1117"/>
+        </a:solidFill>
+        <a:effectLst/>
+      </p:bgPr>
+    </p:bg>
+    <p:spTree>
+      <p:nvGrpSpPr>
+        <p:cNvPr id="1" name=""/>
+        <p:cNvGrpSpPr/>
+        <p:nvPr/>
+      </p:nvGrpSpPr>
+      <p:grpSpPr/>
+      <p:sp>
+        <p:nvSpPr>
+          <p:cNvPr id="2" name="TextBox 1"/>
+          <p:cNvSpPr txBox="1"/>
+          <p:nvPr/>
+        </p:nvSpPr>
+        <p:spPr>
+          <a:xfrm>
+            <a:off x="640080" y="457200"/>
+            <a:ext cx="10972800" cy="731520"/>
+          </a:xfrm>
+          <a:prstGeom prst="rect">
+            <a:avLst/>
+          </a:prstGeom>
+          <a:noFill/>
+        </p:spPr>
+        <p:txBody>
+          <a:bodyPr wrap="square" anchor="t">
+            <a:spAutoFit/>
+          </a:bodyPr>
+          <a:lstStyle/>
+          <a:p>
+            <a:pPr algn="l"/>
+            <a:r>
+              <a:rPr sz="3200" b="1">
+                <a:solidFill>
+                  <a:srgbClr val="F5F6FA"/>
+                </a:solidFill>
+                <a:latin typeface="Segoe UI"/>
+              </a:rPr>
+              <a:t>Listo para producción</a:t>
+            </a:r>
+          </a:p>
+        </p:txBody>
+      </p:sp>
+      <p:sp>
+        <p:nvSpPr>
+          <p:cNvPr id="3" name="Rounded Rectangle 2"/>
+          <p:cNvSpPr/>
+          <p:nvPr/>
+        </p:nvSpPr>
+        <p:spPr>
+          <a:xfrm>
+            <a:off x="640080" y="1280160"/>
+            <a:ext cx="137160" cy="640080"/>
+          </a:xfrm>
+          <a:prstGeom prst="roundRect">
+            <a:avLst/>
+          </a:prstGeom>
+          <a:solidFill>
+            <a:srgbClr val="00C896"/>
+          </a:solidFill>
+          <a:ln>
+            <a:noFill/>
+          </a:ln>
+          <a:effectLst/>
+        </p:spPr>
+        <p:style>
+          <a:lnRef idx="1">
+            <a:schemeClr val="accent1"/>
+          </a:lnRef>
+          <a:fillRef idx="3">
+            <a:schemeClr val="accent1"/>
+          </a:fillRef>
+          <a:effectRef idx="2">
+            <a:schemeClr val="accent1"/>
+          </a:effectRef>
+          <a:fontRef idx="minor">
+            <a:schemeClr val="lt1"/>
+          </a:fontRef>
+        </p:style>
+        <p:txBody>
+          <a:bodyPr rtlCol="0" anchor="ctr"/>
+          <a:lstStyle/>
+          <a:p>
+            <a:pPr algn="ctr"/>
+          </a:p>
+        </p:txBody>
+      </p:sp>
+      <p:sp>
+        <p:nvSpPr>
+          <p:cNvPr id="4" name="Rounded Rectangle 3"/>
+          <p:cNvSpPr/>
+          <p:nvPr/>
+        </p:nvSpPr>
+        <p:spPr>
+          <a:xfrm>
+            <a:off x="822960" y="1828800"/>
+            <a:ext cx="4206240" cy="786384"/>
+          </a:xfrm>
+          <a:prstGeom prst="roundRect">
+            <a:avLst/>
+          </a:prstGeom>
+          <a:solidFill>
+            <a:srgbClr val="1A1F2E"/>
+          </a:solidFill>
+          <a:ln w="12700">
+            <a:solidFill>
+              <a:srgbClr val="00C896"/>
+            </a:solidFill>
+          </a:ln>
+          <a:effectLst/>
+        </p:spPr>
+        <p:style>
+          <a:lnRef idx="1">
+            <a:schemeClr val="accent1"/>
+          </a:lnRef>
+          <a:fillRef idx="3">
+            <a:schemeClr val="accent1"/>
+          </a:fillRef>
+          <a:effectRef idx="2">
+            <a:schemeClr val="accent1"/>
+          </a:effectRef>
+          <a:fontRef idx="minor">
+            <a:schemeClr val="lt1"/>
+          </a:fontRef>
+        </p:style>
+        <p:txBody>
+          <a:bodyPr rtlCol="0" anchor="ctr"/>
+          <a:lstStyle/>
+          <a:p>
+            <a:pPr algn="ctr"/>
+          </a:p>
+        </p:txBody>
+      </p:sp>
+      <p:sp>
+        <p:nvSpPr>
+          <p:cNvPr id="5" name="TextBox 4"/>
+          <p:cNvSpPr txBox="1"/>
+          <p:nvPr/>
+        </p:nvSpPr>
+        <p:spPr>
+          <a:xfrm>
+            <a:off x="1005840" y="1975104"/>
+            <a:ext cx="3931920" cy="548640"/>
+          </a:xfrm>
+          <a:prstGeom prst="rect">
+            <a:avLst/>
+          </a:prstGeom>
+          <a:noFill/>
+        </p:spPr>
+        <p:txBody>
+          <a:bodyPr wrap="square" anchor="t">
+            <a:spAutoFit/>
+          </a:bodyPr>
+          <a:lstStyle/>
+          <a:p>
+            <a:pPr algn="l"/>
+            <a:r>
+              <a:rPr sz="1500" b="1">
+                <a:solidFill>
+                  <a:srgbClr val="00C896"/>
+                </a:solidFill>
+                <a:latin typeface="Segoe UI"/>
+              </a:rPr>
+              <a:t>🐳 Despliegue en 1 comando</a:t>
+            </a:r>
+          </a:p>
+        </p:txBody>
+      </p:sp>
+      <p:sp>
+        <p:nvSpPr>
+          <p:cNvPr id="6" name="TextBox 5"/>
+          <p:cNvSpPr txBox="1"/>
+          <p:nvPr/>
+        </p:nvSpPr>
+        <p:spPr>
+          <a:xfrm>
+            <a:off x="5303520" y="1920240"/>
+            <a:ext cx="6217920" cy="640080"/>
+          </a:xfrm>
+          <a:prstGeom prst="rect">
+            <a:avLst/>
+          </a:prstGeom>
+          <a:noFill/>
+        </p:spPr>
+        <p:txBody>
+          <a:bodyPr wrap="square" anchor="t">
+            <a:spAutoFit/>
+          </a:bodyPr>
+          <a:lstStyle/>
+          <a:p>
+            <a:pPr algn="l"/>
+            <a:r>
+              <a:rPr sz="1400" b="0">
+                <a:solidFill>
+                  <a:srgbClr val="F5F6FA"/>
+                </a:solidFill>
+                <a:latin typeface="Segoe UI"/>
+              </a:rPr>
+              <a:t>docker compose up: dashboard + servicio de audio en vivo, con datos y modelo autogenerados.</a:t>
+            </a:r>
+          </a:p>
+        </p:txBody>
+      </p:sp>
+      <p:sp>
+        <p:nvSpPr>
+          <p:cNvPr id="7" name="Rounded Rectangle 6"/>
+          <p:cNvSpPr/>
+          <p:nvPr/>
+        </p:nvSpPr>
+        <p:spPr>
+          <a:xfrm>
+            <a:off x="822960" y="2724912"/>
+            <a:ext cx="4206240" cy="786384"/>
+          </a:xfrm>
+          <a:prstGeom prst="roundRect">
+            <a:avLst/>
+          </a:prstGeom>
+          <a:solidFill>
+            <a:srgbClr val="1A1F2E"/>
+          </a:solidFill>
+          <a:ln w="12700">
+            <a:solidFill>
+              <a:srgbClr val="00C896"/>
+            </a:solidFill>
+          </a:ln>
+          <a:effectLst/>
+        </p:spPr>
+        <p:style>
+          <a:lnRef idx="1">
+            <a:schemeClr val="accent1"/>
+          </a:lnRef>
+          <a:fillRef idx="3">
+            <a:schemeClr val="accent1"/>
+          </a:fillRef>
+          <a:effectRef idx="2">
+            <a:schemeClr val="accent1"/>
+          </a:effectRef>
+          <a:fontRef idx="minor">
+            <a:schemeClr val="lt1"/>
+          </a:fontRef>
+        </p:style>
+        <p:txBody>
+          <a:bodyPr rtlCol="0" anchor="ctr"/>
+          <a:lstStyle/>
+          <a:p>
+            <a:pPr algn="ctr"/>
+          </a:p>
+        </p:txBody>
+      </p:sp>
+      <p:sp>
+        <p:nvSpPr>
+          <p:cNvPr id="8" name="TextBox 7"/>
+          <p:cNvSpPr txBox="1"/>
+          <p:nvPr/>
+        </p:nvSpPr>
+        <p:spPr>
+          <a:xfrm>
+            <a:off x="1005840" y="2871216"/>
+            <a:ext cx="3931920" cy="548640"/>
+          </a:xfrm>
+          <a:prstGeom prst="rect">
+            <a:avLst/>
+          </a:prstGeom>
+          <a:noFill/>
+        </p:spPr>
+        <p:txBody>
+          <a:bodyPr wrap="square" anchor="t">
+            <a:spAutoFit/>
+          </a:bodyPr>
+          <a:lstStyle/>
+          <a:p>
+            <a:pPr algn="l"/>
+            <a:r>
+              <a:rPr sz="1500" b="1">
+                <a:solidFill>
+                  <a:srgbClr val="00C896"/>
+                </a:solidFill>
+                <a:latin typeface="Segoe UI"/>
+              </a:rPr>
+              <a:t>🔑 API keys persistentes</a:t>
+            </a:r>
+          </a:p>
+        </p:txBody>
+      </p:sp>
+      <p:sp>
+        <p:nvSpPr>
+          <p:cNvPr id="9" name="TextBox 8"/>
+          <p:cNvSpPr txBox="1"/>
+          <p:nvPr/>
+        </p:nvSpPr>
+        <p:spPr>
+          <a:xfrm>
+            <a:off x="5303520" y="2816352"/>
+            <a:ext cx="6217920" cy="640080"/>
+          </a:xfrm>
+          <a:prstGeom prst="rect">
+            <a:avLst/>
+          </a:prstGeom>
+          <a:noFill/>
+        </p:spPr>
+        <p:txBody>
+          <a:bodyPr wrap="square" anchor="t">
+            <a:spAutoFit/>
+          </a:bodyPr>
+          <a:lstStyle/>
+          <a:p>
+            <a:pPr algn="l"/>
+            <a:r>
+              <a:rPr sz="1400" b="0">
+                <a:solidFill>
+                  <a:srgbClr val="F5F6FA"/>
+                </a:solidFill>
+                <a:latin typeface="Segoe UI"/>
+              </a:rPr>
+              <a:t>Se cargan una vez desde la pestaña Configuración (o por variables de entorno) y quedan guardadas.</a:t>
+            </a:r>
+          </a:p>
+        </p:txBody>
+      </p:sp>
+      <p:sp>
+        <p:nvSpPr>
+          <p:cNvPr id="10" name="Rounded Rectangle 9"/>
+          <p:cNvSpPr/>
+          <p:nvPr/>
+        </p:nvSpPr>
+        <p:spPr>
+          <a:xfrm>
+            <a:off x="822960" y="3621024"/>
+            <a:ext cx="4206240" cy="786384"/>
+          </a:xfrm>
+          <a:prstGeom prst="roundRect">
+            <a:avLst/>
+          </a:prstGeom>
+          <a:solidFill>
+            <a:srgbClr val="1A1F2E"/>
+          </a:solidFill>
+          <a:ln w="12700">
+            <a:solidFill>
+              <a:srgbClr val="00C896"/>
+            </a:solidFill>
+          </a:ln>
+          <a:effectLst/>
+        </p:spPr>
+        <p:style>
+          <a:lnRef idx="1">
+            <a:schemeClr val="accent1"/>
+          </a:lnRef>
+          <a:fillRef idx="3">
+            <a:schemeClr val="accent1"/>
+          </a:fillRef>
+          <a:effectRef idx="2">
+            <a:schemeClr val="accent1"/>
+          </a:effectRef>
+          <a:fontRef idx="minor">
+            <a:schemeClr val="lt1"/>
+          </a:fontRef>
+        </p:style>
+        <p:txBody>
+          <a:bodyPr rtlCol="0" anchor="ctr"/>
+          <a:lstStyle/>
+          <a:p>
+            <a:pPr algn="ctr"/>
+          </a:p>
+        </p:txBody>
+      </p:sp>
+      <p:sp>
+        <p:nvSpPr>
+          <p:cNvPr id="11" name="TextBox 10"/>
+          <p:cNvSpPr txBox="1"/>
+          <p:nvPr/>
+        </p:nvSpPr>
+        <p:spPr>
+          <a:xfrm>
+            <a:off x="1005840" y="3767328"/>
+            <a:ext cx="3931920" cy="548640"/>
+          </a:xfrm>
+          <a:prstGeom prst="rect">
+            <a:avLst/>
+          </a:prstGeom>
+          <a:noFill/>
+        </p:spPr>
+        <p:txBody>
+          <a:bodyPr wrap="square" anchor="t">
+            <a:spAutoFit/>
+          </a:bodyPr>
+          <a:lstStyle/>
+          <a:p>
+            <a:pPr algn="l"/>
+            <a:r>
+              <a:rPr sz="1500" b="1">
+                <a:solidFill>
+                  <a:srgbClr val="00C896"/>
+                </a:solidFill>
+                <a:latin typeface="Segoe UI"/>
+              </a:rPr>
+              <a:t>☎️ Integración telefónica</a:t>
+            </a:r>
+          </a:p>
+        </p:txBody>
+      </p:sp>
+      <p:sp>
+        <p:nvSpPr>
+          <p:cNvPr id="12" name="TextBox 11"/>
+          <p:cNvSpPr txBox="1"/>
+          <p:nvPr/>
+        </p:nvSpPr>
+        <p:spPr>
+          <a:xfrm>
+            <a:off x="5303520" y="3712464"/>
+            <a:ext cx="6217920" cy="640080"/>
+          </a:xfrm>
+          <a:prstGeom prst="rect">
+            <a:avLst/>
+          </a:prstGeom>
+          <a:noFill/>
+        </p:spPr>
+        <p:txBody>
+          <a:bodyPr wrap="square" anchor="t">
+            <a:spAutoFit/>
+          </a:bodyPr>
+          <a:lstStyle/>
+          <a:p>
+            <a:pPr algn="l"/>
+            <a:r>
+              <a:rPr sz="1400" b="0">
+                <a:solidFill>
+                  <a:srgbClr val="F5F6FA"/>
+                </a:solidFill>
+                <a:latin typeface="Segoe UI"/>
+              </a:rPr>
+              <a:t>Conectores para Avaya/Genesys/Twilio (SIPREC · Media Streams · DMCC) — grabación o streaming en vivo.</a:t>
+            </a:r>
+          </a:p>
+        </p:txBody>
+      </p:sp>
+      <p:sp>
+        <p:nvSpPr>
+          <p:cNvPr id="13" name="Rounded Rectangle 12"/>
+          <p:cNvSpPr/>
+          <p:nvPr/>
+        </p:nvSpPr>
+        <p:spPr>
+          <a:xfrm>
+            <a:off x="822960" y="4517136"/>
+            <a:ext cx="4206240" cy="786384"/>
+          </a:xfrm>
+          <a:prstGeom prst="roundRect">
+            <a:avLst/>
+          </a:prstGeom>
+          <a:solidFill>
+            <a:srgbClr val="1A1F2E"/>
+          </a:solidFill>
+          <a:ln w="12700">
+            <a:solidFill>
+              <a:srgbClr val="00C896"/>
+            </a:solidFill>
+          </a:ln>
+          <a:effectLst/>
+        </p:spPr>
+        <p:style>
+          <a:lnRef idx="1">
+            <a:schemeClr val="accent1"/>
+          </a:lnRef>
+          <a:fillRef idx="3">
+            <a:schemeClr val="accent1"/>
+          </a:fillRef>
+          <a:effectRef idx="2">
+            <a:schemeClr val="accent1"/>
+          </a:effectRef>
+          <a:fontRef idx="minor">
+            <a:schemeClr val="lt1"/>
+          </a:fontRef>
+        </p:style>
+        <p:txBody>
+          <a:bodyPr rtlCol="0" anchor="ctr"/>
+          <a:lstStyle/>
+          <a:p>
+            <a:pPr algn="ctr"/>
+          </a:p>
+        </p:txBody>
+      </p:sp>
+      <p:sp>
+        <p:nvSpPr>
+          <p:cNvPr id="14" name="TextBox 13"/>
+          <p:cNvSpPr txBox="1"/>
+          <p:nvPr/>
+        </p:nvSpPr>
+        <p:spPr>
+          <a:xfrm>
+            <a:off x="1005840" y="4663440"/>
+            <a:ext cx="3931920" cy="548640"/>
+          </a:xfrm>
+          <a:prstGeom prst="rect">
+            <a:avLst/>
+          </a:prstGeom>
+          <a:noFill/>
+        </p:spPr>
+        <p:txBody>
+          <a:bodyPr wrap="square" anchor="t">
+            <a:spAutoFit/>
+          </a:bodyPr>
+          <a:lstStyle/>
+          <a:p>
+            <a:pPr algn="l"/>
+            <a:r>
+              <a:rPr sz="1500" b="1">
+                <a:solidFill>
+                  <a:srgbClr val="00C896"/>
+                </a:solidFill>
+                <a:latin typeface="Segoe UI"/>
+              </a:rPr>
+              <a:t>✅ Calidad asegurada</a:t>
+            </a:r>
+          </a:p>
+        </p:txBody>
+      </p:sp>
+      <p:sp>
+        <p:nvSpPr>
+          <p:cNvPr id="15" name="TextBox 14"/>
+          <p:cNvSpPr txBox="1"/>
+          <p:nvPr/>
+        </p:nvSpPr>
+        <p:spPr>
+          <a:xfrm>
+            <a:off x="5303520" y="4608576"/>
+            <a:ext cx="6217920" cy="640080"/>
+          </a:xfrm>
+          <a:prstGeom prst="rect">
+            <a:avLst/>
+          </a:prstGeom>
+          <a:noFill/>
+        </p:spPr>
+        <p:txBody>
+          <a:bodyPr wrap="square" anchor="t">
+            <a:spAutoFit/>
+          </a:bodyPr>
+          <a:lstStyle/>
+          <a:p>
+            <a:pPr algn="l"/>
+            <a:r>
+              <a:rPr sz="1400" b="0">
+                <a:solidFill>
+                  <a:srgbClr val="F5F6FA"/>
+                </a:solidFill>
+                <a:latin typeface="Segoe UI"/>
+              </a:rPr>
+              <a:t>Suite de tests + CI (GitHub Actions) y reentrenamiento programado del modelo ProbPago.</a:t>
+            </a:r>
+          </a:p>
+        </p:txBody>
+      </p:sp>
+      <p:sp>
+        <p:nvSpPr>
+          <p:cNvPr id="16" name="Rounded Rectangle 15"/>
+          <p:cNvSpPr/>
+          <p:nvPr/>
+        </p:nvSpPr>
+        <p:spPr>
+          <a:xfrm>
+            <a:off x="822960" y="5413248"/>
+            <a:ext cx="4206240" cy="786384"/>
+          </a:xfrm>
+          <a:prstGeom prst="roundRect">
+            <a:avLst/>
+          </a:prstGeom>
+          <a:solidFill>
+            <a:srgbClr val="1A1F2E"/>
+          </a:solidFill>
+          <a:ln w="12700">
+            <a:solidFill>
+              <a:srgbClr val="00C896"/>
+            </a:solidFill>
+          </a:ln>
+          <a:effectLst/>
+        </p:spPr>
+        <p:style>
+          <a:lnRef idx="1">
+            <a:schemeClr val="accent1"/>
+          </a:lnRef>
+          <a:fillRef idx="3">
+            <a:schemeClr val="accent1"/>
+          </a:fillRef>
+          <a:effectRef idx="2">
+            <a:schemeClr val="accent1"/>
+          </a:effectRef>
+          <a:fontRef idx="minor">
+            <a:schemeClr val="lt1"/>
+          </a:fontRef>
+        </p:style>
+        <p:txBody>
+          <a:bodyPr rtlCol="0" anchor="ctr"/>
+          <a:lstStyle/>
+          <a:p>
+            <a:pPr algn="ctr"/>
+          </a:p>
+        </p:txBody>
+      </p:sp>
+      <p:sp>
+        <p:nvSpPr>
+          <p:cNvPr id="17" name="TextBox 16"/>
+          <p:cNvSpPr txBox="1"/>
+          <p:nvPr/>
+        </p:nvSpPr>
+        <p:spPr>
+          <a:xfrm>
+            <a:off x="1005840" y="5559552"/>
+            <a:ext cx="3931920" cy="548640"/>
+          </a:xfrm>
+          <a:prstGeom prst="rect">
+            <a:avLst/>
+          </a:prstGeom>
+          <a:noFill/>
+        </p:spPr>
+        <p:txBody>
+          <a:bodyPr wrap="square" anchor="t">
+            <a:spAutoFit/>
+          </a:bodyPr>
+          <a:lstStyle/>
+          <a:p>
+            <a:pPr algn="l"/>
+            <a:r>
+              <a:rPr sz="1500" b="1">
+                <a:solidFill>
+                  <a:srgbClr val="00C896"/>
+                </a:solidFill>
+                <a:latin typeface="Segoe UI"/>
+              </a:rPr>
+              <a:t>🔒 Sin datos sensibles</a:t>
+            </a:r>
+          </a:p>
+        </p:txBody>
+      </p:sp>
+      <p:sp>
+        <p:nvSpPr>
+          <p:cNvPr id="18" name="TextBox 17"/>
+          <p:cNvSpPr txBox="1"/>
+          <p:nvPr/>
+        </p:nvSpPr>
+        <p:spPr>
+          <a:xfrm>
+            <a:off x="5303520" y="5504688"/>
+            <a:ext cx="6217920" cy="640080"/>
+          </a:xfrm>
+          <a:prstGeom prst="rect">
+            <a:avLst/>
+          </a:prstGeom>
+          <a:noFill/>
+        </p:spPr>
+        <p:txBody>
+          <a:bodyPr wrap="square" anchor="t">
+            <a:spAutoFit/>
+          </a:bodyPr>
+          <a:lstStyle/>
+          <a:p>
+            <a:pPr algn="l"/>
+            <a:r>
+              <a:rPr sz="1400" b="0">
+                <a:solidFill>
+                  <a:srgbClr val="F5F6FA"/>
+                </a:solidFill>
+                <a:latin typeface="Segoe UI"/>
+              </a:rPr>
+              <a:t>Dataset sintético, sin nombres de clientes. Reemplazable por la cartera real de la empresa.</a:t>
+            </a:r>
+          </a:p>
+        </p:txBody>
+      </p:sp>
+    </p:spTree>
+  </p:cSld>
+  <p:clrMapOvr>
+    <a:masterClrMapping/>
+  </p:clrMapOvr>
+</p:sld>
+</file>
+
+<file path=ppt/slides/slide18.xml><?xml version="1.0" encoding="utf-8"?>
 <p:sld xmlns:a="http://schemas.openxmlformats.org/drawingml/2006/main" xmlns:p="http://schemas.openxmlformats.org/presentationml/2006/main" xmlns:r="http://schemas.openxmlformats.org/officeDocument/2006/relationships">
   <p:cSld>
     <p:bg>

--- a/presentation/Kobra_Presentacion_Gerencial.pptx
+++ b/presentation/Kobra_Presentacion_Gerencial.pptx
@@ -4171,7 +4171,7 @@
                 </a:solidFill>
                 <a:latin typeface="Segoe UI"/>
               </a:rPr>
-              <a:t>Impacto de Kobra en la gestión</a:t>
+              <a:t>Cómo se mide el impacto de Kobra</a:t>
             </a:r>
           </a:p>
         </p:txBody>
@@ -4246,11 +4246,11 @@
             <a:r>
               <a:rPr sz="1500" b="0">
                 <a:solidFill>
-                  <a:srgbClr val="9AA4B2"/>
-                </a:solidFill>
-                <a:latin typeface="Segoe UI"/>
-              </a:rPr>
-              <a:t>Gestores que usan Kobra vs. grupo de control (mismo período)</a:t>
+                  <a:srgbClr val="FDCB6E"/>
+                </a:solidFill>
+                <a:latin typeface="Segoe UI"/>
+              </a:rPr>
+              <a:t>Metodología: gestores con Kobra vs. grupo de control, mismo período. Cifras ILUSTRATIVAS sobre datos sintéticos — no son resultados medidos.</a:t>
             </a:r>
           </a:p>
         </p:txBody>
@@ -4668,7 +4668,7 @@
                 </a:solidFill>
                 <a:latin typeface="Segoe UI"/>
               </a:rPr>
-              <a:t>Y la mejora se sostiene y crece mes a mes con la adopción de las herramientas.</a:t>
+              <a:t>En un piloto real, este mismo análisis (control vs. adopción) produce el impacto MEDIDO — esa es la evidencia que se presenta, no esta simulación.</a:t>
             </a:r>
           </a:p>
         </p:txBody>
@@ -6172,7 +6172,7 @@
                 </a:solidFill>
                 <a:latin typeface="Segoe UI"/>
               </a:rPr>
-              <a:t>Modelo de Machine Learning que estima la probabilidad de pago de cada deudor.</a:t>
+              <a:t>Modelo de Machine Learning que estima la probabilidad de pago de cada deudor. Selección de modelos con validación cruzada + calibración.</a:t>
             </a:r>
           </a:p>
         </p:txBody>
@@ -6207,7 +6207,7 @@
                 </a:solidFill>
                 <a:latin typeface="Segoe UI"/>
               </a:rPr>
-              <a:t>AUC 0.8705 · Lift 1.69x en el top decil</a:t>
+              <a:t>Se entrena y valida con la cartera real del cliente</a:t>
             </a:r>
           </a:p>
         </p:txBody>
@@ -8018,7 +8018,7 @@
                 </a:solidFill>
                 <a:latin typeface="Segoe UI"/>
               </a:rPr>
-              <a:t>Priorizando por ProbPago, el equipo concentra el esfuerzo donde está el valor recuperable.</a:t>
+              <a:t>Datos sintéticos ilustrativos: muestran cómo Kobra prioriza el esfuerzo donde está el valor recuperable. Con la cartera real, estos KPIs se calculan de verdad.</a:t>
             </a:r>
           </a:p>
         </p:txBody>

--- a/presentation/Kobra_Presentacion_Gerencial.pptx
+++ b/presentation/Kobra_Presentacion_Gerencial.pptx
@@ -3155,9 +3155,33 @@
           </a:p>
         </p:txBody>
       </p:sp>
-      <p:sp>
-        <p:nvSpPr>
-          <p:cNvPr id="3" name="TextBox 2"/>
+      <p:pic>
+        <p:nvPicPr>
+          <p:cNvPr id="3" name="Picture 2" descr="kobra_icon.png"/>
+          <p:cNvPicPr>
+            <a:picLocks noChangeAspect="1"/>
+          </p:cNvPicPr>
+          <p:nvPr/>
+        </p:nvPicPr>
+        <p:blipFill>
+          <a:blip r:embed="rId2"/>
+          <a:stretch>
+            <a:fillRect/>
+          </a:stretch>
+        </p:blipFill>
+        <p:spPr>
+          <a:xfrm>
+            <a:off x="5413248" y="777240"/>
+            <a:ext cx="1371600" cy="1371600"/>
+          </a:xfrm>
+          <a:prstGeom prst="rect">
+            <a:avLst/>
+          </a:prstGeom>
+        </p:spPr>
+      </p:pic>
+      <p:sp>
+        <p:nvSpPr>
+          <p:cNvPr id="4" name="TextBox 3"/>
           <p:cNvSpPr txBox="1"/>
           <p:nvPr/>
         </p:nvSpPr>
@@ -3185,14 +3209,14 @@
                 </a:solidFill>
                 <a:latin typeface="Segoe UI"/>
               </a:rPr>
-              <a:t>🐍 Kobra</a:t>
-            </a:r>
-          </a:p>
-        </p:txBody>
-      </p:sp>
-      <p:sp>
-        <p:nvSpPr>
-          <p:cNvPr id="4" name="TextBox 3"/>
+              <a:t>Kobra</a:t>
+            </a:r>
+          </a:p>
+        </p:txBody>
+      </p:sp>
+      <p:sp>
+        <p:nvSpPr>
+          <p:cNvPr id="5" name="TextBox 4"/>
           <p:cNvSpPr txBox="1"/>
           <p:nvPr/>
         </p:nvSpPr>
@@ -3227,7 +3251,7 @@
       </p:sp>
       <p:sp>
         <p:nvSpPr>
-          <p:cNvPr id="5" name="TextBox 4"/>
+          <p:cNvPr id="6" name="TextBox 5"/>
           <p:cNvSpPr txBox="1"/>
           <p:nvPr/>
         </p:nvSpPr>
@@ -3262,7 +3286,7 @@
       </p:sp>
       <p:sp>
         <p:nvSpPr>
-          <p:cNvPr id="6" name="TextBox 5"/>
+          <p:cNvPr id="7" name="TextBox 6"/>
           <p:cNvSpPr txBox="1"/>
           <p:nvPr/>
         </p:nvSpPr>
@@ -5608,9 +5632,33 @@
         <p:nvPr/>
       </p:nvGrpSpPr>
       <p:grpSpPr/>
-      <p:sp>
-        <p:nvSpPr>
-          <p:cNvPr id="2" name="TextBox 1"/>
+      <p:pic>
+        <p:nvPicPr>
+          <p:cNvPr id="2" name="Picture 1" descr="kobra_icon.png"/>
+          <p:cNvPicPr>
+            <a:picLocks noChangeAspect="1"/>
+          </p:cNvPicPr>
+          <p:nvPr/>
+        </p:nvPicPr>
+        <p:blipFill>
+          <a:blip r:embed="rId2"/>
+          <a:stretch>
+            <a:fillRect/>
+          </a:stretch>
+        </p:blipFill>
+        <p:spPr>
+          <a:xfrm>
+            <a:off x="5641848" y="1051560"/>
+            <a:ext cx="914400" cy="914400"/>
+          </a:xfrm>
+          <a:prstGeom prst="rect">
+            <a:avLst/>
+          </a:prstGeom>
+        </p:spPr>
+      </p:pic>
+      <p:sp>
+        <p:nvSpPr>
+          <p:cNvPr id="3" name="TextBox 2"/>
           <p:cNvSpPr txBox="1"/>
           <p:nvPr/>
         </p:nvSpPr>
@@ -5645,7 +5693,7 @@
       </p:sp>
       <p:sp>
         <p:nvSpPr>
-          <p:cNvPr id="3" name="TextBox 2"/>
+          <p:cNvPr id="4" name="TextBox 3"/>
           <p:cNvSpPr txBox="1"/>
           <p:nvPr/>
         </p:nvSpPr>
@@ -5673,14 +5721,14 @@
                 </a:solidFill>
                 <a:latin typeface="Segoe UI"/>
               </a:rPr>
-              <a:t>🐍 Kobra · Cobranzas Inteligente</a:t>
-            </a:r>
-          </a:p>
-        </p:txBody>
-      </p:sp>
-      <p:sp>
-        <p:nvSpPr>
-          <p:cNvPr id="4" name="TextBox 3"/>
+              <a:t>Kobra · Cobranzas Inteligente</a:t>
+            </a:r>
+          </a:p>
+        </p:txBody>
+      </p:sp>
+      <p:sp>
+        <p:nvSpPr>
+          <p:cNvPr id="5" name="TextBox 4"/>
           <p:cNvSpPr txBox="1"/>
           <p:nvPr/>
         </p:nvSpPr>

--- a/presentation/Kobra_Presentacion_Gerencial.pptx
+++ b/presentation/Kobra_Presentacion_Gerencial.pptx
@@ -3155,9 +3155,33 @@
           </a:p>
         </p:txBody>
       </p:sp>
-      <p:sp>
-        <p:nvSpPr>
-          <p:cNvPr id="3" name="TextBox 2"/>
+      <p:pic>
+        <p:nvPicPr>
+          <p:cNvPr id="3" name="Picture 2" descr="kobra_icon.png"/>
+          <p:cNvPicPr>
+            <a:picLocks noChangeAspect="1"/>
+          </p:cNvPicPr>
+          <p:nvPr/>
+        </p:nvPicPr>
+        <p:blipFill>
+          <a:blip r:embed="rId2"/>
+          <a:stretch>
+            <a:fillRect/>
+          </a:stretch>
+        </p:blipFill>
+        <p:spPr>
+          <a:xfrm>
+            <a:off x="5413248" y="777240"/>
+            <a:ext cx="1371600" cy="1371600"/>
+          </a:xfrm>
+          <a:prstGeom prst="rect">
+            <a:avLst/>
+          </a:prstGeom>
+        </p:spPr>
+      </p:pic>
+      <p:sp>
+        <p:nvSpPr>
+          <p:cNvPr id="4" name="TextBox 3"/>
           <p:cNvSpPr txBox="1"/>
           <p:nvPr/>
         </p:nvSpPr>
@@ -3185,14 +3209,14 @@
                 </a:solidFill>
                 <a:latin typeface="Segoe UI"/>
               </a:rPr>
-              <a:t>🐍 Kobra</a:t>
-            </a:r>
-          </a:p>
-        </p:txBody>
-      </p:sp>
-      <p:sp>
-        <p:nvSpPr>
-          <p:cNvPr id="4" name="TextBox 3"/>
+              <a:t>Kobra</a:t>
+            </a:r>
+          </a:p>
+        </p:txBody>
+      </p:sp>
+      <p:sp>
+        <p:nvSpPr>
+          <p:cNvPr id="5" name="TextBox 4"/>
           <p:cNvSpPr txBox="1"/>
           <p:nvPr/>
         </p:nvSpPr>
@@ -3227,7 +3251,7 @@
       </p:sp>
       <p:sp>
         <p:nvSpPr>
-          <p:cNvPr id="5" name="TextBox 4"/>
+          <p:cNvPr id="6" name="TextBox 5"/>
           <p:cNvSpPr txBox="1"/>
           <p:nvPr/>
         </p:nvSpPr>
@@ -3262,7 +3286,7 @@
       </p:sp>
       <p:sp>
         <p:nvSpPr>
-          <p:cNvPr id="6" name="TextBox 5"/>
+          <p:cNvPr id="7" name="TextBox 6"/>
           <p:cNvSpPr txBox="1"/>
           <p:nvPr/>
         </p:nvSpPr>
@@ -4171,7 +4195,7 @@
                 </a:solidFill>
                 <a:latin typeface="Segoe UI"/>
               </a:rPr>
-              <a:t>Impacto de Kobra en la gestión</a:t>
+              <a:t>Cómo se mide el impacto de Kobra</a:t>
             </a:r>
           </a:p>
         </p:txBody>
@@ -4246,11 +4270,11 @@
             <a:r>
               <a:rPr sz="1500" b="0">
                 <a:solidFill>
-                  <a:srgbClr val="9AA4B2"/>
-                </a:solidFill>
-                <a:latin typeface="Segoe UI"/>
-              </a:rPr>
-              <a:t>Gestores que usan Kobra vs. grupo de control (mismo período)</a:t>
+                  <a:srgbClr val="FDCB6E"/>
+                </a:solidFill>
+                <a:latin typeface="Segoe UI"/>
+              </a:rPr>
+              <a:t>Metodología: gestores con Kobra vs. grupo de control, mismo período. Cifras ILUSTRATIVAS sobre datos sintéticos — no son resultados medidos.</a:t>
             </a:r>
           </a:p>
         </p:txBody>
@@ -4668,7 +4692,7 @@
                 </a:solidFill>
                 <a:latin typeface="Segoe UI"/>
               </a:rPr>
-              <a:t>Y la mejora se sostiene y crece mes a mes con la adopción de las herramientas.</a:t>
+              <a:t>En un piloto real, este mismo análisis (control vs. adopción) produce el impacto MEDIDO — esa es la evidencia que se presenta, no esta simulación.</a:t>
             </a:r>
           </a:p>
         </p:txBody>
@@ -5608,9 +5632,33 @@
         <p:nvPr/>
       </p:nvGrpSpPr>
       <p:grpSpPr/>
-      <p:sp>
-        <p:nvSpPr>
-          <p:cNvPr id="2" name="TextBox 1"/>
+      <p:pic>
+        <p:nvPicPr>
+          <p:cNvPr id="2" name="Picture 1" descr="kobra_icon.png"/>
+          <p:cNvPicPr>
+            <a:picLocks noChangeAspect="1"/>
+          </p:cNvPicPr>
+          <p:nvPr/>
+        </p:nvPicPr>
+        <p:blipFill>
+          <a:blip r:embed="rId2"/>
+          <a:stretch>
+            <a:fillRect/>
+          </a:stretch>
+        </p:blipFill>
+        <p:spPr>
+          <a:xfrm>
+            <a:off x="5641848" y="1051560"/>
+            <a:ext cx="914400" cy="914400"/>
+          </a:xfrm>
+          <a:prstGeom prst="rect">
+            <a:avLst/>
+          </a:prstGeom>
+        </p:spPr>
+      </p:pic>
+      <p:sp>
+        <p:nvSpPr>
+          <p:cNvPr id="3" name="TextBox 2"/>
           <p:cNvSpPr txBox="1"/>
           <p:nvPr/>
         </p:nvSpPr>
@@ -5645,7 +5693,7 @@
       </p:sp>
       <p:sp>
         <p:nvSpPr>
-          <p:cNvPr id="3" name="TextBox 2"/>
+          <p:cNvPr id="4" name="TextBox 3"/>
           <p:cNvSpPr txBox="1"/>
           <p:nvPr/>
         </p:nvSpPr>
@@ -5673,14 +5721,14 @@
                 </a:solidFill>
                 <a:latin typeface="Segoe UI"/>
               </a:rPr>
-              <a:t>🐍 Kobra · Cobranzas Inteligente</a:t>
-            </a:r>
-          </a:p>
-        </p:txBody>
-      </p:sp>
-      <p:sp>
-        <p:nvSpPr>
-          <p:cNvPr id="4" name="TextBox 3"/>
+              <a:t>Kobra · Cobranzas Inteligente</a:t>
+            </a:r>
+          </a:p>
+        </p:txBody>
+      </p:sp>
+      <p:sp>
+        <p:nvSpPr>
+          <p:cNvPr id="5" name="TextBox 4"/>
           <p:cNvSpPr txBox="1"/>
           <p:nvPr/>
         </p:nvSpPr>
@@ -6172,7 +6220,7 @@
                 </a:solidFill>
                 <a:latin typeface="Segoe UI"/>
               </a:rPr>
-              <a:t>Modelo de Machine Learning que estima la probabilidad de pago de cada deudor.</a:t>
+              <a:t>Modelo de Machine Learning que estima la probabilidad de pago de cada deudor. Selección de modelos con validación cruzada + calibración.</a:t>
             </a:r>
           </a:p>
         </p:txBody>
@@ -6207,7 +6255,7 @@
                 </a:solidFill>
                 <a:latin typeface="Segoe UI"/>
               </a:rPr>
-              <a:t>AUC 0.8705 · Lift 1.69x en el top decil</a:t>
+              <a:t>Se entrena y valida con la cartera real del cliente</a:t>
             </a:r>
           </a:p>
         </p:txBody>
@@ -8018,7 +8066,7 @@
                 </a:solidFill>
                 <a:latin typeface="Segoe UI"/>
               </a:rPr>
-              <a:t>Priorizando por ProbPago, el equipo concentra el esfuerzo donde está el valor recuperable.</a:t>
+              <a:t>Datos sintéticos ilustrativos: muestran cómo Kobra prioriza el esfuerzo donde está el valor recuperable. Con la cartera real, estos KPIs se calculan de verdad.</a:t>
             </a:r>
           </a:p>
         </p:txBody>

--- a/presentation/Kobra_Presentacion_Gerencial.pptx
+++ b/presentation/Kobra_Presentacion_Gerencial.pptx
@@ -3209,7 +3209,7 @@
                 </a:solidFill>
                 <a:latin typeface="Segoe UI"/>
               </a:rPr>
-              <a:t>Kobra</a:t>
+              <a:t>Kobra IA</a:t>
             </a:r>
           </a:p>
         </p:txBody>
@@ -3244,7 +3244,7 @@
                 </a:solidFill>
                 <a:latin typeface="Segoe UI"/>
               </a:rPr>
-              <a:t>Plataforma de Cobranzas Inteligente</a:t>
+              <a:t>Plataforma de Cobranzas Inteligentes</a:t>
             </a:r>
           </a:p>
         </p:txBody>
@@ -5721,7 +5721,7 @@
                 </a:solidFill>
                 <a:latin typeface="Segoe UI"/>
               </a:rPr>
-              <a:t>Kobra · Cobranzas Inteligente</a:t>
+              <a:t>Kobra IA · Cobranzas Inteligentes</a:t>
             </a:r>
           </a:p>
         </p:txBody>
